--- a/кейс2_каналы_продаж/Кейс2_Питч_каналы_продаж.pptx
+++ b/кейс2_каналы_продаж/Кейс2_Питч_каналы_продаж.pptx
@@ -17,9 +17,11 @@
     <p:sldId id="265" r:id="rId11"/>
     <p:sldId id="266" r:id="rId12"/>
     <p:sldId id="267" r:id="rId13"/>
+    <p:sldId id="268" r:id="rId14"/>
+    <p:sldId id="269" r:id="rId15"/>
   </p:sldIdLst>
   <p:notesMasterIdLst>
-    <p:notesMasterId r:id="rId14"/>
+    <p:notesMasterId r:id="rId16"/>
   </p:notesMasterIdLst>
   <p:sldSz cx="12192000" cy="6858000"/>
   <p:notesSz cx="6858000" cy="12192000"/>
@@ -447,6 +449,1161 @@
               <c:strCache>
                 <c:ptCount val="1"/>
                 <c:pt idx="0">
+                  <c:v>Цена клиента (CAC)</c:v>
+                </c:pt>
+              </c:strCache>
+            </c:strRef>
+          </c:tx>
+          <c:spPr>
+            <a:solidFill>
+              <a:srgbClr val="FCA311"/>
+            </a:solidFill>
+            <a:effectLst/>
+          </c:spPr>
+          <c:invertIfNegative val="0"/>
+          <c:dLbls>
+            <c:numFmt formatCode="#,##0" sourceLinked="0"/>
+            <c:txPr>
+              <a:bodyPr/>
+              <a:lstStyle/>
+              <a:p>
+                <a:pPr>
+                  <a:defRPr b="0" i="0" strike="noStrike" sz="1000" u="none">
+                    <a:solidFill>
+                      <a:srgbClr val="1F2937"/>
+                    </a:solidFill>
+                    <a:latin typeface="Calibri"/>
+                  </a:defRPr>
+                </a:pPr>
+              </a:p>
+            </c:txPr>
+            <c:showLegendKey val="0"/>
+            <c:showVal val="1"/>
+            <c:showCatName val="0"/>
+            <c:showSerName val="0"/>
+            <c:showPercent val="0"/>
+            <c:showBubbleSize val="0"/>
+            <c:showLeaderLines val="0"/>
+          </c:dLbls>
+          <c:cat>
+            <c:multiLvlStrRef>
+              <c:f>Sheet1!$A$2:$A$6</c:f>
+              <c:multiLvlStrCache>
+                <c:ptCount val="5"/>
+                <c:lvl>
+                  <c:pt idx="0">
+                    <c:v>сайт</c:v>
+                  </c:pt>
+                  <c:pt idx="1">
+                    <c:v>директ</c:v>
+                  </c:pt>
+                  <c:pt idx="2">
+                    <c:v>LaModa</c:v>
+                  </c:pt>
+                  <c:pt idx="3">
+                    <c:v>Блогеры</c:v>
+                  </c:pt>
+                  <c:pt idx="4">
+                    <c:v>ВК</c:v>
+                  </c:pt>
+                </c:lvl>
+              </c:multiLvlStrCache>
+            </c:multiLvlStrRef>
+          </c:cat>
+          <c:val>
+            <c:numRef>
+              <c:f>Sheet1!$B$2:$B$6</c:f>
+              <c:numCache>
+                <c:formatCode>General</c:formatCode>
+                <c:ptCount val="5"/>
+                <c:pt idx="0">
+                  <c:v>385</c:v>
+                </c:pt>
+                <c:pt idx="1">
+                  <c:v>1000</c:v>
+                </c:pt>
+                <c:pt idx="2">
+                  <c:v>400</c:v>
+                </c:pt>
+                <c:pt idx="3">
+                  <c:v>750</c:v>
+                </c:pt>
+                <c:pt idx="4">
+                  <c:v>1429</c:v>
+                </c:pt>
+              </c:numCache>
+            </c:numRef>
+          </c:val>
+        </c:ser>
+        <c:ser>
+          <c:idx val="1"/>
+          <c:order val="1"/>
+          <c:tx>
+            <c:strRef>
+              <c:f>Sheet1!$C$1</c:f>
+              <c:strCache>
+                <c:ptCount val="1"/>
+                <c:pt idx="0">
+                  <c:v>Маржа с заказа</c:v>
+                </c:pt>
+              </c:strCache>
+            </c:strRef>
+          </c:tx>
+          <c:spPr>
+            <a:solidFill>
+              <a:srgbClr val="D7DAE0"/>
+            </a:solidFill>
+            <a:effectLst/>
+          </c:spPr>
+          <c:invertIfNegative val="0"/>
+          <c:dLbls>
+            <c:numFmt formatCode="#,##0" sourceLinked="0"/>
+            <c:txPr>
+              <a:bodyPr/>
+              <a:lstStyle/>
+              <a:p>
+                <a:pPr>
+                  <a:defRPr b="0" i="0" strike="noStrike" sz="1000" u="none">
+                    <a:solidFill>
+                      <a:srgbClr val="1F2937"/>
+                    </a:solidFill>
+                    <a:latin typeface="Calibri"/>
+                  </a:defRPr>
+                </a:pPr>
+              </a:p>
+            </c:txPr>
+            <c:showLegendKey val="0"/>
+            <c:showVal val="1"/>
+            <c:showCatName val="0"/>
+            <c:showSerName val="0"/>
+            <c:showPercent val="0"/>
+            <c:showBubbleSize val="0"/>
+            <c:showLeaderLines val="0"/>
+          </c:dLbls>
+          <c:cat>
+            <c:multiLvlStrRef>
+              <c:f>Sheet1!$A$2:$A$6</c:f>
+              <c:multiLvlStrCache>
+                <c:ptCount val="5"/>
+                <c:lvl>
+                  <c:pt idx="0">
+                    <c:v>сайт</c:v>
+                  </c:pt>
+                  <c:pt idx="1">
+                    <c:v>директ</c:v>
+                  </c:pt>
+                  <c:pt idx="2">
+                    <c:v>LaModa</c:v>
+                  </c:pt>
+                  <c:pt idx="3">
+                    <c:v>Блогеры</c:v>
+                  </c:pt>
+                  <c:pt idx="4">
+                    <c:v>ВК</c:v>
+                  </c:pt>
+                </c:lvl>
+              </c:multiLvlStrCache>
+            </c:multiLvlStrRef>
+          </c:cat>
+          <c:val>
+            <c:numRef>
+              <c:f>Sheet1!$C$2:$C$6</c:f>
+              <c:numCache>
+                <c:formatCode>General</c:formatCode>
+                <c:ptCount val="5"/>
+                <c:pt idx="0">
+                  <c:v>2171</c:v>
+                </c:pt>
+                <c:pt idx="1">
+                  <c:v>2171</c:v>
+                </c:pt>
+                <c:pt idx="2">
+                  <c:v>1202</c:v>
+                </c:pt>
+                <c:pt idx="3">
+                  <c:v>1839</c:v>
+                </c:pt>
+                <c:pt idx="4">
+                  <c:v>1763</c:v>
+                </c:pt>
+              </c:numCache>
+            </c:numRef>
+          </c:val>
+        </c:ser>
+        <c:dLbls>
+          <c:numFmt formatCode="#,##0" sourceLinked="0"/>
+          <c:txPr>
+            <a:bodyPr/>
+            <a:lstStyle/>
+            <a:p>
+              <a:pPr>
+                <a:defRPr b="0" i="0" strike="noStrike" sz="1000" u="none">
+                  <a:solidFill>
+                    <a:srgbClr val="1F2937"/>
+                  </a:solidFill>
+                  <a:latin typeface="Calibri"/>
+                </a:defRPr>
+              </a:pPr>
+            </a:p>
+          </c:txPr>
+          <c:showLegendKey val="0"/>
+          <c:showVal val="1"/>
+          <c:showCatName val="0"/>
+          <c:showSerName val="0"/>
+          <c:showPercent val="0"/>
+          <c:showBubbleSize val="0"/>
+          <c:showLeaderLines val="0"/>
+        </c:dLbls>
+        <c:gapWidth val="55"/>
+        <c:overlap val="0"/>
+        <c:axId val="2094734554"/>
+        <c:axId val="2094734552"/>
+        <c:axId val="2094734556"/>
+      </c:barChart>
+      <c:catAx>
+        <c:axId val="2094734554"/>
+        <c:scaling>
+          <c:orientation val="minMax"/>
+        </c:scaling>
+        <c:delete val="0"/>
+        <c:axPos val="b"/>
+        <c:numFmt formatCode="General" sourceLinked="1"/>
+        <c:majorTickMark val="out"/>
+        <c:minorTickMark val="none"/>
+        <c:tickLblPos val="low"/>
+        <c:spPr>
+          <a:ln w="12700" cap="flat">
+            <a:solidFill>
+              <a:srgbClr val="888888"/>
+            </a:solidFill>
+            <a:prstDash val="solid"/>
+            <a:round/>
+          </a:ln>
+        </c:spPr>
+        <c:txPr>
+          <a:bodyPr/>
+          <a:lstStyle/>
+          <a:p>
+            <a:pPr>
+              <a:defRPr sz="1200" b="0" i="0" u="none" strike="noStrike">
+                <a:solidFill>
+                  <a:srgbClr val="1F2937"/>
+                </a:solidFill>
+                <a:latin typeface="Calibri"/>
+              </a:defRPr>
+            </a:pPr>
+            <a:endParaRPr lang="en-US"/>
+          </a:p>
+        </c:txPr>
+        <c:crossAx val="2094734552"/>
+        <c:crosses val="autoZero"/>
+        <c:auto val="1"/>
+        <c:lblAlgn val="ctr"/>
+        <c:noMultiLvlLbl val="1"/>
+      </c:catAx>
+      <c:valAx>
+        <c:axId val="2094734552"/>
+        <c:scaling>
+          <c:orientation val="minMax"/>
+        </c:scaling>
+        <c:delete val="0"/>
+        <c:axPos val="l"/>
+        <c:majorGridlines>
+          <c:spPr>
+            <a:ln w="12700" cap="flat">
+              <a:solidFill>
+                <a:srgbClr val="E5E7EB"/>
+              </a:solidFill>
+              <a:prstDash val="solid"/>
+              <a:round/>
+            </a:ln>
+          </c:spPr>
+        </c:majorGridlines>
+        <c:numFmt formatCode="General" sourceLinked="0"/>
+        <c:majorTickMark val="out"/>
+        <c:minorTickMark val="none"/>
+        <c:tickLblPos val="nextTo"/>
+        <c:spPr>
+          <a:ln w="12700" cap="flat">
+            <a:solidFill>
+              <a:srgbClr val="888888"/>
+            </a:solidFill>
+            <a:prstDash val="solid"/>
+            <a:round/>
+          </a:ln>
+        </c:spPr>
+        <c:txPr>
+          <a:bodyPr/>
+          <a:lstStyle/>
+          <a:p>
+            <a:pPr>
+              <a:defRPr sz="1100" b="0" i="0" u="none" strike="noStrike">
+                <a:solidFill>
+                  <a:srgbClr val="6B7280"/>
+                </a:solidFill>
+                <a:latin typeface="Calibri"/>
+              </a:defRPr>
+            </a:pPr>
+            <a:endParaRPr lang="en-US"/>
+          </a:p>
+        </c:txPr>
+        <c:crossAx val="2094734554"/>
+        <c:crosses val="autoZero"/>
+        <c:crossBetween val="between"/>
+      </c:valAx>
+      <c:spPr>
+        <a:noFill/>
+        <a:ln>
+          <a:noFill/>
+        </a:ln>
+        <a:effectLst/>
+      </c:spPr>
+    </c:plotArea>
+    <c:legend>
+      <c:legendPos val="t"/>
+      <c:overlay val="0"/>
+      <c:txPr>
+        <a:bodyPr/>
+        <a:lstStyle/>
+        <a:p>
+          <a:pPr>
+            <a:defRPr sz="1200">
+              <a:solidFill>
+                <a:srgbClr val="1F2937"/>
+              </a:solidFill>
+              <a:latin typeface="Calibri"/>
+              <a:cs typeface="Calibri"/>
+            </a:defRPr>
+          </a:pPr>
+          <a:endParaRPr lang="en-US"/>
+        </a:p>
+      </c:txPr>
+    </c:legend>
+    <c:plotVisOnly val="1"/>
+    <c:dispBlanksAs val="span"/>
+  </c:chart>
+  <c:spPr>
+    <a:noFill/>
+    <a:ln>
+      <a:noFill/>
+    </a:ln>
+    <a:effectLst/>
+  </c:spPr>
+  <c:externalData r:id="rId1">
+    <c:autoUpdate val="0"/>
+  </c:externalData>
+</c:chartSpace>
+</file>
+
+<file path=ppt/charts/chart3.xml><?xml version="1.0" encoding="utf-8"?>
+<c:chartSpace xmlns:c="http://schemas.openxmlformats.org/drawingml/2006/chart" xmlns:a="http://schemas.openxmlformats.org/drawingml/2006/main" xmlns:r="http://schemas.openxmlformats.org/officeDocument/2006/relationships">
+  <c:date1904 val="0"/>
+  <c:roundedCorners val="1"/>
+  <c:chart>
+    <c:title>
+      <c:tx>
+        <c:rich>
+          <a:bodyPr/>
+          <a:lstStyle/>
+          <a:p>
+            <a:pPr>
+              <a:defRPr sz="1500" b="0" i="0" u="none" strike="noStrike">
+                <a:solidFill>
+                  <a:srgbClr val="14213D"/>
+                </a:solidFill>
+                <a:latin typeface="Calibri"/>
+              </a:defRPr>
+            </a:pPr>
+            <a:r>
+              <a:rPr sz="1500" b="0" i="0" u="none" strike="noStrike">
+                <a:solidFill>
+                  <a:srgbClr val="14213D"/>
+                </a:solidFill>
+                <a:latin typeface="Calibri"/>
+              </a:rPr>
+              <a:t>Доля в бюджете — 54 000 ₽</a:t>
+            </a:r>
+          </a:p>
+        </c:rich>
+      </c:tx>
+      <c:layout/>
+      <c:overlay val="0"/>
+    </c:title>
+    <c:autoTitleDeleted val="0"/>
+    <c:plotArea>
+      <c:layout/>
+      <c:doughnutChart>
+        <c:varyColors val="1"/>
+        <c:ser>
+          <c:idx val="0"/>
+          <c:order val="0"/>
+          <c:tx>
+            <c:strRef>
+              <c:f>Sheet1!$B$1</c:f>
+              <c:strCache>
+                <c:ptCount val="1"/>
+                <c:pt idx="0">
+                  <c:v>Затраты</c:v>
+                </c:pt>
+              </c:strCache>
+            </c:strRef>
+          </c:tx>
+          <c:spPr>
+            <a:solidFill>
+              <a:schemeClr val="accent1"/>
+            </a:solidFill>
+            <a:ln w="9525" cap="flat">
+              <a:solidFill>
+                <a:srgbClr val="F9F9F9"/>
+              </a:solidFill>
+              <a:prstDash val="solid"/>
+              <a:round/>
+            </a:ln>
+            <a:effectLst/>
+          </c:spPr>
+          <c:dPt>
+            <c:idx val="0"/>
+            <c:bubble3D val="0"/>
+            <c:spPr>
+              <a:solidFill>
+                <a:srgbClr val="FCA311"/>
+              </a:solidFill>
+              <a:ln w="25400" cap="flat">
+                <a:solidFill>
+                  <a:srgbClr val="FFFFFF"/>
+                </a:solidFill>
+                <a:prstDash val="solid"/>
+                <a:round/>
+              </a:ln>
+              <a:effectLst/>
+            </c:spPr>
+          </c:dPt>
+          <c:dPt>
+            <c:idx val="1"/>
+            <c:bubble3D val="0"/>
+            <c:spPr>
+              <a:solidFill>
+                <a:srgbClr val="8095B5"/>
+              </a:solidFill>
+              <a:ln w="25400" cap="flat">
+                <a:solidFill>
+                  <a:srgbClr val="FFFFFF"/>
+                </a:solidFill>
+                <a:prstDash val="solid"/>
+                <a:round/>
+              </a:ln>
+              <a:effectLst/>
+            </c:spPr>
+          </c:dPt>
+          <c:dPt>
+            <c:idx val="2"/>
+            <c:bubble3D val="0"/>
+            <c:spPr>
+              <a:solidFill>
+                <a:srgbClr val="14213D"/>
+              </a:solidFill>
+              <a:ln w="25400" cap="flat">
+                <a:solidFill>
+                  <a:srgbClr val="FFFFFF"/>
+                </a:solidFill>
+                <a:prstDash val="solid"/>
+                <a:round/>
+              </a:ln>
+              <a:effectLst/>
+            </c:spPr>
+          </c:dPt>
+          <c:dPt>
+            <c:idx val="3"/>
+            <c:bubble3D val="0"/>
+            <c:spPr>
+              <a:solidFill>
+                <a:srgbClr val="3E5C86"/>
+              </a:solidFill>
+              <a:ln w="25400" cap="flat">
+                <a:solidFill>
+                  <a:srgbClr val="FFFFFF"/>
+                </a:solidFill>
+                <a:prstDash val="solid"/>
+                <a:round/>
+              </a:ln>
+              <a:effectLst/>
+            </c:spPr>
+          </c:dPt>
+          <c:dPt>
+            <c:idx val="4"/>
+            <c:bubble3D val="0"/>
+            <c:spPr>
+              <a:solidFill>
+                <a:srgbClr val="C1121F"/>
+              </a:solidFill>
+              <a:ln w="25400" cap="flat">
+                <a:solidFill>
+                  <a:srgbClr val="FFFFFF"/>
+                </a:solidFill>
+                <a:prstDash val="solid"/>
+                <a:round/>
+              </a:ln>
+              <a:effectLst/>
+            </c:spPr>
+          </c:dPt>
+          <c:dLbls>
+            <c:dLbl>
+              <c:idx val="0"/>
+              <c:numFmt formatCode="General" sourceLinked="0"/>
+              <c:spPr/>
+              <c:txPr>
+                <a:bodyPr/>
+                <a:lstStyle/>
+                <a:p>
+                  <a:pPr>
+                    <a:defRPr sz="1200" b="0" i="0" u="none" strike="noStrike">
+                      <a:solidFill>
+                        <a:srgbClr val="000000"/>
+                      </a:solidFill>
+                      <a:latin typeface="Arial"/>
+                    </a:defRPr>
+                  </a:pPr>
+                </a:p>
+              </c:txPr>
+              <c:showLegendKey val="0"/>
+              <c:showVal val="0"/>
+              <c:showCatName val="0"/>
+              <c:showSerName val="0"/>
+              <c:showPercent val="0"/>
+              <c:showBubbleSize val="0"/>
+            </c:dLbl>
+            <c:dLbl>
+              <c:idx val="1"/>
+              <c:numFmt formatCode="General" sourceLinked="0"/>
+              <c:spPr/>
+              <c:txPr>
+                <a:bodyPr/>
+                <a:lstStyle/>
+                <a:p>
+                  <a:pPr>
+                    <a:defRPr sz="1200" b="0" i="0" u="none" strike="noStrike">
+                      <a:solidFill>
+                        <a:srgbClr val="000000"/>
+                      </a:solidFill>
+                      <a:latin typeface="Arial"/>
+                    </a:defRPr>
+                  </a:pPr>
+                </a:p>
+              </c:txPr>
+              <c:showLegendKey val="0"/>
+              <c:showVal val="0"/>
+              <c:showCatName val="0"/>
+              <c:showSerName val="0"/>
+              <c:showPercent val="0"/>
+              <c:showBubbleSize val="0"/>
+            </c:dLbl>
+            <c:dLbl>
+              <c:idx val="2"/>
+              <c:numFmt formatCode="General" sourceLinked="0"/>
+              <c:spPr/>
+              <c:txPr>
+                <a:bodyPr/>
+                <a:lstStyle/>
+                <a:p>
+                  <a:pPr>
+                    <a:defRPr sz="1200" b="0" i="0" u="none" strike="noStrike">
+                      <a:solidFill>
+                        <a:srgbClr val="000000"/>
+                      </a:solidFill>
+                      <a:latin typeface="Arial"/>
+                    </a:defRPr>
+                  </a:pPr>
+                </a:p>
+              </c:txPr>
+              <c:showLegendKey val="0"/>
+              <c:showVal val="0"/>
+              <c:showCatName val="0"/>
+              <c:showSerName val="0"/>
+              <c:showPercent val="0"/>
+              <c:showBubbleSize val="0"/>
+            </c:dLbl>
+            <c:dLbl>
+              <c:idx val="3"/>
+              <c:numFmt formatCode="General" sourceLinked="0"/>
+              <c:spPr/>
+              <c:txPr>
+                <a:bodyPr/>
+                <a:lstStyle/>
+                <a:p>
+                  <a:pPr>
+                    <a:defRPr sz="1200" b="0" i="0" u="none" strike="noStrike">
+                      <a:solidFill>
+                        <a:srgbClr val="000000"/>
+                      </a:solidFill>
+                      <a:latin typeface="Arial"/>
+                    </a:defRPr>
+                  </a:pPr>
+                </a:p>
+              </c:txPr>
+              <c:showLegendKey val="0"/>
+              <c:showVal val="0"/>
+              <c:showCatName val="0"/>
+              <c:showSerName val="0"/>
+              <c:showPercent val="0"/>
+              <c:showBubbleSize val="0"/>
+            </c:dLbl>
+            <c:dLbl>
+              <c:idx val="4"/>
+              <c:numFmt formatCode="General" sourceLinked="0"/>
+              <c:spPr/>
+              <c:txPr>
+                <a:bodyPr/>
+                <a:lstStyle/>
+                <a:p>
+                  <a:pPr>
+                    <a:defRPr sz="1200" b="0" i="0" u="none" strike="noStrike">
+                      <a:solidFill>
+                        <a:srgbClr val="000000"/>
+                      </a:solidFill>
+                      <a:latin typeface="Arial"/>
+                    </a:defRPr>
+                  </a:pPr>
+                </a:p>
+              </c:txPr>
+              <c:showLegendKey val="0"/>
+              <c:showVal val="0"/>
+              <c:showCatName val="0"/>
+              <c:showSerName val="0"/>
+              <c:showPercent val="0"/>
+              <c:showBubbleSize val="0"/>
+            </c:dLbl>
+            <c:numFmt formatCode="General" sourceLinked="0"/>
+            <c:txPr>
+              <a:bodyPr/>
+              <a:lstStyle/>
+              <a:p>
+                <a:pPr>
+                  <a:defRPr sz="1800" b="0" i="0" u="none" strike="noStrike">
+                    <a:solidFill>
+                      <a:srgbClr val="000000"/>
+                    </a:solidFill>
+                    <a:latin typeface="Arial"/>
+                  </a:defRPr>
+                </a:pPr>
+              </a:p>
+            </c:txPr>
+            <c:showLegendKey val="0"/>
+            <c:showVal val="0"/>
+            <c:showCatName val="1"/>
+            <c:showSerName val="0"/>
+            <c:showPercent val="1"/>
+            <c:showBubbleSize val="0"/>
+            <c:showLeaderLines val="0"/>
+          </c:dLbls>
+          <c:cat>
+            <c:strRef>
+              <c:f>Sheet1!$A$2:$A$6</c:f>
+              <c:strCache>
+                <c:ptCount val="5"/>
+                <c:pt idx="0">
+                  <c:v>сайт</c:v>
+                </c:pt>
+                <c:pt idx="1">
+                  <c:v>директ</c:v>
+                </c:pt>
+                <c:pt idx="2">
+                  <c:v>LaModa</c:v>
+                </c:pt>
+                <c:pt idx="3">
+                  <c:v>Блогеры</c:v>
+                </c:pt>
+                <c:pt idx="4">
+                  <c:v>ВК</c:v>
+                </c:pt>
+              </c:strCache>
+            </c:strRef>
+          </c:cat>
+          <c:val>
+            <c:numRef>
+              <c:f>Sheet1!$B$2:$B$6</c:f>
+              <c:numCache>
+                <c:ptCount val="5"/>
+                <c:pt idx="0">
+                  <c:v>5000</c:v>
+                </c:pt>
+                <c:pt idx="1">
+                  <c:v>12000</c:v>
+                </c:pt>
+                <c:pt idx="2">
+                  <c:v>12000</c:v>
+                </c:pt>
+                <c:pt idx="3">
+                  <c:v>15000</c:v>
+                </c:pt>
+                <c:pt idx="4">
+                  <c:v>10000</c:v>
+                </c:pt>
+              </c:numCache>
+            </c:numRef>
+          </c:val>
+        </c:ser>
+        <c:firstSliceAng val="0"/>
+        <c:holeSize val="55"/>
+      </c:doughnutChart>
+      <c:spPr>
+        <a:noFill/>
+        <a:ln>
+          <a:noFill/>
+        </a:ln>
+        <a:effectLst/>
+      </c:spPr>
+    </c:plotArea>
+    <c:legend>
+      <c:legendPos val="b"/>
+      <c:overlay val="0"/>
+      <c:txPr>
+        <a:bodyPr/>
+        <a:lstStyle/>
+        <a:p>
+          <a:pPr>
+            <a:defRPr sz="1200">
+              <a:solidFill>
+                <a:srgbClr val="1F2937"/>
+              </a:solidFill>
+              <a:latin typeface="Calibri"/>
+              <a:cs typeface="Calibri"/>
+            </a:defRPr>
+          </a:pPr>
+          <a:endParaRPr lang="en-US"/>
+        </a:p>
+      </c:txPr>
+    </c:legend>
+    <c:plotVisOnly val="1"/>
+    <c:dispBlanksAs val="span"/>
+  </c:chart>
+  <c:spPr>
+    <a:noFill/>
+    <a:ln>
+      <a:noFill/>
+    </a:ln>
+    <a:effectLst/>
+  </c:spPr>
+  <c:externalData r:id="rId1">
+    <c:autoUpdate val="0"/>
+  </c:externalData>
+</c:chartSpace>
+</file>
+
+<file path=ppt/charts/chart4.xml><?xml version="1.0" encoding="utf-8"?>
+<c:chartSpace xmlns:c="http://schemas.openxmlformats.org/drawingml/2006/chart" xmlns:a="http://schemas.openxmlformats.org/drawingml/2006/main" xmlns:r="http://schemas.openxmlformats.org/officeDocument/2006/relationships">
+  <c:date1904 val="0"/>
+  <c:roundedCorners val="1"/>
+  <c:chart>
+    <c:title>
+      <c:tx>
+        <c:rich>
+          <a:bodyPr/>
+          <a:lstStyle/>
+          <a:p>
+            <a:pPr>
+              <a:defRPr sz="1500" b="0" i="0" u="none" strike="noStrike">
+                <a:solidFill>
+                  <a:srgbClr val="14213D"/>
+                </a:solidFill>
+                <a:latin typeface="Calibri"/>
+              </a:defRPr>
+            </a:pPr>
+            <a:r>
+              <a:rPr sz="1500" b="0" i="0" u="none" strike="noStrike">
+                <a:solidFill>
+                  <a:srgbClr val="14213D"/>
+                </a:solidFill>
+                <a:latin typeface="Calibri"/>
+              </a:rPr>
+              <a:t>Доля в прибыли — 139 457 ₽</a:t>
+            </a:r>
+          </a:p>
+        </c:rich>
+      </c:tx>
+      <c:layout/>
+      <c:overlay val="0"/>
+    </c:title>
+    <c:autoTitleDeleted val="0"/>
+    <c:plotArea>
+      <c:layout/>
+      <c:doughnutChart>
+        <c:varyColors val="1"/>
+        <c:ser>
+          <c:idx val="0"/>
+          <c:order val="0"/>
+          <c:tx>
+            <c:strRef>
+              <c:f>Sheet1!$B$1</c:f>
+              <c:strCache>
+                <c:ptCount val="1"/>
+                <c:pt idx="0">
+                  <c:v>Прибыль</c:v>
+                </c:pt>
+              </c:strCache>
+            </c:strRef>
+          </c:tx>
+          <c:spPr>
+            <a:solidFill>
+              <a:schemeClr val="accent1"/>
+            </a:solidFill>
+            <a:ln w="9525" cap="flat">
+              <a:solidFill>
+                <a:srgbClr val="F9F9F9"/>
+              </a:solidFill>
+              <a:prstDash val="solid"/>
+              <a:round/>
+            </a:ln>
+            <a:effectLst/>
+          </c:spPr>
+          <c:dPt>
+            <c:idx val="0"/>
+            <c:bubble3D val="0"/>
+            <c:spPr>
+              <a:solidFill>
+                <a:srgbClr val="FCA311"/>
+              </a:solidFill>
+              <a:ln w="25400" cap="flat">
+                <a:solidFill>
+                  <a:srgbClr val="FFFFFF"/>
+                </a:solidFill>
+                <a:prstDash val="solid"/>
+                <a:round/>
+              </a:ln>
+              <a:effectLst/>
+            </c:spPr>
+          </c:dPt>
+          <c:dPt>
+            <c:idx val="1"/>
+            <c:bubble3D val="0"/>
+            <c:spPr>
+              <a:solidFill>
+                <a:srgbClr val="8095B5"/>
+              </a:solidFill>
+              <a:ln w="25400" cap="flat">
+                <a:solidFill>
+                  <a:srgbClr val="FFFFFF"/>
+                </a:solidFill>
+                <a:prstDash val="solid"/>
+                <a:round/>
+              </a:ln>
+              <a:effectLst/>
+            </c:spPr>
+          </c:dPt>
+          <c:dPt>
+            <c:idx val="2"/>
+            <c:bubble3D val="0"/>
+            <c:spPr>
+              <a:solidFill>
+                <a:srgbClr val="14213D"/>
+              </a:solidFill>
+              <a:ln w="25400" cap="flat">
+                <a:solidFill>
+                  <a:srgbClr val="FFFFFF"/>
+                </a:solidFill>
+                <a:prstDash val="solid"/>
+                <a:round/>
+              </a:ln>
+              <a:effectLst/>
+            </c:spPr>
+          </c:dPt>
+          <c:dPt>
+            <c:idx val="3"/>
+            <c:bubble3D val="0"/>
+            <c:spPr>
+              <a:solidFill>
+                <a:srgbClr val="3E5C86"/>
+              </a:solidFill>
+              <a:ln w="25400" cap="flat">
+                <a:solidFill>
+                  <a:srgbClr val="FFFFFF"/>
+                </a:solidFill>
+                <a:prstDash val="solid"/>
+                <a:round/>
+              </a:ln>
+              <a:effectLst/>
+            </c:spPr>
+          </c:dPt>
+          <c:dPt>
+            <c:idx val="4"/>
+            <c:bubble3D val="0"/>
+            <c:spPr>
+              <a:solidFill>
+                <a:srgbClr val="C1121F"/>
+              </a:solidFill>
+              <a:ln w="25400" cap="flat">
+                <a:solidFill>
+                  <a:srgbClr val="FFFFFF"/>
+                </a:solidFill>
+                <a:prstDash val="solid"/>
+                <a:round/>
+              </a:ln>
+              <a:effectLst/>
+            </c:spPr>
+          </c:dPt>
+          <c:dLbls>
+            <c:dLbl>
+              <c:idx val="0"/>
+              <c:numFmt formatCode="General" sourceLinked="0"/>
+              <c:spPr/>
+              <c:txPr>
+                <a:bodyPr/>
+                <a:lstStyle/>
+                <a:p>
+                  <a:pPr>
+                    <a:defRPr sz="1200" b="0" i="0" u="none" strike="noStrike">
+                      <a:solidFill>
+                        <a:srgbClr val="000000"/>
+                      </a:solidFill>
+                      <a:latin typeface="Arial"/>
+                    </a:defRPr>
+                  </a:pPr>
+                </a:p>
+              </c:txPr>
+              <c:showLegendKey val="0"/>
+              <c:showVal val="0"/>
+              <c:showCatName val="0"/>
+              <c:showSerName val="0"/>
+              <c:showPercent val="0"/>
+              <c:showBubbleSize val="0"/>
+            </c:dLbl>
+            <c:dLbl>
+              <c:idx val="1"/>
+              <c:numFmt formatCode="General" sourceLinked="0"/>
+              <c:spPr/>
+              <c:txPr>
+                <a:bodyPr/>
+                <a:lstStyle/>
+                <a:p>
+                  <a:pPr>
+                    <a:defRPr sz="1200" b="0" i="0" u="none" strike="noStrike">
+                      <a:solidFill>
+                        <a:srgbClr val="000000"/>
+                      </a:solidFill>
+                      <a:latin typeface="Arial"/>
+                    </a:defRPr>
+                  </a:pPr>
+                </a:p>
+              </c:txPr>
+              <c:showLegendKey val="0"/>
+              <c:showVal val="0"/>
+              <c:showCatName val="0"/>
+              <c:showSerName val="0"/>
+              <c:showPercent val="0"/>
+              <c:showBubbleSize val="0"/>
+            </c:dLbl>
+            <c:dLbl>
+              <c:idx val="2"/>
+              <c:numFmt formatCode="General" sourceLinked="0"/>
+              <c:spPr/>
+              <c:txPr>
+                <a:bodyPr/>
+                <a:lstStyle/>
+                <a:p>
+                  <a:pPr>
+                    <a:defRPr sz="1200" b="0" i="0" u="none" strike="noStrike">
+                      <a:solidFill>
+                        <a:srgbClr val="000000"/>
+                      </a:solidFill>
+                      <a:latin typeface="Arial"/>
+                    </a:defRPr>
+                  </a:pPr>
+                </a:p>
+              </c:txPr>
+              <c:showLegendKey val="0"/>
+              <c:showVal val="0"/>
+              <c:showCatName val="0"/>
+              <c:showSerName val="0"/>
+              <c:showPercent val="0"/>
+              <c:showBubbleSize val="0"/>
+            </c:dLbl>
+            <c:dLbl>
+              <c:idx val="3"/>
+              <c:numFmt formatCode="General" sourceLinked="0"/>
+              <c:spPr/>
+              <c:txPr>
+                <a:bodyPr/>
+                <a:lstStyle/>
+                <a:p>
+                  <a:pPr>
+                    <a:defRPr sz="1200" b="0" i="0" u="none" strike="noStrike">
+                      <a:solidFill>
+                        <a:srgbClr val="000000"/>
+                      </a:solidFill>
+                      <a:latin typeface="Arial"/>
+                    </a:defRPr>
+                  </a:pPr>
+                </a:p>
+              </c:txPr>
+              <c:showLegendKey val="0"/>
+              <c:showVal val="0"/>
+              <c:showCatName val="0"/>
+              <c:showSerName val="0"/>
+              <c:showPercent val="0"/>
+              <c:showBubbleSize val="0"/>
+            </c:dLbl>
+            <c:dLbl>
+              <c:idx val="4"/>
+              <c:numFmt formatCode="General" sourceLinked="0"/>
+              <c:spPr/>
+              <c:txPr>
+                <a:bodyPr/>
+                <a:lstStyle/>
+                <a:p>
+                  <a:pPr>
+                    <a:defRPr sz="1200" b="0" i="0" u="none" strike="noStrike">
+                      <a:solidFill>
+                        <a:srgbClr val="000000"/>
+                      </a:solidFill>
+                      <a:latin typeface="Arial"/>
+                    </a:defRPr>
+                  </a:pPr>
+                </a:p>
+              </c:txPr>
+              <c:showLegendKey val="0"/>
+              <c:showVal val="0"/>
+              <c:showCatName val="0"/>
+              <c:showSerName val="0"/>
+              <c:showPercent val="0"/>
+              <c:showBubbleSize val="0"/>
+            </c:dLbl>
+            <c:numFmt formatCode="General" sourceLinked="0"/>
+            <c:txPr>
+              <a:bodyPr/>
+              <a:lstStyle/>
+              <a:p>
+                <a:pPr>
+                  <a:defRPr sz="1800" b="0" i="0" u="none" strike="noStrike">
+                    <a:solidFill>
+                      <a:srgbClr val="000000"/>
+                    </a:solidFill>
+                    <a:latin typeface="Arial"/>
+                  </a:defRPr>
+                </a:pPr>
+              </a:p>
+            </c:txPr>
+            <c:showLegendKey val="0"/>
+            <c:showVal val="0"/>
+            <c:showCatName val="1"/>
+            <c:showSerName val="0"/>
+            <c:showPercent val="1"/>
+            <c:showBubbleSize val="0"/>
+            <c:showLeaderLines val="0"/>
+          </c:dLbls>
+          <c:cat>
+            <c:strRef>
+              <c:f>Sheet1!$A$2:$A$6</c:f>
+              <c:strCache>
+                <c:ptCount val="5"/>
+                <c:pt idx="0">
+                  <c:v>сайт</c:v>
+                </c:pt>
+                <c:pt idx="1">
+                  <c:v>директ</c:v>
+                </c:pt>
+                <c:pt idx="2">
+                  <c:v>LaModa</c:v>
+                </c:pt>
+                <c:pt idx="3">
+                  <c:v>Блогеры</c:v>
+                </c:pt>
+                <c:pt idx="4">
+                  <c:v>ВК</c:v>
+                </c:pt>
+              </c:strCache>
+            </c:strRef>
+          </c:cat>
+          <c:val>
+            <c:numRef>
+              <c:f>Sheet1!$B$2:$B$6</c:f>
+              <c:numCache>
+                <c:ptCount val="5"/>
+                <c:pt idx="0">
+                  <c:v>28223</c:v>
+                </c:pt>
+                <c:pt idx="1">
+                  <c:v>26052</c:v>
+                </c:pt>
+                <c:pt idx="2">
+                  <c:v>36060</c:v>
+                </c:pt>
+                <c:pt idx="3">
+                  <c:v>36780</c:v>
+                </c:pt>
+                <c:pt idx="4">
+                  <c:v>12342</c:v>
+                </c:pt>
+              </c:numCache>
+            </c:numRef>
+          </c:val>
+        </c:ser>
+        <c:firstSliceAng val="0"/>
+        <c:holeSize val="55"/>
+      </c:doughnutChart>
+      <c:spPr>
+        <a:noFill/>
+        <a:ln>
+          <a:noFill/>
+        </a:ln>
+        <a:effectLst/>
+      </c:spPr>
+    </c:plotArea>
+    <c:legend>
+      <c:legendPos val="b"/>
+      <c:overlay val="0"/>
+      <c:txPr>
+        <a:bodyPr/>
+        <a:lstStyle/>
+        <a:p>
+          <a:pPr>
+            <a:defRPr sz="1200">
+              <a:solidFill>
+                <a:srgbClr val="1F2937"/>
+              </a:solidFill>
+              <a:latin typeface="Calibri"/>
+              <a:cs typeface="Calibri"/>
+            </a:defRPr>
+          </a:pPr>
+          <a:endParaRPr lang="en-US"/>
+        </a:p>
+      </c:txPr>
+    </c:legend>
+    <c:plotVisOnly val="1"/>
+    <c:dispBlanksAs val="span"/>
+  </c:chart>
+  <c:spPr>
+    <a:noFill/>
+    <a:ln>
+      <a:noFill/>
+    </a:ln>
+    <a:effectLst/>
+  </c:spPr>
+  <c:externalData r:id="rId1">
+    <c:autoUpdate val="0"/>
+  </c:externalData>
+</c:chartSpace>
+</file>
+
+<file path=ppt/charts/chart5.xml><?xml version="1.0" encoding="utf-8"?>
+<c:chartSpace xmlns:c="http://schemas.openxmlformats.org/drawingml/2006/chart" xmlns:a="http://schemas.openxmlformats.org/drawingml/2006/main" xmlns:r="http://schemas.openxmlformats.org/officeDocument/2006/relationships">
+  <c:date1904 val="0"/>
+  <c:roundedCorners val="1"/>
+  <c:chart>
+    <c:autoTitleDeleted val="1"/>
+    <c:plotArea>
+      <c:layout/>
+      <c:barChart>
+        <c:barDir val="col"/>
+        <c:grouping val="clustered"/>
+        <c:varyColors val="0"/>
+        <c:ser>
+          <c:idx val="0"/>
+          <c:order val="0"/>
+          <c:tx>
+            <c:strRef>
+              <c:f>Sheet1!$B$1</c:f>
+              <c:strCache>
+                <c:ptCount val="1"/>
+                <c:pt idx="0">
                   <c:v>Маржа с заказа, ₽</c:v>
                 </c:pt>
               </c:strCache>
@@ -733,7 +1890,7 @@
 </c:chartSpace>
 </file>
 
-<file path=ppt/charts/chart3.xml><?xml version="1.0" encoding="utf-8"?>
+<file path=ppt/charts/chart6.xml><?xml version="1.0" encoding="utf-8"?>
 <c:chartSpace xmlns:c="http://schemas.openxmlformats.org/drawingml/2006/chart" xmlns:a="http://schemas.openxmlformats.org/drawingml/2006/main" xmlns:r="http://schemas.openxmlformats.org/officeDocument/2006/relationships">
   <c:date1904 val="0"/>
   <c:roundedCorners val="1"/>
@@ -1580,7 +2737,7 @@
           <a:p>
             <a:r>
               <a:rPr lang="en-US" dirty="0"/>
-              <a:t>Модель предложила раскладку, мы поправили её руками — это и есть управленческое решение, а не арифметика.</a:t>
+              <a:t>Если спросят, почему не залить всё в LaModa: потому что каждая футболка там приносит вдвое меньше.</a:t>
             </a:r>
             <a:endParaRPr lang="en-US" dirty="0"/>
           </a:p>
@@ -1668,7 +2825,7 @@
           <a:p>
             <a:r>
               <a:rPr lang="en-US" dirty="0"/>
-              <a:t>Четыре действия, каждое обосновано цифрой из таблицы.</a:t>
+              <a:t>Самый дешёвый резерв роста лежит не в рекламе, а в оплате корзины: брошенные корзины, рассрочка, бесплатная доставка от 3 000 ₽.</a:t>
             </a:r>
             <a:endParaRPr lang="en-US" dirty="0"/>
           </a:p>
@@ -1756,7 +2913,7 @@
           <a:p>
             <a:r>
               <a:rPr lang="en-US" dirty="0"/>
-              <a:t>Финальный тезис. Дальше — вопросы.</a:t>
+              <a:t>Модель предложила раскладку, мы поправили её руками — это и есть управленческое решение, а не арифметика.</a:t>
             </a:r>
             <a:endParaRPr lang="en-US" dirty="0"/>
           </a:p>
@@ -1780,6 +2937,182 @@
             <a:fld id="{F7021451-1387-4CA6-816F-3879F97B5CBC}" type="slidenum">
               <a:rPr lang="en-US"/>
               <a:t>12</a:t>
+            </a:fld>
+            <a:endParaRPr lang="en-US"/>
+          </a:p>
+        </p:txBody>
+      </p:sp>
+    </p:spTree>
+    <p:extLst>
+      <p:ext uri="{BB962C8B-B14F-4D97-AF65-F5344CB8AC3E}">
+        <p14:creationId xmlns:p14="http://schemas.microsoft.com/office/powerpoint/2010/main" val="1024086991"/>
+      </p:ext>
+    </p:extLst>
+  </p:cSld>
+  <p:clrMapOvr>
+    <a:masterClrMapping/>
+  </p:clrMapOvr>
+</p:notes>
+</file>
+
+<file path=ppt/notesSlides/notesSlide13.xml><?xml version="1.0" encoding="utf-8"?>
+<p:notes xmlns:a="http://schemas.openxmlformats.org/drawingml/2006/main" xmlns:r="http://schemas.openxmlformats.org/officeDocument/2006/relationships" xmlns:p="http://schemas.openxmlformats.org/presentationml/2006/main">
+  <p:cSld>
+    <p:spTree>
+      <p:nvGrpSpPr>
+        <p:cNvPr id="1" name=""/>
+        <p:cNvGrpSpPr/>
+        <p:nvPr/>
+      </p:nvGrpSpPr>
+      <p:grpSpPr>
+        <a:xfrm>
+          <a:off x="0" y="0"/>
+          <a:ext cx="0" cy="0"/>
+          <a:chOff x="0" y="0"/>
+          <a:chExt cx="0" cy="0"/>
+        </a:xfrm>
+      </p:grpSpPr>
+      <p:sp>
+        <p:nvSpPr>
+          <p:cNvPr id="2" name="Slide Image Placeholder 1"/>
+          <p:cNvSpPr>
+            <a:spLocks noGrp="1" noRot="1" noChangeAspect="1"/>
+          </p:cNvSpPr>
+          <p:nvPr>
+            <p:ph type="sldImg"/>
+          </p:nvPr>
+        </p:nvSpPr>
+        <p:spPr/>
+      </p:sp>
+      <p:sp>
+        <p:nvSpPr>
+          <p:cNvPr id="3" name="Notes Placeholder 2"/>
+          <p:cNvSpPr>
+            <a:spLocks noGrp="1"/>
+          </p:cNvSpPr>
+          <p:nvPr>
+            <p:ph type="body" idx="1"/>
+          </p:nvPr>
+        </p:nvSpPr>
+        <p:spPr/>
+        <p:txBody>
+          <a:bodyPr/>
+          <a:lstStyle/>
+          <a:p>
+            <a:r>
+              <a:rPr lang="en-US" dirty="0"/>
+              <a:t>Четыре действия, каждое обосновано цифрой из таблицы.</a:t>
+            </a:r>
+            <a:endParaRPr lang="en-US" dirty="0"/>
+          </a:p>
+        </p:txBody>
+      </p:sp>
+      <p:sp>
+        <p:nvSpPr>
+          <p:cNvPr id="4" name="Slide Number Placeholder 3"/>
+          <p:cNvSpPr>
+            <a:spLocks noGrp="1"/>
+          </p:cNvSpPr>
+          <p:nvPr>
+            <p:ph type="sldNum" sz="quarter" idx="10"/>
+          </p:nvPr>
+        </p:nvSpPr>
+        <p:spPr/>
+        <p:txBody>
+          <a:bodyPr/>
+          <a:lstStyle/>
+          <a:p>
+            <a:fld id="{F7021451-1387-4CA6-816F-3879F97B5CBC}" type="slidenum">
+              <a:rPr lang="en-US"/>
+              <a:t>13</a:t>
+            </a:fld>
+            <a:endParaRPr lang="en-US"/>
+          </a:p>
+        </p:txBody>
+      </p:sp>
+    </p:spTree>
+    <p:extLst>
+      <p:ext uri="{BB962C8B-B14F-4D97-AF65-F5344CB8AC3E}">
+        <p14:creationId xmlns:p14="http://schemas.microsoft.com/office/powerpoint/2010/main" val="1024086991"/>
+      </p:ext>
+    </p:extLst>
+  </p:cSld>
+  <p:clrMapOvr>
+    <a:masterClrMapping/>
+  </p:clrMapOvr>
+</p:notes>
+</file>
+
+<file path=ppt/notesSlides/notesSlide14.xml><?xml version="1.0" encoding="utf-8"?>
+<p:notes xmlns:a="http://schemas.openxmlformats.org/drawingml/2006/main" xmlns:r="http://schemas.openxmlformats.org/officeDocument/2006/relationships" xmlns:p="http://schemas.openxmlformats.org/presentationml/2006/main">
+  <p:cSld>
+    <p:spTree>
+      <p:nvGrpSpPr>
+        <p:cNvPr id="1" name=""/>
+        <p:cNvGrpSpPr/>
+        <p:nvPr/>
+      </p:nvGrpSpPr>
+      <p:grpSpPr>
+        <a:xfrm>
+          <a:off x="0" y="0"/>
+          <a:ext cx="0" cy="0"/>
+          <a:chOff x="0" y="0"/>
+          <a:chExt cx="0" cy="0"/>
+        </a:xfrm>
+      </p:grpSpPr>
+      <p:sp>
+        <p:nvSpPr>
+          <p:cNvPr id="2" name="Slide Image Placeholder 1"/>
+          <p:cNvSpPr>
+            <a:spLocks noGrp="1" noRot="1" noChangeAspect="1"/>
+          </p:cNvSpPr>
+          <p:nvPr>
+            <p:ph type="sldImg"/>
+          </p:nvPr>
+        </p:nvSpPr>
+        <p:spPr/>
+      </p:sp>
+      <p:sp>
+        <p:nvSpPr>
+          <p:cNvPr id="3" name="Notes Placeholder 2"/>
+          <p:cNvSpPr>
+            <a:spLocks noGrp="1"/>
+          </p:cNvSpPr>
+          <p:nvPr>
+            <p:ph type="body" idx="1"/>
+          </p:nvPr>
+        </p:nvSpPr>
+        <p:spPr/>
+        <p:txBody>
+          <a:bodyPr/>
+          <a:lstStyle/>
+          <a:p>
+            <a:r>
+              <a:rPr lang="en-US" dirty="0"/>
+              <a:t>Финальный тезис. Дальше — вопросы.</a:t>
+            </a:r>
+            <a:endParaRPr lang="en-US" dirty="0"/>
+          </a:p>
+        </p:txBody>
+      </p:sp>
+      <p:sp>
+        <p:nvSpPr>
+          <p:cNvPr id="4" name="Slide Number Placeholder 3"/>
+          <p:cNvSpPr>
+            <a:spLocks noGrp="1"/>
+          </p:cNvSpPr>
+          <p:nvPr>
+            <p:ph type="sldNum" sz="quarter" idx="10"/>
+          </p:nvPr>
+        </p:nvSpPr>
+        <p:spPr/>
+        <p:txBody>
+          <a:bodyPr/>
+          <a:lstStyle/>
+          <a:p>
+            <a:fld id="{F7021451-1387-4CA6-816F-3879F97B5CBC}" type="slidenum">
+              <a:rPr lang="en-US"/>
+              <a:t>14</a:t>
             </a:fld>
             <a:endParaRPr lang="en-US"/>
           </a:p>
@@ -2284,7 +3617,7 @@
           <a:p>
             <a:r>
               <a:rPr lang="en-US" dirty="0"/>
-              <a:t>Главная мысль защиты: у каналов разные роли. Эффективность и объём — не одно и то же.</a:t>
+              <a:t>CAC — главный тест канала: сравниваем не с нулём, а с маржой. На сайте привлечение съедает 18% маржи, у ВК — 81%.</a:t>
             </a:r>
             <a:endParaRPr lang="en-US" dirty="0"/>
           </a:p>
@@ -2372,7 +3705,7 @@
           <a:p>
             <a:r>
               <a:rPr lang="en-US" dirty="0"/>
-              <a:t>Если спросят, почему не залить всё в LaModa: потому что каждая футболка там приносит вдвое меньше.</a:t>
+              <a:t>Главная мысль защиты: у каналов разные роли. Эффективность и объём — не одно и то же.</a:t>
             </a:r>
             <a:endParaRPr lang="en-US" dirty="0"/>
           </a:p>
@@ -2460,7 +3793,7 @@
           <a:p>
             <a:r>
               <a:rPr lang="en-US" dirty="0"/>
-              <a:t>Самый дешёвый резерв роста лежит не в рекламе, а в оплате корзины: брошенные корзины, рассрочка, бесплатная доставка от 3 000 ₽.</a:t>
+              <a:t>Два кольца об одном и том же месяце. Если доля в прибыли больше доли в бюджете — канал недофинансирован. У сайта разрыв вдвое в плюс, у ВК вдвое в минус.</a:t>
             </a:r>
             <a:endParaRPr lang="en-US" dirty="0"/>
           </a:p>
@@ -3267,7 +4600,7 @@
                 <a:ea typeface="Cambria" pitchFamily="34" charset="-122"/>
                 <a:cs typeface="Cambria" pitchFamily="34" charset="-120"/>
               </a:rPr>
-              <a:t>Решение: бюджет следующего месяца</a:t>
+              <a:t>Парадокс LaModa</a:t>
             </a:r>
             <a:endParaRPr lang="en-US" sz="3400" dirty="0"/>
           </a:p>
@@ -3306,7 +4639,7 @@
                 <a:ea typeface="Calibri" pitchFamily="34" charset="-122"/>
                 <a:cs typeface="Calibri" pitchFamily="34" charset="-120"/>
               </a:rPr>
-              <a:t>54 000 ₽ → 62 000 ₽. Доля канала меняется пропорционально его ROAS</a:t>
+              <a:t>Лучшая воронка в таблице — и худшая маржа</a:t>
             </a:r>
             <a:endParaRPr lang="en-US" sz="1400" dirty="0"/>
           </a:p>
@@ -3319,8 +4652,8 @@
           <p:nvPr/>
         </p:nvGraphicFramePr>
         <p:xfrm>
-          <a:off x="457200" y="1691640"/>
-          <a:ext cx="7315200" cy="3931920"/>
+          <a:off x="457200" y="1645920"/>
+          <a:ext cx="6675120" cy="3931920"/>
         </p:xfrm>
         <a:graphic xmlns:a="http://schemas.openxmlformats.org/drawingml/2006/main">
           <a:graphicData uri="http://schemas.openxmlformats.org/drawingml/2006/chart">
@@ -3336,8 +4669,8 @@
         </p:nvSpPr>
         <p:spPr>
           <a:xfrm>
-            <a:off x="8138160" y="1965960"/>
-            <a:ext cx="3474720" cy="365760"/>
+            <a:off x="7498080" y="1828800"/>
+            <a:ext cx="4114800" cy="329184"/>
           </a:xfrm>
           <a:prstGeom prst="rect">
             <a:avLst/>
@@ -3353,7 +4686,7 @@
               <a:buNone/>
             </a:pPr>
             <a:r>
-              <a:rPr lang="en-US" sz="2000" b="1" dirty="0">
+              <a:rPr lang="en-US" sz="1600" b="1" dirty="0">
                 <a:solidFill>
                   <a:srgbClr val="14213D"/>
                 </a:solidFill>
@@ -3361,9 +4694,9 @@
                 <a:ea typeface="Calibri" pitchFamily="34" charset="-122"/>
                 <a:cs typeface="Calibri" pitchFamily="34" charset="-120"/>
               </a:rPr>
-              <a:t>+6 634 ₽</a:t>
-            </a:r>
-            <a:endParaRPr lang="en-US" sz="2000" dirty="0"/>
+              <a:t>Вход лучший из всех</a:t>
+            </a:r>
+            <a:endParaRPr lang="en-US" sz="1600" dirty="0"/>
           </a:p>
         </p:txBody>
       </p:sp>
@@ -3375,8 +4708,8 @@
         </p:nvSpPr>
         <p:spPr>
           <a:xfrm>
-            <a:off x="8138160" y="2350008"/>
-            <a:ext cx="3474720" cy="731520"/>
+            <a:off x="7498080" y="2194560"/>
+            <a:ext cx="4114800" cy="822960"/>
           </a:xfrm>
           <a:prstGeom prst="rect">
             <a:avLst/>
@@ -3392,7 +4725,7 @@
               <a:buNone/>
             </a:pPr>
             <a:r>
-              <a:rPr lang="en-US" sz="1200" dirty="0">
+              <a:rPr lang="en-US" sz="1300" dirty="0">
                 <a:solidFill>
                   <a:srgbClr val="6B7280"/>
                 </a:solidFill>
@@ -3400,9 +4733,9 @@
                 <a:ea typeface="Calibri" pitchFamily="34" charset="-122"/>
                 <a:cs typeface="Calibri" pitchFamily="34" charset="-120"/>
               </a:rPr>
-              <a:t>сайт — максимальный рост, потолок модели ×2</a:t>
-            </a:r>
-            <a:endParaRPr lang="en-US" sz="1200" dirty="0"/>
+              <a:t>3,00% из показа в переход — втрое лучше сайта и директа. Человек уже внутри магазина одежды.</a:t>
+            </a:r>
+            <a:endParaRPr lang="en-US" sz="1300" dirty="0"/>
           </a:p>
         </p:txBody>
       </p:sp>
@@ -3414,8 +4747,8 @@
         </p:nvSpPr>
         <p:spPr>
           <a:xfrm>
-            <a:off x="8138160" y="3246120"/>
-            <a:ext cx="3474720" cy="365760"/>
+            <a:off x="7498080" y="3200400"/>
+            <a:ext cx="4114800" cy="329184"/>
           </a:xfrm>
           <a:prstGeom prst="rect">
             <a:avLst/>
@@ -3431,7 +4764,7 @@
               <a:buNone/>
             </a:pPr>
             <a:r>
-              <a:rPr lang="en-US" sz="2000" b="1" dirty="0">
+              <a:rPr lang="en-US" sz="1600" b="1" dirty="0">
                 <a:solidFill>
                   <a:srgbClr val="14213D"/>
                 </a:solidFill>
@@ -3439,9 +4772,9 @@
                 <a:ea typeface="Calibri" pitchFamily="34" charset="-122"/>
                 <a:cs typeface="Calibri" pitchFamily="34" charset="-120"/>
               </a:rPr>
-              <a:t>+4 244 ₽</a:t>
-            </a:r>
-            <a:endParaRPr lang="en-US" sz="2000" dirty="0"/>
+              <a:t>Цена — комиссия 35%</a:t>
+            </a:r>
+            <a:endParaRPr lang="en-US" sz="1600" dirty="0"/>
           </a:p>
         </p:txBody>
       </p:sp>
@@ -3453,8 +4786,8 @@
         </p:nvSpPr>
         <p:spPr>
           <a:xfrm>
-            <a:off x="8138160" y="3630168"/>
-            <a:ext cx="3474720" cy="731520"/>
+            <a:off x="7498080" y="3566160"/>
+            <a:ext cx="4114800" cy="1005840"/>
           </a:xfrm>
           <a:prstGeom prst="rect">
             <a:avLst/>
@@ -3470,7 +4803,7 @@
               <a:buNone/>
             </a:pPr>
             <a:r>
-              <a:rPr lang="en-US" sz="1200" dirty="0">
+              <a:rPr lang="en-US" sz="1300" dirty="0">
                 <a:solidFill>
                   <a:srgbClr val="6B7280"/>
                 </a:solidFill>
@@ -3478,22 +4811,44 @@
                 <a:ea typeface="Calibri" pitchFamily="34" charset="-122"/>
                 <a:cs typeface="Calibri" pitchFamily="34" charset="-120"/>
               </a:rPr>
-              <a:t>LaModa — берёт объём немедленно</a:t>
-            </a:r>
-            <a:endParaRPr lang="en-US" sz="1200" dirty="0"/>
-          </a:p>
-        </p:txBody>
-      </p:sp>
-      <p:sp>
-        <p:nvSpPr>
-          <p:cNvPr id="9" name="Text 6"/>
-          <p:cNvSpPr txBox="1"/>
-          <p:nvPr/>
-        </p:nvSpPr>
-        <p:spPr>
-          <a:xfrm>
-            <a:off x="8138160" y="4526280"/>
-            <a:ext cx="3474720" cy="365760"/>
+              <a:t>1 202 ₽ с заказа вместо 2 171 ₽. Мы платим не за трафик, а за чужое доверие: возврат, примерку, отзывы.</a:t>
+            </a:r>
+            <a:endParaRPr lang="en-US" sz="1300" dirty="0"/>
+          </a:p>
+        </p:txBody>
+      </p:sp>
+      <p:sp>
+        <p:nvSpPr>
+          <p:cNvPr id="9" name="Shape 6"/>
+          <p:cNvSpPr/>
+          <p:nvPr/>
+        </p:nvSpPr>
+        <p:spPr>
+          <a:xfrm>
+            <a:off x="548640" y="5029200"/>
+            <a:ext cx="11064240" cy="960120"/>
+          </a:xfrm>
+          <a:prstGeom prst="roundRect">
+            <a:avLst>
+              <a:gd name="adj" fmla="val 4762"/>
+            </a:avLst>
+          </a:prstGeom>
+          <a:solidFill>
+            <a:srgbClr val="14213D"/>
+          </a:solidFill>
+          <a:ln/>
+        </p:spPr>
+      </p:sp>
+      <p:sp>
+        <p:nvSpPr>
+          <p:cNvPr id="10" name="Text 7"/>
+          <p:cNvSpPr txBox="1"/>
+          <p:nvPr/>
+        </p:nvSpPr>
+        <p:spPr>
+          <a:xfrm>
+            <a:off x="914400" y="5212080"/>
+            <a:ext cx="10332720" cy="594360"/>
           </a:xfrm>
           <a:prstGeom prst="rect">
             <a:avLst/>
@@ -3509,95 +4864,17 @@
               <a:buNone/>
             </a:pPr>
             <a:r>
-              <a:rPr lang="en-US" sz="2000" b="1" dirty="0">
-                <a:solidFill>
-                  <a:srgbClr val="C1121F"/>
-                </a:solidFill>
-                <a:latin typeface="Calibri" pitchFamily="34" charset="0"/>
-                <a:ea typeface="Calibri" pitchFamily="34" charset="-122"/>
-                <a:cs typeface="Calibri" pitchFamily="34" charset="-120"/>
-              </a:rPr>
-              <a:t>−4 183 ₽</a:t>
-            </a:r>
-            <a:endParaRPr lang="en-US" sz="2000" dirty="0"/>
-          </a:p>
-        </p:txBody>
-      </p:sp>
-      <p:sp>
-        <p:nvSpPr>
-          <p:cNvPr id="10" name="Text 7"/>
-          <p:cNvSpPr txBox="1"/>
-          <p:nvPr/>
-        </p:nvSpPr>
-        <p:spPr>
-          <a:xfrm>
-            <a:off x="8138160" y="4910328"/>
-            <a:ext cx="3474720" cy="731520"/>
-          </a:xfrm>
-          <a:prstGeom prst="rect">
-            <a:avLst/>
-          </a:prstGeom>
-          <a:noFill/>
-          <a:ln/>
-        </p:spPr>
-        <p:txBody>
-          <a:bodyPr wrap="square" lIns="0" tIns="0" rIns="0" bIns="0" rtlCol="0" anchor="ctr"/>
-          <a:lstStyle/>
-          <a:p>
-            <a:pPr indent="0" marL="0">
-              <a:buNone/>
-            </a:pPr>
-            <a:r>
-              <a:rPr lang="en-US" sz="1200" dirty="0">
-                <a:solidFill>
-                  <a:srgbClr val="6B7280"/>
-                </a:solidFill>
-                <a:latin typeface="Calibri" pitchFamily="34" charset="0"/>
-                <a:ea typeface="Calibri" pitchFamily="34" charset="-122"/>
-                <a:cs typeface="Calibri" pitchFamily="34" charset="-120"/>
-              </a:rPr>
-              <a:t>ВК — сокращаем вдвое, в ноль не выключаем</a:t>
-            </a:r>
-            <a:endParaRPr lang="en-US" sz="1200" dirty="0"/>
-          </a:p>
-        </p:txBody>
-      </p:sp>
-      <p:sp>
-        <p:nvSpPr>
-          <p:cNvPr id="11" name="Text 8"/>
-          <p:cNvSpPr txBox="1"/>
-          <p:nvPr/>
-        </p:nvSpPr>
-        <p:spPr>
-          <a:xfrm>
-            <a:off x="548640" y="5806440"/>
-            <a:ext cx="11064240" cy="365760"/>
-          </a:xfrm>
-          <a:prstGeom prst="rect">
-            <a:avLst/>
-          </a:prstGeom>
-          <a:noFill/>
-          <a:ln/>
-        </p:spPr>
-        <p:txBody>
-          <a:bodyPr wrap="square" lIns="0" tIns="0" rIns="0" bIns="0" rtlCol="0" anchor="ctr"/>
-          <a:lstStyle/>
-          <a:p>
-            <a:pPr indent="0" marL="0">
-              <a:buNone/>
-            </a:pPr>
-            <a:r>
-              <a:rPr lang="en-US" sz="1300" i="1" dirty="0">
-                <a:solidFill>
-                  <a:srgbClr val="6B7280"/>
-                </a:solidFill>
-                <a:latin typeface="Calibri" pitchFamily="34" charset="0"/>
-                <a:ea typeface="Calibri" pitchFamily="34" charset="-122"/>
-                <a:cs typeface="Calibri" pitchFamily="34" charset="-120"/>
-              </a:rPr>
-              <a:t>Поправка к модели: сайту нельзя «выдать» 11 634 ₽ и получить трафик завтра — SEO даёт эффект через 2–3 месяца.</a:t>
-            </a:r>
-            <a:endParaRPr lang="en-US" sz="1300" dirty="0"/>
+              <a:rPr lang="en-US" sz="1500" dirty="0">
+                <a:solidFill>
+                  <a:srgbClr val="FFFFFF"/>
+                </a:solidFill>
+                <a:latin typeface="Calibri" pitchFamily="34" charset="0"/>
+                <a:ea typeface="Calibri" pitchFamily="34" charset="-122"/>
+                <a:cs typeface="Calibri" pitchFamily="34" charset="-120"/>
+              </a:rPr>
+              <a:t>Вывод: LaModa наращиваем ради объёма и оборота, но прибыль на единицу растёт только на своём сайте.</a:t>
+            </a:r>
+            <a:endParaRPr lang="en-US" sz="1500" dirty="0"/>
           </a:p>
         </p:txBody>
       </p:sp>
@@ -3659,7 +4936,7 @@
                 <a:ea typeface="Cambria" pitchFamily="34" charset="-122"/>
                 <a:cs typeface="Cambria" pitchFamily="34" charset="-120"/>
               </a:rPr>
-              <a:t>Что делаем в следующем месяце</a:t>
+              <a:t>Где теряется покупатель</a:t>
             </a:r>
             <a:endParaRPr lang="en-US" sz="3400" dirty="0"/>
           </a:p>
@@ -3667,18 +4944,57 @@
       </p:sp>
       <p:sp>
         <p:nvSpPr>
-          <p:cNvPr id="3" name="Shape 1"/>
+          <p:cNvPr id="3" name="Text 1"/>
+          <p:cNvSpPr txBox="1"/>
+          <p:nvPr/>
+        </p:nvSpPr>
+        <p:spPr>
+          <a:xfrm>
+            <a:off x="548640" y="1060704"/>
+            <a:ext cx="11064240" cy="384048"/>
+          </a:xfrm>
+          <a:prstGeom prst="rect">
+            <a:avLst/>
+          </a:prstGeom>
+          <a:noFill/>
+          <a:ln/>
+        </p:spPr>
+        <p:txBody>
+          <a:bodyPr wrap="square" lIns="0" tIns="0" rIns="0" bIns="0" rtlCol="0" anchor="ctr"/>
+          <a:lstStyle/>
+          <a:p>
+            <a:pPr indent="0" marL="0">
+              <a:buNone/>
+            </a:pPr>
+            <a:r>
+              <a:rPr lang="en-US" sz="1400" dirty="0">
+                <a:solidFill>
+                  <a:srgbClr val="6B7280"/>
+                </a:solidFill>
+                <a:latin typeface="Calibri" pitchFamily="34" charset="0"/>
+                <a:ea typeface="Calibri" pitchFamily="34" charset="-122"/>
+                <a:cs typeface="Calibri" pitchFamily="34" charset="-120"/>
+              </a:rPr>
+              <a:t>Сквозная воронка по всем каналам</a:t>
+            </a:r>
+            <a:endParaRPr lang="en-US" sz="1400" dirty="0"/>
+          </a:p>
+        </p:txBody>
+      </p:sp>
+      <p:sp>
+        <p:nvSpPr>
+          <p:cNvPr id="4" name="Shape 2"/>
           <p:cNvSpPr/>
           <p:nvPr/>
         </p:nvSpPr>
         <p:spPr>
           <a:xfrm>
             <a:off x="548640" y="1645920"/>
-            <a:ext cx="5349240" cy="1828800"/>
+            <a:ext cx="3529584" cy="1783080"/>
           </a:xfrm>
           <a:prstGeom prst="roundRect">
             <a:avLst>
-              <a:gd name="adj" fmla="val 3000"/>
+              <a:gd name="adj" fmla="val 3077"/>
             </a:avLst>
           </a:prstGeom>
           <a:solidFill>
@@ -3689,50 +5005,30 @@
       </p:sp>
       <p:sp>
         <p:nvSpPr>
-          <p:cNvPr id="4" name="Shape 2"/>
-          <p:cNvSpPr/>
-          <p:nvPr/>
-        </p:nvSpPr>
-        <p:spPr>
-          <a:xfrm>
-            <a:off x="914400" y="1965960"/>
-            <a:ext cx="457200" cy="457200"/>
-          </a:xfrm>
-          <a:prstGeom prst="ellipse">
-            <a:avLst/>
-          </a:prstGeom>
-          <a:solidFill>
-            <a:srgbClr val="FCA311"/>
-          </a:solidFill>
-          <a:ln/>
-        </p:spPr>
-      </p:sp>
-      <p:sp>
-        <p:nvSpPr>
           <p:cNvPr id="5" name="Text 3"/>
           <p:cNvSpPr txBox="1"/>
           <p:nvPr/>
         </p:nvSpPr>
         <p:spPr>
           <a:xfrm>
-            <a:off x="914400" y="2039112"/>
-            <a:ext cx="457200" cy="310896"/>
-          </a:xfrm>
-          <a:prstGeom prst="rect">
-            <a:avLst/>
-          </a:prstGeom>
-          <a:noFill/>
-          <a:ln/>
-        </p:spPr>
-        <p:txBody>
-          <a:bodyPr wrap="square" lIns="0" tIns="0" rIns="0" bIns="0" rtlCol="0" anchor="ctr"/>
-          <a:lstStyle/>
-          <a:p>
-            <a:pPr algn="ctr" indent="0" marL="0">
-              <a:buNone/>
-            </a:pPr>
-            <a:r>
-              <a:rPr lang="en-US" sz="1700" b="1" dirty="0">
+            <a:off x="804672" y="1828800"/>
+            <a:ext cx="3017520" cy="658368"/>
+          </a:xfrm>
+          <a:prstGeom prst="rect">
+            <a:avLst/>
+          </a:prstGeom>
+          <a:noFill/>
+          <a:ln/>
+        </p:spPr>
+        <p:txBody>
+          <a:bodyPr wrap="square" lIns="0" tIns="0" rIns="0" bIns="0" rtlCol="0" anchor="ctr"/>
+          <a:lstStyle/>
+          <a:p>
+            <a:pPr indent="0" marL="0">
+              <a:buNone/>
+            </a:pPr>
+            <a:r>
+              <a:rPr lang="en-US" sz="3200" b="1" dirty="0">
                 <a:solidFill>
                   <a:srgbClr val="14213D"/>
                 </a:solidFill>
@@ -3740,9 +5036,9 @@
                 <a:ea typeface="Calibri" pitchFamily="34" charset="-122"/>
                 <a:cs typeface="Calibri" pitchFamily="34" charset="-120"/>
               </a:rPr>
-              <a:t>1</a:t>
-            </a:r>
-            <a:endParaRPr lang="en-US" sz="1700" dirty="0"/>
+              <a:t>1,44%</a:t>
+            </a:r>
+            <a:endParaRPr lang="en-US" sz="3200" dirty="0"/>
           </a:p>
         </p:txBody>
       </p:sp>
@@ -3754,8 +5050,8 @@
         </p:nvSpPr>
         <p:spPr>
           <a:xfrm>
-            <a:off x="1508760" y="1993392"/>
-            <a:ext cx="4114800" cy="365760"/>
+            <a:off x="804672" y="2505456"/>
+            <a:ext cx="3017520" cy="292608"/>
           </a:xfrm>
           <a:prstGeom prst="rect">
             <a:avLst/>
@@ -3771,17 +5067,17 @@
               <a:buNone/>
             </a:pPr>
             <a:r>
-              <a:rPr lang="en-US" sz="1600" b="1" dirty="0">
-                <a:solidFill>
-                  <a:srgbClr val="14213D"/>
-                </a:solidFill>
-                <a:latin typeface="Calibri" pitchFamily="34" charset="0"/>
-                <a:ea typeface="Calibri" pitchFamily="34" charset="-122"/>
-                <a:cs typeface="Calibri" pitchFamily="34" charset="-120"/>
-              </a:rPr>
-              <a:t>Снимаем 4 200 ₽ с ВК</a:t>
-            </a:r>
-            <a:endParaRPr lang="en-US" sz="1600" dirty="0"/>
+              <a:rPr lang="en-US" sz="1300" b="1" dirty="0">
+                <a:solidFill>
+                  <a:srgbClr val="1F2937"/>
+                </a:solidFill>
+                <a:latin typeface="Calibri" pitchFamily="34" charset="0"/>
+                <a:ea typeface="Calibri" pitchFamily="34" charset="-122"/>
+                <a:cs typeface="Calibri" pitchFamily="34" charset="-120"/>
+              </a:rPr>
+              <a:t>показ → переход</a:t>
+            </a:r>
+            <a:endParaRPr lang="en-US" sz="1300" dirty="0"/>
           </a:p>
         </p:txBody>
       </p:sp>
@@ -3793,8 +5089,8 @@
         </p:nvSpPr>
         <p:spPr>
           <a:xfrm>
-            <a:off x="1508760" y="2423160"/>
-            <a:ext cx="4114800" cy="868680"/>
+            <a:off x="804672" y="2816352"/>
+            <a:ext cx="3017520" cy="502920"/>
           </a:xfrm>
           <a:prstGeom prst="rect">
             <a:avLst/>
@@ -3810,7 +5106,7 @@
               <a:buNone/>
             </a:pPr>
             <a:r>
-              <a:rPr lang="en-US" sz="1200" dirty="0">
+              <a:rPr lang="en-US" sz="1100" dirty="0">
                 <a:solidFill>
                   <a:srgbClr val="6B7280"/>
                 </a:solidFill>
@@ -3818,9 +5114,9 @@
                 <a:ea typeface="Calibri" pitchFamily="34" charset="-122"/>
                 <a:cs typeface="Calibri" pitchFamily="34" charset="-120"/>
               </a:rPr>
-              <a:t>ДРР 42%, CAC 1 429 ₽ при марже 1 763 ₽. Любое масштабирование уведёт канал в минус.</a:t>
-            </a:r>
-            <a:endParaRPr lang="en-US" sz="1200" dirty="0"/>
+              <a:t>386 000 показов дали 5 560 переходов</a:t>
+            </a:r>
+            <a:endParaRPr lang="en-US" sz="1100" dirty="0"/>
           </a:p>
         </p:txBody>
       </p:sp>
@@ -3832,12 +5128,12 @@
         </p:nvSpPr>
         <p:spPr>
           <a:xfrm>
-            <a:off x="6263640" y="1645920"/>
-            <a:ext cx="5349240" cy="1828800"/>
+            <a:off x="4315968" y="1645920"/>
+            <a:ext cx="3529584" cy="1783080"/>
           </a:xfrm>
           <a:prstGeom prst="roundRect">
             <a:avLst>
-              <a:gd name="adj" fmla="val 3000"/>
+              <a:gd name="adj" fmla="val 3077"/>
             </a:avLst>
           </a:prstGeom>
           <a:solidFill>
@@ -3848,155 +5144,135 @@
       </p:sp>
       <p:sp>
         <p:nvSpPr>
-          <p:cNvPr id="9" name="Shape 7"/>
+          <p:cNvPr id="9" name="Text 7"/>
+          <p:cNvSpPr txBox="1"/>
+          <p:nvPr/>
+        </p:nvSpPr>
+        <p:spPr>
+          <a:xfrm>
+            <a:off x="4572000" y="1828800"/>
+            <a:ext cx="3017520" cy="658368"/>
+          </a:xfrm>
+          <a:prstGeom prst="rect">
+            <a:avLst/>
+          </a:prstGeom>
+          <a:noFill/>
+          <a:ln/>
+        </p:spPr>
+        <p:txBody>
+          <a:bodyPr wrap="square" lIns="0" tIns="0" rIns="0" bIns="0" rtlCol="0" anchor="ctr"/>
+          <a:lstStyle/>
+          <a:p>
+            <a:pPr indent="0" marL="0">
+              <a:buNone/>
+            </a:pPr>
+            <a:r>
+              <a:rPr lang="en-US" sz="3200" b="1" dirty="0">
+                <a:solidFill>
+                  <a:srgbClr val="14213D"/>
+                </a:solidFill>
+                <a:latin typeface="Calibri" pitchFamily="34" charset="0"/>
+                <a:ea typeface="Calibri" pitchFamily="34" charset="-122"/>
+                <a:cs typeface="Calibri" pitchFamily="34" charset="-120"/>
+              </a:rPr>
+              <a:t>9,14%</a:t>
+            </a:r>
+            <a:endParaRPr lang="en-US" sz="3200" dirty="0"/>
+          </a:p>
+        </p:txBody>
+      </p:sp>
+      <p:sp>
+        <p:nvSpPr>
+          <p:cNvPr id="10" name="Text 8"/>
+          <p:cNvSpPr txBox="1"/>
+          <p:nvPr/>
+        </p:nvSpPr>
+        <p:spPr>
+          <a:xfrm>
+            <a:off x="4572000" y="2505456"/>
+            <a:ext cx="3017520" cy="292608"/>
+          </a:xfrm>
+          <a:prstGeom prst="rect">
+            <a:avLst/>
+          </a:prstGeom>
+          <a:noFill/>
+          <a:ln/>
+        </p:spPr>
+        <p:txBody>
+          <a:bodyPr wrap="square" lIns="0" tIns="0" rIns="0" bIns="0" rtlCol="0" anchor="ctr"/>
+          <a:lstStyle/>
+          <a:p>
+            <a:pPr indent="0" marL="0">
+              <a:buNone/>
+            </a:pPr>
+            <a:r>
+              <a:rPr lang="en-US" sz="1300" b="1" dirty="0">
+                <a:solidFill>
+                  <a:srgbClr val="1F2937"/>
+                </a:solidFill>
+                <a:latin typeface="Calibri" pitchFamily="34" charset="0"/>
+                <a:ea typeface="Calibri" pitchFamily="34" charset="-122"/>
+                <a:cs typeface="Calibri" pitchFamily="34" charset="-120"/>
+              </a:rPr>
+              <a:t>переход → корзина</a:t>
+            </a:r>
+            <a:endParaRPr lang="en-US" sz="1300" dirty="0"/>
+          </a:p>
+        </p:txBody>
+      </p:sp>
+      <p:sp>
+        <p:nvSpPr>
+          <p:cNvPr id="11" name="Text 9"/>
+          <p:cNvSpPr txBox="1"/>
+          <p:nvPr/>
+        </p:nvSpPr>
+        <p:spPr>
+          <a:xfrm>
+            <a:off x="4572000" y="2816352"/>
+            <a:ext cx="3017520" cy="502920"/>
+          </a:xfrm>
+          <a:prstGeom prst="rect">
+            <a:avLst/>
+          </a:prstGeom>
+          <a:noFill/>
+          <a:ln/>
+        </p:spPr>
+        <p:txBody>
+          <a:bodyPr wrap="square" lIns="0" tIns="0" rIns="0" bIns="0" rtlCol="0" anchor="ctr"/>
+          <a:lstStyle/>
+          <a:p>
+            <a:pPr indent="0" marL="0">
+              <a:buNone/>
+            </a:pPr>
+            <a:r>
+              <a:rPr lang="en-US" sz="1100" dirty="0">
+                <a:solidFill>
+                  <a:srgbClr val="6B7280"/>
+                </a:solidFill>
+                <a:latin typeface="Calibri" pitchFamily="34" charset="0"/>
+                <a:ea typeface="Calibri" pitchFamily="34" charset="-122"/>
+                <a:cs typeface="Calibri" pitchFamily="34" charset="-120"/>
+              </a:rPr>
+              <a:t>из 5 560 в корзину попали 508</a:t>
+            </a:r>
+            <a:endParaRPr lang="en-US" sz="1100" dirty="0"/>
+          </a:p>
+        </p:txBody>
+      </p:sp>
+      <p:sp>
+        <p:nvSpPr>
+          <p:cNvPr id="12" name="Shape 10"/>
           <p:cNvSpPr/>
           <p:nvPr/>
         </p:nvSpPr>
         <p:spPr>
           <a:xfrm>
-            <a:off x="6629400" y="1965960"/>
-            <a:ext cx="457200" cy="457200"/>
-          </a:xfrm>
-          <a:prstGeom prst="ellipse">
-            <a:avLst/>
-          </a:prstGeom>
-          <a:solidFill>
-            <a:srgbClr val="FCA311"/>
-          </a:solidFill>
-          <a:ln/>
-        </p:spPr>
-      </p:sp>
-      <p:sp>
-        <p:nvSpPr>
-          <p:cNvPr id="10" name="Text 8"/>
-          <p:cNvSpPr txBox="1"/>
-          <p:nvPr/>
-        </p:nvSpPr>
-        <p:spPr>
-          <a:xfrm>
-            <a:off x="6629400" y="2039112"/>
-            <a:ext cx="457200" cy="310896"/>
-          </a:xfrm>
-          <a:prstGeom prst="rect">
-            <a:avLst/>
-          </a:prstGeom>
-          <a:noFill/>
-          <a:ln/>
-        </p:spPr>
-        <p:txBody>
-          <a:bodyPr wrap="square" lIns="0" tIns="0" rIns="0" bIns="0" rtlCol="0" anchor="ctr"/>
-          <a:lstStyle/>
-          <a:p>
-            <a:pPr algn="ctr" indent="0" marL="0">
-              <a:buNone/>
-            </a:pPr>
-            <a:r>
-              <a:rPr lang="en-US" sz="1700" b="1" dirty="0">
-                <a:solidFill>
-                  <a:srgbClr val="14213D"/>
-                </a:solidFill>
-                <a:latin typeface="Calibri" pitchFamily="34" charset="0"/>
-                <a:ea typeface="Calibri" pitchFamily="34" charset="-122"/>
-                <a:cs typeface="Calibri" pitchFamily="34" charset="-120"/>
-              </a:rPr>
-              <a:t>2</a:t>
-            </a:r>
-            <a:endParaRPr lang="en-US" sz="1700" dirty="0"/>
-          </a:p>
-        </p:txBody>
-      </p:sp>
-      <p:sp>
-        <p:nvSpPr>
-          <p:cNvPr id="11" name="Text 9"/>
-          <p:cNvSpPr txBox="1"/>
-          <p:nvPr/>
-        </p:nvSpPr>
-        <p:spPr>
-          <a:xfrm>
-            <a:off x="7223760" y="1993392"/>
-            <a:ext cx="4114800" cy="365760"/>
-          </a:xfrm>
-          <a:prstGeom prst="rect">
-            <a:avLst/>
-          </a:prstGeom>
-          <a:noFill/>
-          <a:ln/>
-        </p:spPr>
-        <p:txBody>
-          <a:bodyPr wrap="square" lIns="0" tIns="0" rIns="0" bIns="0" rtlCol="0" anchor="ctr"/>
-          <a:lstStyle/>
-          <a:p>
-            <a:pPr indent="0" marL="0">
-              <a:buNone/>
-            </a:pPr>
-            <a:r>
-              <a:rPr lang="en-US" sz="1600" b="1" dirty="0">
-                <a:solidFill>
-                  <a:srgbClr val="14213D"/>
-                </a:solidFill>
-                <a:latin typeface="Calibri" pitchFamily="34" charset="0"/>
-                <a:ea typeface="Calibri" pitchFamily="34" charset="-122"/>
-                <a:cs typeface="Calibri" pitchFamily="34" charset="-120"/>
-              </a:rPr>
-              <a:t>Отдаём их в LaModa</a:t>
-            </a:r>
-            <a:endParaRPr lang="en-US" sz="1600" dirty="0"/>
-          </a:p>
-        </p:txBody>
-      </p:sp>
-      <p:sp>
-        <p:nvSpPr>
-          <p:cNvPr id="12" name="Text 10"/>
-          <p:cNvSpPr txBox="1"/>
-          <p:nvPr/>
-        </p:nvSpPr>
-        <p:spPr>
-          <a:xfrm>
-            <a:off x="7223760" y="2423160"/>
-            <a:ext cx="4114800" cy="868680"/>
-          </a:xfrm>
-          <a:prstGeom prst="rect">
-            <a:avLst/>
-          </a:prstGeom>
-          <a:noFill/>
-          <a:ln/>
-        </p:spPr>
-        <p:txBody>
-          <a:bodyPr wrap="square" lIns="0" tIns="0" rIns="0" bIns="0" rtlCol="0" anchor="ctr"/>
-          <a:lstStyle/>
-          <a:p>
-            <a:pPr indent="0" marL="0">
-              <a:buNone/>
-            </a:pPr>
-            <a:r>
-              <a:rPr lang="en-US" sz="1200" dirty="0">
-                <a:solidFill>
-                  <a:srgbClr val="6B7280"/>
-                </a:solidFill>
-                <a:latin typeface="Calibri" pitchFamily="34" charset="0"/>
-                <a:ea typeface="Calibri" pitchFamily="34" charset="-122"/>
-                <a:cs typeface="Calibri" pitchFamily="34" charset="-120"/>
-              </a:rPr>
-              <a:t>Единственный канал, который конвертирует деньги в объём сразу, без лага.</a:t>
-            </a:r>
-            <a:endParaRPr lang="en-US" sz="1200" dirty="0"/>
-          </a:p>
-        </p:txBody>
-      </p:sp>
-      <p:sp>
-        <p:nvSpPr>
-          <p:cNvPr id="13" name="Shape 11"/>
-          <p:cNvSpPr/>
-          <p:nvPr/>
-        </p:nvSpPr>
-        <p:spPr>
-          <a:xfrm>
-            <a:off x="548640" y="3794760"/>
-            <a:ext cx="5349240" cy="1828800"/>
+            <a:off x="8083296" y="1645920"/>
+            <a:ext cx="3529584" cy="1783080"/>
           </a:xfrm>
           <a:prstGeom prst="roundRect">
             <a:avLst>
-              <a:gd name="adj" fmla="val 3000"/>
+              <a:gd name="adj" fmla="val 3077"/>
             </a:avLst>
           </a:prstGeom>
           <a:solidFill>
@@ -4007,23 +5283,81 @@
       </p:sp>
       <p:sp>
         <p:nvSpPr>
-          <p:cNvPr id="14" name="Shape 12"/>
-          <p:cNvSpPr/>
-          <p:nvPr/>
-        </p:nvSpPr>
-        <p:spPr>
-          <a:xfrm>
-            <a:off x="914400" y="4114800"/>
-            <a:ext cx="457200" cy="457200"/>
-          </a:xfrm>
-          <a:prstGeom prst="ellipse">
-            <a:avLst/>
-          </a:prstGeom>
-          <a:solidFill>
-            <a:srgbClr val="FCA311"/>
-          </a:solidFill>
-          <a:ln/>
-        </p:spPr>
+          <p:cNvPr id="13" name="Text 11"/>
+          <p:cNvSpPr txBox="1"/>
+          <p:nvPr/>
+        </p:nvSpPr>
+        <p:spPr>
+          <a:xfrm>
+            <a:off x="8339328" y="1828800"/>
+            <a:ext cx="3017520" cy="658368"/>
+          </a:xfrm>
+          <a:prstGeom prst="rect">
+            <a:avLst/>
+          </a:prstGeom>
+          <a:noFill/>
+          <a:ln/>
+        </p:spPr>
+        <p:txBody>
+          <a:bodyPr wrap="square" lIns="0" tIns="0" rIns="0" bIns="0" rtlCol="0" anchor="ctr"/>
+          <a:lstStyle/>
+          <a:p>
+            <a:pPr indent="0" marL="0">
+              <a:buNone/>
+            </a:pPr>
+            <a:r>
+              <a:rPr lang="en-US" sz="3200" b="1" dirty="0">
+                <a:solidFill>
+                  <a:srgbClr val="C1121F"/>
+                </a:solidFill>
+                <a:latin typeface="Calibri" pitchFamily="34" charset="0"/>
+                <a:ea typeface="Calibri" pitchFamily="34" charset="-122"/>
+                <a:cs typeface="Calibri" pitchFamily="34" charset="-120"/>
+              </a:rPr>
+              <a:t>16,14%</a:t>
+            </a:r>
+            <a:endParaRPr lang="en-US" sz="3200" dirty="0"/>
+          </a:p>
+        </p:txBody>
+      </p:sp>
+      <p:sp>
+        <p:nvSpPr>
+          <p:cNvPr id="14" name="Text 12"/>
+          <p:cNvSpPr txBox="1"/>
+          <p:nvPr/>
+        </p:nvSpPr>
+        <p:spPr>
+          <a:xfrm>
+            <a:off x="8339328" y="2505456"/>
+            <a:ext cx="3017520" cy="292608"/>
+          </a:xfrm>
+          <a:prstGeom prst="rect">
+            <a:avLst/>
+          </a:prstGeom>
+          <a:noFill/>
+          <a:ln/>
+        </p:spPr>
+        <p:txBody>
+          <a:bodyPr wrap="square" lIns="0" tIns="0" rIns="0" bIns="0" rtlCol="0" anchor="ctr"/>
+          <a:lstStyle/>
+          <a:p>
+            <a:pPr indent="0" marL="0">
+              <a:buNone/>
+            </a:pPr>
+            <a:r>
+              <a:rPr lang="en-US" sz="1300" b="1" dirty="0">
+                <a:solidFill>
+                  <a:srgbClr val="1F2937"/>
+                </a:solidFill>
+                <a:latin typeface="Calibri" pitchFamily="34" charset="0"/>
+                <a:ea typeface="Calibri" pitchFamily="34" charset="-122"/>
+                <a:cs typeface="Calibri" pitchFamily="34" charset="-120"/>
+              </a:rPr>
+              <a:t>корзина → оплата</a:t>
+            </a:r>
+            <a:endParaRPr lang="en-US" sz="1300" dirty="0"/>
+          </a:p>
+        </p:txBody>
       </p:sp>
       <p:sp>
         <p:nvSpPr>
@@ -4033,24 +5367,63 @@
         </p:nvSpPr>
         <p:spPr>
           <a:xfrm>
-            <a:off x="914400" y="4187952"/>
-            <a:ext cx="457200" cy="310896"/>
-          </a:xfrm>
-          <a:prstGeom prst="rect">
-            <a:avLst/>
-          </a:prstGeom>
-          <a:noFill/>
-          <a:ln/>
-        </p:spPr>
-        <p:txBody>
-          <a:bodyPr wrap="square" lIns="0" tIns="0" rIns="0" bIns="0" rtlCol="0" anchor="ctr"/>
-          <a:lstStyle/>
-          <a:p>
-            <a:pPr algn="ctr" indent="0" marL="0">
-              <a:buNone/>
-            </a:pPr>
-            <a:r>
-              <a:rPr lang="en-US" sz="1700" b="1" dirty="0">
+            <a:off x="8339328" y="2816352"/>
+            <a:ext cx="3017520" cy="502920"/>
+          </a:xfrm>
+          <a:prstGeom prst="rect">
+            <a:avLst/>
+          </a:prstGeom>
+          <a:noFill/>
+          <a:ln/>
+        </p:spPr>
+        <p:txBody>
+          <a:bodyPr wrap="square" lIns="0" tIns="0" rIns="0" bIns="0" rtlCol="0" anchor="ctr"/>
+          <a:lstStyle/>
+          <a:p>
+            <a:pPr indent="0" marL="0">
+              <a:buNone/>
+            </a:pPr>
+            <a:r>
+              <a:rPr lang="en-US" sz="1100" dirty="0">
+                <a:solidFill>
+                  <a:srgbClr val="6B7280"/>
+                </a:solidFill>
+                <a:latin typeface="Calibri" pitchFamily="34" charset="0"/>
+                <a:ea typeface="Calibri" pitchFamily="34" charset="-122"/>
+                <a:cs typeface="Calibri" pitchFamily="34" charset="-120"/>
+              </a:rPr>
+              <a:t>из 508 корзин оплачены 82</a:t>
+            </a:r>
+            <a:endParaRPr lang="en-US" sz="1100" dirty="0"/>
+          </a:p>
+        </p:txBody>
+      </p:sp>
+      <p:sp>
+        <p:nvSpPr>
+          <p:cNvPr id="16" name="Text 14"/>
+          <p:cNvSpPr txBox="1"/>
+          <p:nvPr/>
+        </p:nvSpPr>
+        <p:spPr>
+          <a:xfrm>
+            <a:off x="548640" y="3749040"/>
+            <a:ext cx="11064240" cy="365760"/>
+          </a:xfrm>
+          <a:prstGeom prst="rect">
+            <a:avLst/>
+          </a:prstGeom>
+          <a:noFill/>
+          <a:ln/>
+        </p:spPr>
+        <p:txBody>
+          <a:bodyPr wrap="square" lIns="0" tIns="0" rIns="0" bIns="0" rtlCol="0" anchor="ctr"/>
+          <a:lstStyle/>
+          <a:p>
+            <a:pPr indent="0" marL="0">
+              <a:buNone/>
+            </a:pPr>
+            <a:r>
+              <a:rPr lang="en-US" sz="1600" b="1" dirty="0">
                 <a:solidFill>
                   <a:srgbClr val="14213D"/>
                 </a:solidFill>
@@ -4058,22 +5431,22 @@
                 <a:ea typeface="Calibri" pitchFamily="34" charset="-122"/>
                 <a:cs typeface="Calibri" pitchFamily="34" charset="-120"/>
               </a:rPr>
-              <a:t>3</a:t>
-            </a:r>
-            <a:endParaRPr lang="en-US" sz="1700" dirty="0"/>
-          </a:p>
-        </p:txBody>
-      </p:sp>
-      <p:sp>
-        <p:nvSpPr>
-          <p:cNvPr id="16" name="Text 14"/>
-          <p:cNvSpPr txBox="1"/>
-          <p:nvPr/>
-        </p:nvSpPr>
-        <p:spPr>
-          <a:xfrm>
-            <a:off x="1508760" y="4142232"/>
-            <a:ext cx="4114800" cy="365760"/>
+              <a:t>Узкое место по каналам</a:t>
+            </a:r>
+            <a:endParaRPr lang="en-US" sz="1600" dirty="0"/>
+          </a:p>
+        </p:txBody>
+      </p:sp>
+      <p:sp>
+        <p:nvSpPr>
+          <p:cNvPr id="17" name="Text 15"/>
+          <p:cNvSpPr txBox="1"/>
+          <p:nvPr/>
+        </p:nvSpPr>
+        <p:spPr>
+          <a:xfrm>
+            <a:off x="548640" y="4206240"/>
+            <a:ext cx="1371600" cy="310896"/>
           </a:xfrm>
           <a:prstGeom prst="rect">
             <a:avLst/>
@@ -4089,7 +5462,7 @@
               <a:buNone/>
             </a:pPr>
             <a:r>
-              <a:rPr lang="en-US" sz="1600" b="1" dirty="0">
+              <a:rPr lang="en-US" sz="1300" b="1" dirty="0">
                 <a:solidFill>
                   <a:srgbClr val="14213D"/>
                 </a:solidFill>
@@ -4097,22 +5470,22 @@
                 <a:ea typeface="Calibri" pitchFamily="34" charset="-122"/>
                 <a:cs typeface="Calibri" pitchFamily="34" charset="-120"/>
               </a:rPr>
-              <a:t>SEO наращиваем плавно</a:t>
-            </a:r>
-            <a:endParaRPr lang="en-US" sz="1600" dirty="0"/>
-          </a:p>
-        </p:txBody>
-      </p:sp>
-      <p:sp>
-        <p:nvSpPr>
-          <p:cNvPr id="17" name="Text 15"/>
-          <p:cNvSpPr txBox="1"/>
-          <p:nvPr/>
-        </p:nvSpPr>
-        <p:spPr>
-          <a:xfrm>
-            <a:off x="1508760" y="4572000"/>
-            <a:ext cx="4114800" cy="868680"/>
+              <a:t>сайт</a:t>
+            </a:r>
+            <a:endParaRPr lang="en-US" sz="1300" dirty="0"/>
+          </a:p>
+        </p:txBody>
+      </p:sp>
+      <p:sp>
+        <p:nvSpPr>
+          <p:cNvPr id="18" name="Text 16"/>
+          <p:cNvSpPr txBox="1"/>
+          <p:nvPr/>
+        </p:nvSpPr>
+        <p:spPr>
+          <a:xfrm>
+            <a:off x="1965960" y="4206240"/>
+            <a:ext cx="9601200" cy="310896"/>
           </a:xfrm>
           <a:prstGeom prst="rect">
             <a:avLst/>
@@ -4128,7 +5501,358 @@
               <a:buNone/>
             </a:pPr>
             <a:r>
-              <a:rPr lang="en-US" sz="1200" dirty="0">
+              <a:rPr lang="en-US" sz="1300" dirty="0">
+                <a:solidFill>
+                  <a:srgbClr val="1F2937"/>
+                </a:solidFill>
+                <a:latin typeface="Calibri" pitchFamily="34" charset="0"/>
+                <a:ea typeface="Calibri" pitchFamily="34" charset="-122"/>
+                <a:cs typeface="Calibri" pitchFamily="34" charset="-120"/>
+              </a:rPr>
+              <a:t>вход: 1% из показов — мы в выдаче, но не в топе</a:t>
+            </a:r>
+            <a:endParaRPr lang="en-US" sz="1300" dirty="0"/>
+          </a:p>
+        </p:txBody>
+      </p:sp>
+      <p:sp>
+        <p:nvSpPr>
+          <p:cNvPr id="19" name="Text 17"/>
+          <p:cNvSpPr txBox="1"/>
+          <p:nvPr/>
+        </p:nvSpPr>
+        <p:spPr>
+          <a:xfrm>
+            <a:off x="548640" y="4590288"/>
+            <a:ext cx="1371600" cy="310896"/>
+          </a:xfrm>
+          <a:prstGeom prst="rect">
+            <a:avLst/>
+          </a:prstGeom>
+          <a:noFill/>
+          <a:ln/>
+        </p:spPr>
+        <p:txBody>
+          <a:bodyPr wrap="square" lIns="0" tIns="0" rIns="0" bIns="0" rtlCol="0" anchor="ctr"/>
+          <a:lstStyle/>
+          <a:p>
+            <a:pPr indent="0" marL="0">
+              <a:buNone/>
+            </a:pPr>
+            <a:r>
+              <a:rPr lang="en-US" sz="1300" b="1" dirty="0">
+                <a:solidFill>
+                  <a:srgbClr val="14213D"/>
+                </a:solidFill>
+                <a:latin typeface="Calibri" pitchFamily="34" charset="0"/>
+                <a:ea typeface="Calibri" pitchFamily="34" charset="-122"/>
+                <a:cs typeface="Calibri" pitchFamily="34" charset="-120"/>
+              </a:rPr>
+              <a:t>директ</a:t>
+            </a:r>
+            <a:endParaRPr lang="en-US" sz="1300" dirty="0"/>
+          </a:p>
+        </p:txBody>
+      </p:sp>
+      <p:sp>
+        <p:nvSpPr>
+          <p:cNvPr id="20" name="Text 18"/>
+          <p:cNvSpPr txBox="1"/>
+          <p:nvPr/>
+        </p:nvSpPr>
+        <p:spPr>
+          <a:xfrm>
+            <a:off x="1965960" y="4590288"/>
+            <a:ext cx="9601200" cy="310896"/>
+          </a:xfrm>
+          <a:prstGeom prst="rect">
+            <a:avLst/>
+          </a:prstGeom>
+          <a:noFill/>
+          <a:ln/>
+        </p:spPr>
+        <p:txBody>
+          <a:bodyPr wrap="square" lIns="0" tIns="0" rIns="0" bIns="0" rtlCol="0" anchor="ctr"/>
+          <a:lstStyle/>
+          <a:p>
+            <a:pPr indent="0" marL="0">
+              <a:buNone/>
+            </a:pPr>
+            <a:r>
+              <a:rPr lang="en-US" sz="1300" dirty="0">
+                <a:solidFill>
+                  <a:srgbClr val="1F2937"/>
+                </a:solidFill>
+                <a:latin typeface="Calibri" pitchFamily="34" charset="0"/>
+                <a:ea typeface="Calibri" pitchFamily="34" charset="-122"/>
+                <a:cs typeface="Calibri" pitchFamily="34" charset="-120"/>
+              </a:rPr>
+              <a:t>корзина 8% и оплата 12,5% — самая холодная аудитория</a:t>
+            </a:r>
+            <a:endParaRPr lang="en-US" sz="1300" dirty="0"/>
+          </a:p>
+        </p:txBody>
+      </p:sp>
+      <p:sp>
+        <p:nvSpPr>
+          <p:cNvPr id="21" name="Text 19"/>
+          <p:cNvSpPr txBox="1"/>
+          <p:nvPr/>
+        </p:nvSpPr>
+        <p:spPr>
+          <a:xfrm>
+            <a:off x="548640" y="4974336"/>
+            <a:ext cx="1371600" cy="310896"/>
+          </a:xfrm>
+          <a:prstGeom prst="rect">
+            <a:avLst/>
+          </a:prstGeom>
+          <a:noFill/>
+          <a:ln/>
+        </p:spPr>
+        <p:txBody>
+          <a:bodyPr wrap="square" lIns="0" tIns="0" rIns="0" bIns="0" rtlCol="0" anchor="ctr"/>
+          <a:lstStyle/>
+          <a:p>
+            <a:pPr indent="0" marL="0">
+              <a:buNone/>
+            </a:pPr>
+            <a:r>
+              <a:rPr lang="en-US" sz="1300" b="1" dirty="0">
+                <a:solidFill>
+                  <a:srgbClr val="14213D"/>
+                </a:solidFill>
+                <a:latin typeface="Calibri" pitchFamily="34" charset="0"/>
+                <a:ea typeface="Calibri" pitchFamily="34" charset="-122"/>
+                <a:cs typeface="Calibri" pitchFamily="34" charset="-120"/>
+              </a:rPr>
+              <a:t>LaModa</a:t>
+            </a:r>
+            <a:endParaRPr lang="en-US" sz="1300" dirty="0"/>
+          </a:p>
+        </p:txBody>
+      </p:sp>
+      <p:sp>
+        <p:nvSpPr>
+          <p:cNvPr id="22" name="Text 20"/>
+          <p:cNvSpPr txBox="1"/>
+          <p:nvPr/>
+        </p:nvSpPr>
+        <p:spPr>
+          <a:xfrm>
+            <a:off x="1965960" y="4974336"/>
+            <a:ext cx="9601200" cy="310896"/>
+          </a:xfrm>
+          <a:prstGeom prst="rect">
+            <a:avLst/>
+          </a:prstGeom>
+          <a:noFill/>
+          <a:ln/>
+        </p:spPr>
+        <p:txBody>
+          <a:bodyPr wrap="square" lIns="0" tIns="0" rIns="0" bIns="0" rtlCol="0" anchor="ctr"/>
+          <a:lstStyle/>
+          <a:p>
+            <a:pPr indent="0" marL="0">
+              <a:buNone/>
+            </a:pPr>
+            <a:r>
+              <a:rPr lang="en-US" sz="1300" dirty="0">
+                <a:solidFill>
+                  <a:srgbClr val="1F2937"/>
+                </a:solidFill>
+                <a:latin typeface="Calibri" pitchFamily="34" charset="0"/>
+                <a:ea typeface="Calibri" pitchFamily="34" charset="-122"/>
+                <a:cs typeface="Calibri" pitchFamily="34" charset="-120"/>
+              </a:rPr>
+              <a:t>узких мест нет, ограничение — комиссия</a:t>
+            </a:r>
+            <a:endParaRPr lang="en-US" sz="1300" dirty="0"/>
+          </a:p>
+        </p:txBody>
+      </p:sp>
+      <p:sp>
+        <p:nvSpPr>
+          <p:cNvPr id="23" name="Text 21"/>
+          <p:cNvSpPr txBox="1"/>
+          <p:nvPr/>
+        </p:nvSpPr>
+        <p:spPr>
+          <a:xfrm>
+            <a:off x="548640" y="5358384"/>
+            <a:ext cx="1371600" cy="310896"/>
+          </a:xfrm>
+          <a:prstGeom prst="rect">
+            <a:avLst/>
+          </a:prstGeom>
+          <a:noFill/>
+          <a:ln/>
+        </p:spPr>
+        <p:txBody>
+          <a:bodyPr wrap="square" lIns="0" tIns="0" rIns="0" bIns="0" rtlCol="0" anchor="ctr"/>
+          <a:lstStyle/>
+          <a:p>
+            <a:pPr indent="0" marL="0">
+              <a:buNone/>
+            </a:pPr>
+            <a:r>
+              <a:rPr lang="en-US" sz="1300" b="1" dirty="0">
+                <a:solidFill>
+                  <a:srgbClr val="14213D"/>
+                </a:solidFill>
+                <a:latin typeface="Calibri" pitchFamily="34" charset="0"/>
+                <a:ea typeface="Calibri" pitchFamily="34" charset="-122"/>
+                <a:cs typeface="Calibri" pitchFamily="34" charset="-120"/>
+              </a:rPr>
+              <a:t>Блогеры</a:t>
+            </a:r>
+            <a:endParaRPr lang="en-US" sz="1300" dirty="0"/>
+          </a:p>
+        </p:txBody>
+      </p:sp>
+      <p:sp>
+        <p:nvSpPr>
+          <p:cNvPr id="24" name="Text 22"/>
+          <p:cNvSpPr txBox="1"/>
+          <p:nvPr/>
+        </p:nvSpPr>
+        <p:spPr>
+          <a:xfrm>
+            <a:off x="1965960" y="5358384"/>
+            <a:ext cx="9601200" cy="310896"/>
+          </a:xfrm>
+          <a:prstGeom prst="rect">
+            <a:avLst/>
+          </a:prstGeom>
+          <a:noFill/>
+          <a:ln/>
+        </p:spPr>
+        <p:txBody>
+          <a:bodyPr wrap="square" lIns="0" tIns="0" rIns="0" bIns="0" rtlCol="0" anchor="ctr"/>
+          <a:lstStyle/>
+          <a:p>
+            <a:pPr indent="0" marL="0">
+              <a:buNone/>
+            </a:pPr>
+            <a:r>
+              <a:rPr lang="en-US" sz="1300" dirty="0">
+                <a:solidFill>
+                  <a:srgbClr val="1F2937"/>
+                </a:solidFill>
+                <a:latin typeface="Calibri" pitchFamily="34" charset="0"/>
+                <a:ea typeface="Calibri" pitchFamily="34" charset="-122"/>
+                <a:cs typeface="Calibri" pitchFamily="34" charset="-120"/>
+              </a:rPr>
+              <a:t>оплата 12,5%: доверие блогеру ≠ доверие бренду</a:t>
+            </a:r>
+            <a:endParaRPr lang="en-US" sz="1300" dirty="0"/>
+          </a:p>
+        </p:txBody>
+      </p:sp>
+      <p:sp>
+        <p:nvSpPr>
+          <p:cNvPr id="25" name="Text 23"/>
+          <p:cNvSpPr txBox="1"/>
+          <p:nvPr/>
+        </p:nvSpPr>
+        <p:spPr>
+          <a:xfrm>
+            <a:off x="548640" y="5742432"/>
+            <a:ext cx="1371600" cy="310896"/>
+          </a:xfrm>
+          <a:prstGeom prst="rect">
+            <a:avLst/>
+          </a:prstGeom>
+          <a:noFill/>
+          <a:ln/>
+        </p:spPr>
+        <p:txBody>
+          <a:bodyPr wrap="square" lIns="0" tIns="0" rIns="0" bIns="0" rtlCol="0" anchor="ctr"/>
+          <a:lstStyle/>
+          <a:p>
+            <a:pPr indent="0" marL="0">
+              <a:buNone/>
+            </a:pPr>
+            <a:r>
+              <a:rPr lang="en-US" sz="1300" b="1" dirty="0">
+                <a:solidFill>
+                  <a:srgbClr val="14213D"/>
+                </a:solidFill>
+                <a:latin typeface="Calibri" pitchFamily="34" charset="0"/>
+                <a:ea typeface="Calibri" pitchFamily="34" charset="-122"/>
+                <a:cs typeface="Calibri" pitchFamily="34" charset="-120"/>
+              </a:rPr>
+              <a:t>ВК</a:t>
+            </a:r>
+            <a:endParaRPr lang="en-US" sz="1300" dirty="0"/>
+          </a:p>
+        </p:txBody>
+      </p:sp>
+      <p:sp>
+        <p:nvSpPr>
+          <p:cNvPr id="26" name="Text 24"/>
+          <p:cNvSpPr txBox="1"/>
+          <p:nvPr/>
+        </p:nvSpPr>
+        <p:spPr>
+          <a:xfrm>
+            <a:off x="1965960" y="5742432"/>
+            <a:ext cx="9601200" cy="310896"/>
+          </a:xfrm>
+          <a:prstGeom prst="rect">
+            <a:avLst/>
+          </a:prstGeom>
+          <a:noFill/>
+          <a:ln/>
+        </p:spPr>
+        <p:txBody>
+          <a:bodyPr wrap="square" lIns="0" tIns="0" rIns="0" bIns="0" rtlCol="0" anchor="ctr"/>
+          <a:lstStyle/>
+          <a:p>
+            <a:pPr indent="0" marL="0">
+              <a:buNone/>
+            </a:pPr>
+            <a:r>
+              <a:rPr lang="en-US" sz="1300" dirty="0">
+                <a:solidFill>
+                  <a:srgbClr val="1F2937"/>
+                </a:solidFill>
+                <a:latin typeface="Calibri" pitchFamily="34" charset="0"/>
+                <a:ea typeface="Calibri" pitchFamily="34" charset="-122"/>
+                <a:cs typeface="Calibri" pitchFamily="34" charset="-120"/>
+              </a:rPr>
+              <a:t>вход 2,86% в корзину — в 7 раз хуже сайта</a:t>
+            </a:r>
+            <a:endParaRPr lang="en-US" sz="1300" dirty="0"/>
+          </a:p>
+        </p:txBody>
+      </p:sp>
+      <p:sp>
+        <p:nvSpPr>
+          <p:cNvPr id="27" name="Text 25"/>
+          <p:cNvSpPr txBox="1"/>
+          <p:nvPr/>
+        </p:nvSpPr>
+        <p:spPr>
+          <a:xfrm>
+            <a:off x="548640" y="6263640"/>
+            <a:ext cx="11064240" cy="365760"/>
+          </a:xfrm>
+          <a:prstGeom prst="rect">
+            <a:avLst/>
+          </a:prstGeom>
+          <a:noFill/>
+          <a:ln/>
+        </p:spPr>
+        <p:txBody>
+          <a:bodyPr wrap="square" lIns="0" tIns="0" rIns="0" bIns="0" rtlCol="0" anchor="ctr"/>
+          <a:lstStyle/>
+          <a:p>
+            <a:pPr indent="0" marL="0">
+              <a:buNone/>
+            </a:pPr>
+            <a:r>
+              <a:rPr lang="en-US" sz="1300" i="1" dirty="0">
                 <a:solidFill>
                   <a:srgbClr val="6B7280"/>
                 </a:solidFill>
@@ -4136,205 +5860,7 @@
                 <a:ea typeface="Calibri" pitchFamily="34" charset="-122"/>
                 <a:cs typeface="Calibri" pitchFamily="34" charset="-120"/>
               </a:rPr>
-              <a:t>Бюджет сайта поднимаем поэтапно: отдача приходит через 2–3 месяца, разом её не купить.</a:t>
-            </a:r>
-            <a:endParaRPr lang="en-US" sz="1200" dirty="0"/>
-          </a:p>
-        </p:txBody>
-      </p:sp>
-      <p:sp>
-        <p:nvSpPr>
-          <p:cNvPr id="18" name="Shape 16"/>
-          <p:cNvSpPr/>
-          <p:nvPr/>
-        </p:nvSpPr>
-        <p:spPr>
-          <a:xfrm>
-            <a:off x="6263640" y="3794760"/>
-            <a:ext cx="5349240" cy="1828800"/>
-          </a:xfrm>
-          <a:prstGeom prst="roundRect">
-            <a:avLst>
-              <a:gd name="adj" fmla="val 3000"/>
-            </a:avLst>
-          </a:prstGeom>
-          <a:solidFill>
-            <a:srgbClr val="F1F2F4"/>
-          </a:solidFill>
-          <a:ln/>
-        </p:spPr>
-      </p:sp>
-      <p:sp>
-        <p:nvSpPr>
-          <p:cNvPr id="19" name="Shape 17"/>
-          <p:cNvSpPr/>
-          <p:nvPr/>
-        </p:nvSpPr>
-        <p:spPr>
-          <a:xfrm>
-            <a:off x="6629400" y="4114800"/>
-            <a:ext cx="457200" cy="457200"/>
-          </a:xfrm>
-          <a:prstGeom prst="ellipse">
-            <a:avLst/>
-          </a:prstGeom>
-          <a:solidFill>
-            <a:srgbClr val="FCA311"/>
-          </a:solidFill>
-          <a:ln/>
-        </p:spPr>
-      </p:sp>
-      <p:sp>
-        <p:nvSpPr>
-          <p:cNvPr id="20" name="Text 18"/>
-          <p:cNvSpPr txBox="1"/>
-          <p:nvPr/>
-        </p:nvSpPr>
-        <p:spPr>
-          <a:xfrm>
-            <a:off x="6629400" y="4187952"/>
-            <a:ext cx="457200" cy="310896"/>
-          </a:xfrm>
-          <a:prstGeom prst="rect">
-            <a:avLst/>
-          </a:prstGeom>
-          <a:noFill/>
-          <a:ln/>
-        </p:spPr>
-        <p:txBody>
-          <a:bodyPr wrap="square" lIns="0" tIns="0" rIns="0" bIns="0" rtlCol="0" anchor="ctr"/>
-          <a:lstStyle/>
-          <a:p>
-            <a:pPr algn="ctr" indent="0" marL="0">
-              <a:buNone/>
-            </a:pPr>
-            <a:r>
-              <a:rPr lang="en-US" sz="1700" b="1" dirty="0">
-                <a:solidFill>
-                  <a:srgbClr val="14213D"/>
-                </a:solidFill>
-                <a:latin typeface="Calibri" pitchFamily="34" charset="0"/>
-                <a:ea typeface="Calibri" pitchFamily="34" charset="-122"/>
-                <a:cs typeface="Calibri" pitchFamily="34" charset="-120"/>
-              </a:rPr>
-              <a:t>4</a:t>
-            </a:r>
-            <a:endParaRPr lang="en-US" sz="1700" dirty="0"/>
-          </a:p>
-        </p:txBody>
-      </p:sp>
-      <p:sp>
-        <p:nvSpPr>
-          <p:cNvPr id="21" name="Text 19"/>
-          <p:cNvSpPr txBox="1"/>
-          <p:nvPr/>
-        </p:nvSpPr>
-        <p:spPr>
-          <a:xfrm>
-            <a:off x="7223760" y="4142232"/>
-            <a:ext cx="4114800" cy="365760"/>
-          </a:xfrm>
-          <a:prstGeom prst="rect">
-            <a:avLst/>
-          </a:prstGeom>
-          <a:noFill/>
-          <a:ln/>
-        </p:spPr>
-        <p:txBody>
-          <a:bodyPr wrap="square" lIns="0" tIns="0" rIns="0" bIns="0" rtlCol="0" anchor="ctr"/>
-          <a:lstStyle/>
-          <a:p>
-            <a:pPr indent="0" marL="0">
-              <a:buNone/>
-            </a:pPr>
-            <a:r>
-              <a:rPr lang="en-US" sz="1600" b="1" dirty="0">
-                <a:solidFill>
-                  <a:srgbClr val="14213D"/>
-                </a:solidFill>
-                <a:latin typeface="Calibri" pitchFamily="34" charset="0"/>
-                <a:ea typeface="Calibri" pitchFamily="34" charset="-122"/>
-                <a:cs typeface="Calibri" pitchFamily="34" charset="-120"/>
-              </a:rPr>
-              <a:t>Блогеров — на процент</a:t>
-            </a:r>
-            <a:endParaRPr lang="en-US" sz="1600" dirty="0"/>
-          </a:p>
-        </p:txBody>
-      </p:sp>
-      <p:sp>
-        <p:nvSpPr>
-          <p:cNvPr id="22" name="Text 20"/>
-          <p:cNvSpPr txBox="1"/>
-          <p:nvPr/>
-        </p:nvSpPr>
-        <p:spPr>
-          <a:xfrm>
-            <a:off x="7223760" y="4572000"/>
-            <a:ext cx="4114800" cy="868680"/>
-          </a:xfrm>
-          <a:prstGeom prst="rect">
-            <a:avLst/>
-          </a:prstGeom>
-          <a:noFill/>
-          <a:ln/>
-        </p:spPr>
-        <p:txBody>
-          <a:bodyPr wrap="square" lIns="0" tIns="0" rIns="0" bIns="0" rtlCol="0" anchor="ctr"/>
-          <a:lstStyle/>
-          <a:p>
-            <a:pPr indent="0" marL="0">
-              <a:buNone/>
-            </a:pPr>
-            <a:r>
-              <a:rPr lang="en-US" sz="1200" dirty="0">
-                <a:solidFill>
-                  <a:srgbClr val="6B7280"/>
-                </a:solidFill>
-                <a:latin typeface="Calibri" pitchFamily="34" charset="0"/>
-                <a:ea typeface="Calibri" pitchFamily="34" charset="-122"/>
-                <a:cs typeface="Calibri" pitchFamily="34" charset="-120"/>
-              </a:rPr>
-              <a:t>Убираем фикс 15 000 ₽ вперёд: бартер или % с промокода. Риск уходит с нас.</a:t>
-            </a:r>
-            <a:endParaRPr lang="en-US" sz="1200" dirty="0"/>
-          </a:p>
-        </p:txBody>
-      </p:sp>
-      <p:sp>
-        <p:nvSpPr>
-          <p:cNvPr id="23" name="Text 21"/>
-          <p:cNvSpPr txBox="1"/>
-          <p:nvPr/>
-        </p:nvSpPr>
-        <p:spPr>
-          <a:xfrm>
-            <a:off x="548640" y="6080760"/>
-            <a:ext cx="11064240" cy="365760"/>
-          </a:xfrm>
-          <a:prstGeom prst="rect">
-            <a:avLst/>
-          </a:prstGeom>
-          <a:noFill/>
-          <a:ln/>
-        </p:spPr>
-        <p:txBody>
-          <a:bodyPr wrap="square" lIns="0" tIns="0" rIns="0" bIns="0" rtlCol="0" anchor="ctr"/>
-          <a:lstStyle/>
-          <a:p>
-            <a:pPr indent="0" marL="0">
-              <a:buNone/>
-            </a:pPr>
-            <a:r>
-              <a:rPr lang="en-US" sz="1300" i="1" dirty="0">
-                <a:solidFill>
-                  <a:srgbClr val="6B7280"/>
-                </a:solidFill>
-                <a:latin typeface="Calibri" pitchFamily="34" charset="0"/>
-                <a:ea typeface="Calibri" pitchFamily="34" charset="-122"/>
-                <a:cs typeface="Calibri" pitchFamily="34" charset="-120"/>
-              </a:rPr>
-              <a:t>Общий бюджет не растёт сверх плановых +15%. Все движения — внутри, за счёт слабого канала.</a:t>
+              <a:t>Более 80% собранных корзин не оплачиваются. +1 п.п. на этом шаге = +5 продаж в месяц без рубля рекламы.</a:t>
             </a:r>
             <a:endParaRPr lang="en-US" sz="1300" dirty="0"/>
           </a:p>
@@ -4351,6 +5877,1137 @@
 <file path=ppt/slides/slide12.xml><?xml version="1.0" encoding="utf-8"?>
 <p:sld xmlns:a="http://schemas.openxmlformats.org/drawingml/2006/main" xmlns:r="http://schemas.openxmlformats.org/officeDocument/2006/relationships" xmlns:p="http://schemas.openxmlformats.org/presentationml/2006/main">
   <p:cSld name="Slide 12">
+    <p:spTree>
+      <p:nvGrpSpPr>
+        <p:cNvPr id="1" name=""/>
+        <p:cNvGrpSpPr/>
+        <p:nvPr/>
+      </p:nvGrpSpPr>
+      <p:grpSpPr>
+        <a:xfrm>
+          <a:off x="0" y="0"/>
+          <a:ext cx="0" cy="0"/>
+          <a:chOff x="0" y="0"/>
+          <a:chExt cx="0" cy="0"/>
+        </a:xfrm>
+      </p:grpSpPr>
+      <p:sp>
+        <p:nvSpPr>
+          <p:cNvPr id="2" name="Text 0"/>
+          <p:cNvSpPr txBox="1"/>
+          <p:nvPr/>
+        </p:nvSpPr>
+        <p:spPr>
+          <a:xfrm>
+            <a:off x="548640" y="384048"/>
+            <a:ext cx="11064240" cy="658368"/>
+          </a:xfrm>
+          <a:prstGeom prst="rect">
+            <a:avLst/>
+          </a:prstGeom>
+          <a:noFill/>
+          <a:ln/>
+        </p:spPr>
+        <p:txBody>
+          <a:bodyPr wrap="square" lIns="0" tIns="0" rIns="0" bIns="0" rtlCol="0" anchor="ctr"/>
+          <a:lstStyle/>
+          <a:p>
+            <a:pPr indent="0" marL="0">
+              <a:buNone/>
+            </a:pPr>
+            <a:r>
+              <a:rPr lang="en-US" sz="3400" b="1" dirty="0">
+                <a:solidFill>
+                  <a:srgbClr val="14213D"/>
+                </a:solidFill>
+                <a:latin typeface="Cambria" pitchFamily="34" charset="0"/>
+                <a:ea typeface="Cambria" pitchFamily="34" charset="-122"/>
+                <a:cs typeface="Cambria" pitchFamily="34" charset="-120"/>
+              </a:rPr>
+              <a:t>Решение: бюджет следующего месяца</a:t>
+            </a:r>
+            <a:endParaRPr lang="en-US" sz="3400" dirty="0"/>
+          </a:p>
+        </p:txBody>
+      </p:sp>
+      <p:sp>
+        <p:nvSpPr>
+          <p:cNvPr id="3" name="Text 1"/>
+          <p:cNvSpPr txBox="1"/>
+          <p:nvPr/>
+        </p:nvSpPr>
+        <p:spPr>
+          <a:xfrm>
+            <a:off x="548640" y="1060704"/>
+            <a:ext cx="11064240" cy="384048"/>
+          </a:xfrm>
+          <a:prstGeom prst="rect">
+            <a:avLst/>
+          </a:prstGeom>
+          <a:noFill/>
+          <a:ln/>
+        </p:spPr>
+        <p:txBody>
+          <a:bodyPr wrap="square" lIns="0" tIns="0" rIns="0" bIns="0" rtlCol="0" anchor="ctr"/>
+          <a:lstStyle/>
+          <a:p>
+            <a:pPr indent="0" marL="0">
+              <a:buNone/>
+            </a:pPr>
+            <a:r>
+              <a:rPr lang="en-US" sz="1400" dirty="0">
+                <a:solidFill>
+                  <a:srgbClr val="6B7280"/>
+                </a:solidFill>
+                <a:latin typeface="Calibri" pitchFamily="34" charset="0"/>
+                <a:ea typeface="Calibri" pitchFamily="34" charset="-122"/>
+                <a:cs typeface="Calibri" pitchFamily="34" charset="-120"/>
+              </a:rPr>
+              <a:t>54 000 ₽ → 62 000 ₽. Доля канала меняется пропорционально его ROAS</a:t>
+            </a:r>
+            <a:endParaRPr lang="en-US" sz="1400" dirty="0"/>
+          </a:p>
+        </p:txBody>
+      </p:sp>
+      <p:graphicFrame>
+        <p:nvGraphicFramePr>
+          <p:cNvPr id="4" name="Chart 0" descr=""/>
+          <p:cNvGraphicFramePr/>
+          <p:nvPr/>
+        </p:nvGraphicFramePr>
+        <p:xfrm>
+          <a:off x="457200" y="1691640"/>
+          <a:ext cx="7315200" cy="3931920"/>
+        </p:xfrm>
+        <a:graphic xmlns:a="http://schemas.openxmlformats.org/drawingml/2006/main">
+          <a:graphicData uri="http://schemas.openxmlformats.org/drawingml/2006/chart">
+            <c:chart xmlns:c="http://schemas.openxmlformats.org/drawingml/2006/chart" r:id="rId1"/>
+          </a:graphicData>
+        </a:graphic>
+      </p:graphicFrame>
+      <p:sp>
+        <p:nvSpPr>
+          <p:cNvPr id="5" name="Text 2"/>
+          <p:cNvSpPr txBox="1"/>
+          <p:nvPr/>
+        </p:nvSpPr>
+        <p:spPr>
+          <a:xfrm>
+            <a:off x="8138160" y="1965960"/>
+            <a:ext cx="3474720" cy="365760"/>
+          </a:xfrm>
+          <a:prstGeom prst="rect">
+            <a:avLst/>
+          </a:prstGeom>
+          <a:noFill/>
+          <a:ln/>
+        </p:spPr>
+        <p:txBody>
+          <a:bodyPr wrap="square" lIns="0" tIns="0" rIns="0" bIns="0" rtlCol="0" anchor="ctr"/>
+          <a:lstStyle/>
+          <a:p>
+            <a:pPr indent="0" marL="0">
+              <a:buNone/>
+            </a:pPr>
+            <a:r>
+              <a:rPr lang="en-US" sz="2000" b="1" dirty="0">
+                <a:solidFill>
+                  <a:srgbClr val="14213D"/>
+                </a:solidFill>
+                <a:latin typeface="Calibri" pitchFamily="34" charset="0"/>
+                <a:ea typeface="Calibri" pitchFamily="34" charset="-122"/>
+                <a:cs typeface="Calibri" pitchFamily="34" charset="-120"/>
+              </a:rPr>
+              <a:t>+6 634 ₽</a:t>
+            </a:r>
+            <a:endParaRPr lang="en-US" sz="2000" dirty="0"/>
+          </a:p>
+        </p:txBody>
+      </p:sp>
+      <p:sp>
+        <p:nvSpPr>
+          <p:cNvPr id="6" name="Text 3"/>
+          <p:cNvSpPr txBox="1"/>
+          <p:nvPr/>
+        </p:nvSpPr>
+        <p:spPr>
+          <a:xfrm>
+            <a:off x="8138160" y="2350008"/>
+            <a:ext cx="3474720" cy="731520"/>
+          </a:xfrm>
+          <a:prstGeom prst="rect">
+            <a:avLst/>
+          </a:prstGeom>
+          <a:noFill/>
+          <a:ln/>
+        </p:spPr>
+        <p:txBody>
+          <a:bodyPr wrap="square" lIns="0" tIns="0" rIns="0" bIns="0" rtlCol="0" anchor="ctr"/>
+          <a:lstStyle/>
+          <a:p>
+            <a:pPr indent="0" marL="0">
+              <a:buNone/>
+            </a:pPr>
+            <a:r>
+              <a:rPr lang="en-US" sz="1200" dirty="0">
+                <a:solidFill>
+                  <a:srgbClr val="6B7280"/>
+                </a:solidFill>
+                <a:latin typeface="Calibri" pitchFamily="34" charset="0"/>
+                <a:ea typeface="Calibri" pitchFamily="34" charset="-122"/>
+                <a:cs typeface="Calibri" pitchFamily="34" charset="-120"/>
+              </a:rPr>
+              <a:t>сайт — максимальный рост, потолок модели ×2</a:t>
+            </a:r>
+            <a:endParaRPr lang="en-US" sz="1200" dirty="0"/>
+          </a:p>
+        </p:txBody>
+      </p:sp>
+      <p:sp>
+        <p:nvSpPr>
+          <p:cNvPr id="7" name="Text 4"/>
+          <p:cNvSpPr txBox="1"/>
+          <p:nvPr/>
+        </p:nvSpPr>
+        <p:spPr>
+          <a:xfrm>
+            <a:off x="8138160" y="3246120"/>
+            <a:ext cx="3474720" cy="365760"/>
+          </a:xfrm>
+          <a:prstGeom prst="rect">
+            <a:avLst/>
+          </a:prstGeom>
+          <a:noFill/>
+          <a:ln/>
+        </p:spPr>
+        <p:txBody>
+          <a:bodyPr wrap="square" lIns="0" tIns="0" rIns="0" bIns="0" rtlCol="0" anchor="ctr"/>
+          <a:lstStyle/>
+          <a:p>
+            <a:pPr indent="0" marL="0">
+              <a:buNone/>
+            </a:pPr>
+            <a:r>
+              <a:rPr lang="en-US" sz="2000" b="1" dirty="0">
+                <a:solidFill>
+                  <a:srgbClr val="14213D"/>
+                </a:solidFill>
+                <a:latin typeface="Calibri" pitchFamily="34" charset="0"/>
+                <a:ea typeface="Calibri" pitchFamily="34" charset="-122"/>
+                <a:cs typeface="Calibri" pitchFamily="34" charset="-120"/>
+              </a:rPr>
+              <a:t>+4 244 ₽</a:t>
+            </a:r>
+            <a:endParaRPr lang="en-US" sz="2000" dirty="0"/>
+          </a:p>
+        </p:txBody>
+      </p:sp>
+      <p:sp>
+        <p:nvSpPr>
+          <p:cNvPr id="8" name="Text 5"/>
+          <p:cNvSpPr txBox="1"/>
+          <p:nvPr/>
+        </p:nvSpPr>
+        <p:spPr>
+          <a:xfrm>
+            <a:off x="8138160" y="3630168"/>
+            <a:ext cx="3474720" cy="731520"/>
+          </a:xfrm>
+          <a:prstGeom prst="rect">
+            <a:avLst/>
+          </a:prstGeom>
+          <a:noFill/>
+          <a:ln/>
+        </p:spPr>
+        <p:txBody>
+          <a:bodyPr wrap="square" lIns="0" tIns="0" rIns="0" bIns="0" rtlCol="0" anchor="ctr"/>
+          <a:lstStyle/>
+          <a:p>
+            <a:pPr indent="0" marL="0">
+              <a:buNone/>
+            </a:pPr>
+            <a:r>
+              <a:rPr lang="en-US" sz="1200" dirty="0">
+                <a:solidFill>
+                  <a:srgbClr val="6B7280"/>
+                </a:solidFill>
+                <a:latin typeface="Calibri" pitchFamily="34" charset="0"/>
+                <a:ea typeface="Calibri" pitchFamily="34" charset="-122"/>
+                <a:cs typeface="Calibri" pitchFamily="34" charset="-120"/>
+              </a:rPr>
+              <a:t>LaModa — берёт объём немедленно</a:t>
+            </a:r>
+            <a:endParaRPr lang="en-US" sz="1200" dirty="0"/>
+          </a:p>
+        </p:txBody>
+      </p:sp>
+      <p:sp>
+        <p:nvSpPr>
+          <p:cNvPr id="9" name="Text 6"/>
+          <p:cNvSpPr txBox="1"/>
+          <p:nvPr/>
+        </p:nvSpPr>
+        <p:spPr>
+          <a:xfrm>
+            <a:off x="8138160" y="4526280"/>
+            <a:ext cx="3474720" cy="365760"/>
+          </a:xfrm>
+          <a:prstGeom prst="rect">
+            <a:avLst/>
+          </a:prstGeom>
+          <a:noFill/>
+          <a:ln/>
+        </p:spPr>
+        <p:txBody>
+          <a:bodyPr wrap="square" lIns="0" tIns="0" rIns="0" bIns="0" rtlCol="0" anchor="ctr"/>
+          <a:lstStyle/>
+          <a:p>
+            <a:pPr indent="0" marL="0">
+              <a:buNone/>
+            </a:pPr>
+            <a:r>
+              <a:rPr lang="en-US" sz="2000" b="1" dirty="0">
+                <a:solidFill>
+                  <a:srgbClr val="C1121F"/>
+                </a:solidFill>
+                <a:latin typeface="Calibri" pitchFamily="34" charset="0"/>
+                <a:ea typeface="Calibri" pitchFamily="34" charset="-122"/>
+                <a:cs typeface="Calibri" pitchFamily="34" charset="-120"/>
+              </a:rPr>
+              <a:t>−4 183 ₽</a:t>
+            </a:r>
+            <a:endParaRPr lang="en-US" sz="2000" dirty="0"/>
+          </a:p>
+        </p:txBody>
+      </p:sp>
+      <p:sp>
+        <p:nvSpPr>
+          <p:cNvPr id="10" name="Text 7"/>
+          <p:cNvSpPr txBox="1"/>
+          <p:nvPr/>
+        </p:nvSpPr>
+        <p:spPr>
+          <a:xfrm>
+            <a:off x="8138160" y="4910328"/>
+            <a:ext cx="3474720" cy="731520"/>
+          </a:xfrm>
+          <a:prstGeom prst="rect">
+            <a:avLst/>
+          </a:prstGeom>
+          <a:noFill/>
+          <a:ln/>
+        </p:spPr>
+        <p:txBody>
+          <a:bodyPr wrap="square" lIns="0" tIns="0" rIns="0" bIns="0" rtlCol="0" anchor="ctr"/>
+          <a:lstStyle/>
+          <a:p>
+            <a:pPr indent="0" marL="0">
+              <a:buNone/>
+            </a:pPr>
+            <a:r>
+              <a:rPr lang="en-US" sz="1200" dirty="0">
+                <a:solidFill>
+                  <a:srgbClr val="6B7280"/>
+                </a:solidFill>
+                <a:latin typeface="Calibri" pitchFamily="34" charset="0"/>
+                <a:ea typeface="Calibri" pitchFamily="34" charset="-122"/>
+                <a:cs typeface="Calibri" pitchFamily="34" charset="-120"/>
+              </a:rPr>
+              <a:t>ВК — сокращаем вдвое, в ноль не выключаем</a:t>
+            </a:r>
+            <a:endParaRPr lang="en-US" sz="1200" dirty="0"/>
+          </a:p>
+        </p:txBody>
+      </p:sp>
+      <p:sp>
+        <p:nvSpPr>
+          <p:cNvPr id="11" name="Text 8"/>
+          <p:cNvSpPr txBox="1"/>
+          <p:nvPr/>
+        </p:nvSpPr>
+        <p:spPr>
+          <a:xfrm>
+            <a:off x="548640" y="5806440"/>
+            <a:ext cx="11064240" cy="365760"/>
+          </a:xfrm>
+          <a:prstGeom prst="rect">
+            <a:avLst/>
+          </a:prstGeom>
+          <a:noFill/>
+          <a:ln/>
+        </p:spPr>
+        <p:txBody>
+          <a:bodyPr wrap="square" lIns="0" tIns="0" rIns="0" bIns="0" rtlCol="0" anchor="ctr"/>
+          <a:lstStyle/>
+          <a:p>
+            <a:pPr indent="0" marL="0">
+              <a:buNone/>
+            </a:pPr>
+            <a:r>
+              <a:rPr lang="en-US" sz="1300" i="1" dirty="0">
+                <a:solidFill>
+                  <a:srgbClr val="6B7280"/>
+                </a:solidFill>
+                <a:latin typeface="Calibri" pitchFamily="34" charset="0"/>
+                <a:ea typeface="Calibri" pitchFamily="34" charset="-122"/>
+                <a:cs typeface="Calibri" pitchFamily="34" charset="-120"/>
+              </a:rPr>
+              <a:t>Поправка к модели: сайту нельзя «выдать» 11 634 ₽ и получить трафик завтра — SEO даёт эффект через 2–3 месяца.</a:t>
+            </a:r>
+            <a:endParaRPr lang="en-US" sz="1300" dirty="0"/>
+          </a:p>
+        </p:txBody>
+      </p:sp>
+    </p:spTree>
+  </p:cSld>
+  <p:clrMapOvr>
+    <a:masterClrMapping/>
+  </p:clrMapOvr>
+</p:sld>
+</file>
+
+<file path=ppt/slides/slide13.xml><?xml version="1.0" encoding="utf-8"?>
+<p:sld xmlns:a="http://schemas.openxmlformats.org/drawingml/2006/main" xmlns:r="http://schemas.openxmlformats.org/officeDocument/2006/relationships" xmlns:p="http://schemas.openxmlformats.org/presentationml/2006/main">
+  <p:cSld name="Slide 13">
+    <p:spTree>
+      <p:nvGrpSpPr>
+        <p:cNvPr id="1" name=""/>
+        <p:cNvGrpSpPr/>
+        <p:nvPr/>
+      </p:nvGrpSpPr>
+      <p:grpSpPr>
+        <a:xfrm>
+          <a:off x="0" y="0"/>
+          <a:ext cx="0" cy="0"/>
+          <a:chOff x="0" y="0"/>
+          <a:chExt cx="0" cy="0"/>
+        </a:xfrm>
+      </p:grpSpPr>
+      <p:sp>
+        <p:nvSpPr>
+          <p:cNvPr id="2" name="Text 0"/>
+          <p:cNvSpPr txBox="1"/>
+          <p:nvPr/>
+        </p:nvSpPr>
+        <p:spPr>
+          <a:xfrm>
+            <a:off x="548640" y="384048"/>
+            <a:ext cx="11064240" cy="658368"/>
+          </a:xfrm>
+          <a:prstGeom prst="rect">
+            <a:avLst/>
+          </a:prstGeom>
+          <a:noFill/>
+          <a:ln/>
+        </p:spPr>
+        <p:txBody>
+          <a:bodyPr wrap="square" lIns="0" tIns="0" rIns="0" bIns="0" rtlCol="0" anchor="ctr"/>
+          <a:lstStyle/>
+          <a:p>
+            <a:pPr indent="0" marL="0">
+              <a:buNone/>
+            </a:pPr>
+            <a:r>
+              <a:rPr lang="en-US" sz="3400" b="1" dirty="0">
+                <a:solidFill>
+                  <a:srgbClr val="14213D"/>
+                </a:solidFill>
+                <a:latin typeface="Cambria" pitchFamily="34" charset="0"/>
+                <a:ea typeface="Cambria" pitchFamily="34" charset="-122"/>
+                <a:cs typeface="Cambria" pitchFamily="34" charset="-120"/>
+              </a:rPr>
+              <a:t>Что делаем в следующем месяце</a:t>
+            </a:r>
+            <a:endParaRPr lang="en-US" sz="3400" dirty="0"/>
+          </a:p>
+        </p:txBody>
+      </p:sp>
+      <p:sp>
+        <p:nvSpPr>
+          <p:cNvPr id="3" name="Shape 1"/>
+          <p:cNvSpPr/>
+          <p:nvPr/>
+        </p:nvSpPr>
+        <p:spPr>
+          <a:xfrm>
+            <a:off x="548640" y="1645920"/>
+            <a:ext cx="5349240" cy="1828800"/>
+          </a:xfrm>
+          <a:prstGeom prst="roundRect">
+            <a:avLst>
+              <a:gd name="adj" fmla="val 3000"/>
+            </a:avLst>
+          </a:prstGeom>
+          <a:solidFill>
+            <a:srgbClr val="F1F2F4"/>
+          </a:solidFill>
+          <a:ln/>
+        </p:spPr>
+      </p:sp>
+      <p:sp>
+        <p:nvSpPr>
+          <p:cNvPr id="4" name="Shape 2"/>
+          <p:cNvSpPr/>
+          <p:nvPr/>
+        </p:nvSpPr>
+        <p:spPr>
+          <a:xfrm>
+            <a:off x="914400" y="1965960"/>
+            <a:ext cx="457200" cy="457200"/>
+          </a:xfrm>
+          <a:prstGeom prst="ellipse">
+            <a:avLst/>
+          </a:prstGeom>
+          <a:solidFill>
+            <a:srgbClr val="FCA311"/>
+          </a:solidFill>
+          <a:ln/>
+        </p:spPr>
+      </p:sp>
+      <p:sp>
+        <p:nvSpPr>
+          <p:cNvPr id="5" name="Text 3"/>
+          <p:cNvSpPr txBox="1"/>
+          <p:nvPr/>
+        </p:nvSpPr>
+        <p:spPr>
+          <a:xfrm>
+            <a:off x="914400" y="2039112"/>
+            <a:ext cx="457200" cy="310896"/>
+          </a:xfrm>
+          <a:prstGeom prst="rect">
+            <a:avLst/>
+          </a:prstGeom>
+          <a:noFill/>
+          <a:ln/>
+        </p:spPr>
+        <p:txBody>
+          <a:bodyPr wrap="square" lIns="0" tIns="0" rIns="0" bIns="0" rtlCol="0" anchor="ctr"/>
+          <a:lstStyle/>
+          <a:p>
+            <a:pPr algn="ctr" indent="0" marL="0">
+              <a:buNone/>
+            </a:pPr>
+            <a:r>
+              <a:rPr lang="en-US" sz="1700" b="1" dirty="0">
+                <a:solidFill>
+                  <a:srgbClr val="14213D"/>
+                </a:solidFill>
+                <a:latin typeface="Calibri" pitchFamily="34" charset="0"/>
+                <a:ea typeface="Calibri" pitchFamily="34" charset="-122"/>
+                <a:cs typeface="Calibri" pitchFamily="34" charset="-120"/>
+              </a:rPr>
+              <a:t>1</a:t>
+            </a:r>
+            <a:endParaRPr lang="en-US" sz="1700" dirty="0"/>
+          </a:p>
+        </p:txBody>
+      </p:sp>
+      <p:sp>
+        <p:nvSpPr>
+          <p:cNvPr id="6" name="Text 4"/>
+          <p:cNvSpPr txBox="1"/>
+          <p:nvPr/>
+        </p:nvSpPr>
+        <p:spPr>
+          <a:xfrm>
+            <a:off x="1508760" y="1993392"/>
+            <a:ext cx="4114800" cy="365760"/>
+          </a:xfrm>
+          <a:prstGeom prst="rect">
+            <a:avLst/>
+          </a:prstGeom>
+          <a:noFill/>
+          <a:ln/>
+        </p:spPr>
+        <p:txBody>
+          <a:bodyPr wrap="square" lIns="0" tIns="0" rIns="0" bIns="0" rtlCol="0" anchor="ctr"/>
+          <a:lstStyle/>
+          <a:p>
+            <a:pPr indent="0" marL="0">
+              <a:buNone/>
+            </a:pPr>
+            <a:r>
+              <a:rPr lang="en-US" sz="1600" b="1" dirty="0">
+                <a:solidFill>
+                  <a:srgbClr val="14213D"/>
+                </a:solidFill>
+                <a:latin typeface="Calibri" pitchFamily="34" charset="0"/>
+                <a:ea typeface="Calibri" pitchFamily="34" charset="-122"/>
+                <a:cs typeface="Calibri" pitchFamily="34" charset="-120"/>
+              </a:rPr>
+              <a:t>Снимаем 4 200 ₽ с ВК</a:t>
+            </a:r>
+            <a:endParaRPr lang="en-US" sz="1600" dirty="0"/>
+          </a:p>
+        </p:txBody>
+      </p:sp>
+      <p:sp>
+        <p:nvSpPr>
+          <p:cNvPr id="7" name="Text 5"/>
+          <p:cNvSpPr txBox="1"/>
+          <p:nvPr/>
+        </p:nvSpPr>
+        <p:spPr>
+          <a:xfrm>
+            <a:off x="1508760" y="2423160"/>
+            <a:ext cx="4114800" cy="868680"/>
+          </a:xfrm>
+          <a:prstGeom prst="rect">
+            <a:avLst/>
+          </a:prstGeom>
+          <a:noFill/>
+          <a:ln/>
+        </p:spPr>
+        <p:txBody>
+          <a:bodyPr wrap="square" lIns="0" tIns="0" rIns="0" bIns="0" rtlCol="0" anchor="ctr"/>
+          <a:lstStyle/>
+          <a:p>
+            <a:pPr indent="0" marL="0">
+              <a:buNone/>
+            </a:pPr>
+            <a:r>
+              <a:rPr lang="en-US" sz="1200" dirty="0">
+                <a:solidFill>
+                  <a:srgbClr val="6B7280"/>
+                </a:solidFill>
+                <a:latin typeface="Calibri" pitchFamily="34" charset="0"/>
+                <a:ea typeface="Calibri" pitchFamily="34" charset="-122"/>
+                <a:cs typeface="Calibri" pitchFamily="34" charset="-120"/>
+              </a:rPr>
+              <a:t>ДРР 42%, CAC 1 429 ₽ при марже 1 763 ₽. Любое масштабирование уведёт канал в минус.</a:t>
+            </a:r>
+            <a:endParaRPr lang="en-US" sz="1200" dirty="0"/>
+          </a:p>
+        </p:txBody>
+      </p:sp>
+      <p:sp>
+        <p:nvSpPr>
+          <p:cNvPr id="8" name="Shape 6"/>
+          <p:cNvSpPr/>
+          <p:nvPr/>
+        </p:nvSpPr>
+        <p:spPr>
+          <a:xfrm>
+            <a:off x="6263640" y="1645920"/>
+            <a:ext cx="5349240" cy="1828800"/>
+          </a:xfrm>
+          <a:prstGeom prst="roundRect">
+            <a:avLst>
+              <a:gd name="adj" fmla="val 3000"/>
+            </a:avLst>
+          </a:prstGeom>
+          <a:solidFill>
+            <a:srgbClr val="F1F2F4"/>
+          </a:solidFill>
+          <a:ln/>
+        </p:spPr>
+      </p:sp>
+      <p:sp>
+        <p:nvSpPr>
+          <p:cNvPr id="9" name="Shape 7"/>
+          <p:cNvSpPr/>
+          <p:nvPr/>
+        </p:nvSpPr>
+        <p:spPr>
+          <a:xfrm>
+            <a:off x="6629400" y="1965960"/>
+            <a:ext cx="457200" cy="457200"/>
+          </a:xfrm>
+          <a:prstGeom prst="ellipse">
+            <a:avLst/>
+          </a:prstGeom>
+          <a:solidFill>
+            <a:srgbClr val="FCA311"/>
+          </a:solidFill>
+          <a:ln/>
+        </p:spPr>
+      </p:sp>
+      <p:sp>
+        <p:nvSpPr>
+          <p:cNvPr id="10" name="Text 8"/>
+          <p:cNvSpPr txBox="1"/>
+          <p:nvPr/>
+        </p:nvSpPr>
+        <p:spPr>
+          <a:xfrm>
+            <a:off x="6629400" y="2039112"/>
+            <a:ext cx="457200" cy="310896"/>
+          </a:xfrm>
+          <a:prstGeom prst="rect">
+            <a:avLst/>
+          </a:prstGeom>
+          <a:noFill/>
+          <a:ln/>
+        </p:spPr>
+        <p:txBody>
+          <a:bodyPr wrap="square" lIns="0" tIns="0" rIns="0" bIns="0" rtlCol="0" anchor="ctr"/>
+          <a:lstStyle/>
+          <a:p>
+            <a:pPr algn="ctr" indent="0" marL="0">
+              <a:buNone/>
+            </a:pPr>
+            <a:r>
+              <a:rPr lang="en-US" sz="1700" b="1" dirty="0">
+                <a:solidFill>
+                  <a:srgbClr val="14213D"/>
+                </a:solidFill>
+                <a:latin typeface="Calibri" pitchFamily="34" charset="0"/>
+                <a:ea typeface="Calibri" pitchFamily="34" charset="-122"/>
+                <a:cs typeface="Calibri" pitchFamily="34" charset="-120"/>
+              </a:rPr>
+              <a:t>2</a:t>
+            </a:r>
+            <a:endParaRPr lang="en-US" sz="1700" dirty="0"/>
+          </a:p>
+        </p:txBody>
+      </p:sp>
+      <p:sp>
+        <p:nvSpPr>
+          <p:cNvPr id="11" name="Text 9"/>
+          <p:cNvSpPr txBox="1"/>
+          <p:nvPr/>
+        </p:nvSpPr>
+        <p:spPr>
+          <a:xfrm>
+            <a:off x="7223760" y="1993392"/>
+            <a:ext cx="4114800" cy="365760"/>
+          </a:xfrm>
+          <a:prstGeom prst="rect">
+            <a:avLst/>
+          </a:prstGeom>
+          <a:noFill/>
+          <a:ln/>
+        </p:spPr>
+        <p:txBody>
+          <a:bodyPr wrap="square" lIns="0" tIns="0" rIns="0" bIns="0" rtlCol="0" anchor="ctr"/>
+          <a:lstStyle/>
+          <a:p>
+            <a:pPr indent="0" marL="0">
+              <a:buNone/>
+            </a:pPr>
+            <a:r>
+              <a:rPr lang="en-US" sz="1600" b="1" dirty="0">
+                <a:solidFill>
+                  <a:srgbClr val="14213D"/>
+                </a:solidFill>
+                <a:latin typeface="Calibri" pitchFamily="34" charset="0"/>
+                <a:ea typeface="Calibri" pitchFamily="34" charset="-122"/>
+                <a:cs typeface="Calibri" pitchFamily="34" charset="-120"/>
+              </a:rPr>
+              <a:t>Отдаём их в LaModa</a:t>
+            </a:r>
+            <a:endParaRPr lang="en-US" sz="1600" dirty="0"/>
+          </a:p>
+        </p:txBody>
+      </p:sp>
+      <p:sp>
+        <p:nvSpPr>
+          <p:cNvPr id="12" name="Text 10"/>
+          <p:cNvSpPr txBox="1"/>
+          <p:nvPr/>
+        </p:nvSpPr>
+        <p:spPr>
+          <a:xfrm>
+            <a:off x="7223760" y="2423160"/>
+            <a:ext cx="4114800" cy="868680"/>
+          </a:xfrm>
+          <a:prstGeom prst="rect">
+            <a:avLst/>
+          </a:prstGeom>
+          <a:noFill/>
+          <a:ln/>
+        </p:spPr>
+        <p:txBody>
+          <a:bodyPr wrap="square" lIns="0" tIns="0" rIns="0" bIns="0" rtlCol="0" anchor="ctr"/>
+          <a:lstStyle/>
+          <a:p>
+            <a:pPr indent="0" marL="0">
+              <a:buNone/>
+            </a:pPr>
+            <a:r>
+              <a:rPr lang="en-US" sz="1200" dirty="0">
+                <a:solidFill>
+                  <a:srgbClr val="6B7280"/>
+                </a:solidFill>
+                <a:latin typeface="Calibri" pitchFamily="34" charset="0"/>
+                <a:ea typeface="Calibri" pitchFamily="34" charset="-122"/>
+                <a:cs typeface="Calibri" pitchFamily="34" charset="-120"/>
+              </a:rPr>
+              <a:t>Единственный канал, который конвертирует деньги в объём сразу, без лага.</a:t>
+            </a:r>
+            <a:endParaRPr lang="en-US" sz="1200" dirty="0"/>
+          </a:p>
+        </p:txBody>
+      </p:sp>
+      <p:sp>
+        <p:nvSpPr>
+          <p:cNvPr id="13" name="Shape 11"/>
+          <p:cNvSpPr/>
+          <p:nvPr/>
+        </p:nvSpPr>
+        <p:spPr>
+          <a:xfrm>
+            <a:off x="548640" y="3794760"/>
+            <a:ext cx="5349240" cy="1828800"/>
+          </a:xfrm>
+          <a:prstGeom prst="roundRect">
+            <a:avLst>
+              <a:gd name="adj" fmla="val 3000"/>
+            </a:avLst>
+          </a:prstGeom>
+          <a:solidFill>
+            <a:srgbClr val="F1F2F4"/>
+          </a:solidFill>
+          <a:ln/>
+        </p:spPr>
+      </p:sp>
+      <p:sp>
+        <p:nvSpPr>
+          <p:cNvPr id="14" name="Shape 12"/>
+          <p:cNvSpPr/>
+          <p:nvPr/>
+        </p:nvSpPr>
+        <p:spPr>
+          <a:xfrm>
+            <a:off x="914400" y="4114800"/>
+            <a:ext cx="457200" cy="457200"/>
+          </a:xfrm>
+          <a:prstGeom prst="ellipse">
+            <a:avLst/>
+          </a:prstGeom>
+          <a:solidFill>
+            <a:srgbClr val="FCA311"/>
+          </a:solidFill>
+          <a:ln/>
+        </p:spPr>
+      </p:sp>
+      <p:sp>
+        <p:nvSpPr>
+          <p:cNvPr id="15" name="Text 13"/>
+          <p:cNvSpPr txBox="1"/>
+          <p:nvPr/>
+        </p:nvSpPr>
+        <p:spPr>
+          <a:xfrm>
+            <a:off x="914400" y="4187952"/>
+            <a:ext cx="457200" cy="310896"/>
+          </a:xfrm>
+          <a:prstGeom prst="rect">
+            <a:avLst/>
+          </a:prstGeom>
+          <a:noFill/>
+          <a:ln/>
+        </p:spPr>
+        <p:txBody>
+          <a:bodyPr wrap="square" lIns="0" tIns="0" rIns="0" bIns="0" rtlCol="0" anchor="ctr"/>
+          <a:lstStyle/>
+          <a:p>
+            <a:pPr algn="ctr" indent="0" marL="0">
+              <a:buNone/>
+            </a:pPr>
+            <a:r>
+              <a:rPr lang="en-US" sz="1700" b="1" dirty="0">
+                <a:solidFill>
+                  <a:srgbClr val="14213D"/>
+                </a:solidFill>
+                <a:latin typeface="Calibri" pitchFamily="34" charset="0"/>
+                <a:ea typeface="Calibri" pitchFamily="34" charset="-122"/>
+                <a:cs typeface="Calibri" pitchFamily="34" charset="-120"/>
+              </a:rPr>
+              <a:t>3</a:t>
+            </a:r>
+            <a:endParaRPr lang="en-US" sz="1700" dirty="0"/>
+          </a:p>
+        </p:txBody>
+      </p:sp>
+      <p:sp>
+        <p:nvSpPr>
+          <p:cNvPr id="16" name="Text 14"/>
+          <p:cNvSpPr txBox="1"/>
+          <p:nvPr/>
+        </p:nvSpPr>
+        <p:spPr>
+          <a:xfrm>
+            <a:off x="1508760" y="4142232"/>
+            <a:ext cx="4114800" cy="365760"/>
+          </a:xfrm>
+          <a:prstGeom prst="rect">
+            <a:avLst/>
+          </a:prstGeom>
+          <a:noFill/>
+          <a:ln/>
+        </p:spPr>
+        <p:txBody>
+          <a:bodyPr wrap="square" lIns="0" tIns="0" rIns="0" bIns="0" rtlCol="0" anchor="ctr"/>
+          <a:lstStyle/>
+          <a:p>
+            <a:pPr indent="0" marL="0">
+              <a:buNone/>
+            </a:pPr>
+            <a:r>
+              <a:rPr lang="en-US" sz="1600" b="1" dirty="0">
+                <a:solidFill>
+                  <a:srgbClr val="14213D"/>
+                </a:solidFill>
+                <a:latin typeface="Calibri" pitchFamily="34" charset="0"/>
+                <a:ea typeface="Calibri" pitchFamily="34" charset="-122"/>
+                <a:cs typeface="Calibri" pitchFamily="34" charset="-120"/>
+              </a:rPr>
+              <a:t>SEO наращиваем плавно</a:t>
+            </a:r>
+            <a:endParaRPr lang="en-US" sz="1600" dirty="0"/>
+          </a:p>
+        </p:txBody>
+      </p:sp>
+      <p:sp>
+        <p:nvSpPr>
+          <p:cNvPr id="17" name="Text 15"/>
+          <p:cNvSpPr txBox="1"/>
+          <p:nvPr/>
+        </p:nvSpPr>
+        <p:spPr>
+          <a:xfrm>
+            <a:off x="1508760" y="4572000"/>
+            <a:ext cx="4114800" cy="868680"/>
+          </a:xfrm>
+          <a:prstGeom prst="rect">
+            <a:avLst/>
+          </a:prstGeom>
+          <a:noFill/>
+          <a:ln/>
+        </p:spPr>
+        <p:txBody>
+          <a:bodyPr wrap="square" lIns="0" tIns="0" rIns="0" bIns="0" rtlCol="0" anchor="ctr"/>
+          <a:lstStyle/>
+          <a:p>
+            <a:pPr indent="0" marL="0">
+              <a:buNone/>
+            </a:pPr>
+            <a:r>
+              <a:rPr lang="en-US" sz="1200" dirty="0">
+                <a:solidFill>
+                  <a:srgbClr val="6B7280"/>
+                </a:solidFill>
+                <a:latin typeface="Calibri" pitchFamily="34" charset="0"/>
+                <a:ea typeface="Calibri" pitchFamily="34" charset="-122"/>
+                <a:cs typeface="Calibri" pitchFamily="34" charset="-120"/>
+              </a:rPr>
+              <a:t>Бюджет сайта поднимаем поэтапно: отдача приходит через 2–3 месяца, разом её не купить.</a:t>
+            </a:r>
+            <a:endParaRPr lang="en-US" sz="1200" dirty="0"/>
+          </a:p>
+        </p:txBody>
+      </p:sp>
+      <p:sp>
+        <p:nvSpPr>
+          <p:cNvPr id="18" name="Shape 16"/>
+          <p:cNvSpPr/>
+          <p:nvPr/>
+        </p:nvSpPr>
+        <p:spPr>
+          <a:xfrm>
+            <a:off x="6263640" y="3794760"/>
+            <a:ext cx="5349240" cy="1828800"/>
+          </a:xfrm>
+          <a:prstGeom prst="roundRect">
+            <a:avLst>
+              <a:gd name="adj" fmla="val 3000"/>
+            </a:avLst>
+          </a:prstGeom>
+          <a:solidFill>
+            <a:srgbClr val="F1F2F4"/>
+          </a:solidFill>
+          <a:ln/>
+        </p:spPr>
+      </p:sp>
+      <p:sp>
+        <p:nvSpPr>
+          <p:cNvPr id="19" name="Shape 17"/>
+          <p:cNvSpPr/>
+          <p:nvPr/>
+        </p:nvSpPr>
+        <p:spPr>
+          <a:xfrm>
+            <a:off x="6629400" y="4114800"/>
+            <a:ext cx="457200" cy="457200"/>
+          </a:xfrm>
+          <a:prstGeom prst="ellipse">
+            <a:avLst/>
+          </a:prstGeom>
+          <a:solidFill>
+            <a:srgbClr val="FCA311"/>
+          </a:solidFill>
+          <a:ln/>
+        </p:spPr>
+      </p:sp>
+      <p:sp>
+        <p:nvSpPr>
+          <p:cNvPr id="20" name="Text 18"/>
+          <p:cNvSpPr txBox="1"/>
+          <p:nvPr/>
+        </p:nvSpPr>
+        <p:spPr>
+          <a:xfrm>
+            <a:off x="6629400" y="4187952"/>
+            <a:ext cx="457200" cy="310896"/>
+          </a:xfrm>
+          <a:prstGeom prst="rect">
+            <a:avLst/>
+          </a:prstGeom>
+          <a:noFill/>
+          <a:ln/>
+        </p:spPr>
+        <p:txBody>
+          <a:bodyPr wrap="square" lIns="0" tIns="0" rIns="0" bIns="0" rtlCol="0" anchor="ctr"/>
+          <a:lstStyle/>
+          <a:p>
+            <a:pPr algn="ctr" indent="0" marL="0">
+              <a:buNone/>
+            </a:pPr>
+            <a:r>
+              <a:rPr lang="en-US" sz="1700" b="1" dirty="0">
+                <a:solidFill>
+                  <a:srgbClr val="14213D"/>
+                </a:solidFill>
+                <a:latin typeface="Calibri" pitchFamily="34" charset="0"/>
+                <a:ea typeface="Calibri" pitchFamily="34" charset="-122"/>
+                <a:cs typeface="Calibri" pitchFamily="34" charset="-120"/>
+              </a:rPr>
+              <a:t>4</a:t>
+            </a:r>
+            <a:endParaRPr lang="en-US" sz="1700" dirty="0"/>
+          </a:p>
+        </p:txBody>
+      </p:sp>
+      <p:sp>
+        <p:nvSpPr>
+          <p:cNvPr id="21" name="Text 19"/>
+          <p:cNvSpPr txBox="1"/>
+          <p:nvPr/>
+        </p:nvSpPr>
+        <p:spPr>
+          <a:xfrm>
+            <a:off x="7223760" y="4142232"/>
+            <a:ext cx="4114800" cy="365760"/>
+          </a:xfrm>
+          <a:prstGeom prst="rect">
+            <a:avLst/>
+          </a:prstGeom>
+          <a:noFill/>
+          <a:ln/>
+        </p:spPr>
+        <p:txBody>
+          <a:bodyPr wrap="square" lIns="0" tIns="0" rIns="0" bIns="0" rtlCol="0" anchor="ctr"/>
+          <a:lstStyle/>
+          <a:p>
+            <a:pPr indent="0" marL="0">
+              <a:buNone/>
+            </a:pPr>
+            <a:r>
+              <a:rPr lang="en-US" sz="1600" b="1" dirty="0">
+                <a:solidFill>
+                  <a:srgbClr val="14213D"/>
+                </a:solidFill>
+                <a:latin typeface="Calibri" pitchFamily="34" charset="0"/>
+                <a:ea typeface="Calibri" pitchFamily="34" charset="-122"/>
+                <a:cs typeface="Calibri" pitchFamily="34" charset="-120"/>
+              </a:rPr>
+              <a:t>Блогеров — на процент</a:t>
+            </a:r>
+            <a:endParaRPr lang="en-US" sz="1600" dirty="0"/>
+          </a:p>
+        </p:txBody>
+      </p:sp>
+      <p:sp>
+        <p:nvSpPr>
+          <p:cNvPr id="22" name="Text 20"/>
+          <p:cNvSpPr txBox="1"/>
+          <p:nvPr/>
+        </p:nvSpPr>
+        <p:spPr>
+          <a:xfrm>
+            <a:off x="7223760" y="4572000"/>
+            <a:ext cx="4114800" cy="868680"/>
+          </a:xfrm>
+          <a:prstGeom prst="rect">
+            <a:avLst/>
+          </a:prstGeom>
+          <a:noFill/>
+          <a:ln/>
+        </p:spPr>
+        <p:txBody>
+          <a:bodyPr wrap="square" lIns="0" tIns="0" rIns="0" bIns="0" rtlCol="0" anchor="ctr"/>
+          <a:lstStyle/>
+          <a:p>
+            <a:pPr indent="0" marL="0">
+              <a:buNone/>
+            </a:pPr>
+            <a:r>
+              <a:rPr lang="en-US" sz="1200" dirty="0">
+                <a:solidFill>
+                  <a:srgbClr val="6B7280"/>
+                </a:solidFill>
+                <a:latin typeface="Calibri" pitchFamily="34" charset="0"/>
+                <a:ea typeface="Calibri" pitchFamily="34" charset="-122"/>
+                <a:cs typeface="Calibri" pitchFamily="34" charset="-120"/>
+              </a:rPr>
+              <a:t>Убираем фикс 15 000 ₽ вперёд: бартер или % с промокода. Риск уходит с нас.</a:t>
+            </a:r>
+            <a:endParaRPr lang="en-US" sz="1200" dirty="0"/>
+          </a:p>
+        </p:txBody>
+      </p:sp>
+      <p:sp>
+        <p:nvSpPr>
+          <p:cNvPr id="23" name="Text 21"/>
+          <p:cNvSpPr txBox="1"/>
+          <p:nvPr/>
+        </p:nvSpPr>
+        <p:spPr>
+          <a:xfrm>
+            <a:off x="548640" y="6080760"/>
+            <a:ext cx="11064240" cy="365760"/>
+          </a:xfrm>
+          <a:prstGeom prst="rect">
+            <a:avLst/>
+          </a:prstGeom>
+          <a:noFill/>
+          <a:ln/>
+        </p:spPr>
+        <p:txBody>
+          <a:bodyPr wrap="square" lIns="0" tIns="0" rIns="0" bIns="0" rtlCol="0" anchor="ctr"/>
+          <a:lstStyle/>
+          <a:p>
+            <a:pPr indent="0" marL="0">
+              <a:buNone/>
+            </a:pPr>
+            <a:r>
+              <a:rPr lang="en-US" sz="1300" i="1" dirty="0">
+                <a:solidFill>
+                  <a:srgbClr val="6B7280"/>
+                </a:solidFill>
+                <a:latin typeface="Calibri" pitchFamily="34" charset="0"/>
+                <a:ea typeface="Calibri" pitchFamily="34" charset="-122"/>
+                <a:cs typeface="Calibri" pitchFamily="34" charset="-120"/>
+              </a:rPr>
+              <a:t>Общий бюджет не растёт сверх плановых +15%. Все движения — внутри, за счёт слабого канала.</a:t>
+            </a:r>
+            <a:endParaRPr lang="en-US" sz="1300" dirty="0"/>
+          </a:p>
+        </p:txBody>
+      </p:sp>
+    </p:spTree>
+  </p:cSld>
+  <p:clrMapOvr>
+    <a:masterClrMapping/>
+  </p:clrMapOvr>
+</p:sld>
+</file>
+
+<file path=ppt/slides/slide14.xml><?xml version="1.0" encoding="utf-8"?>
+<p:sld xmlns:a="http://schemas.openxmlformats.org/drawingml/2006/main" xmlns:r="http://schemas.openxmlformats.org/officeDocument/2006/relationships" xmlns:p="http://schemas.openxmlformats.org/presentationml/2006/main">
+  <p:cSld name="Slide 14">
     <p:bg>
       <p:bgPr>
         <a:solidFill>
@@ -11424,7 +14081,7 @@
                 <a:ea typeface="Cambria" pitchFamily="34" charset="-122"/>
                 <a:cs typeface="Cambria" pitchFamily="34" charset="-120"/>
               </a:rPr>
-              <a:t>Эффективность ≠ деньги</a:t>
+              <a:t>Цена клиента</a:t>
             </a:r>
             <a:endParaRPr lang="en-US" sz="3400" dirty="0"/>
           </a:p>
@@ -11463,44 +14120,38 @@
                 <a:ea typeface="Calibri" pitchFamily="34" charset="-122"/>
                 <a:cs typeface="Calibri" pitchFamily="34" charset="-120"/>
               </a:rPr>
-              <a:t>Один и тот же месяц, два разных рейтинга</a:t>
+              <a:t>Сколько стоит привлечь покупателя — и сколько он приносит</a:t>
             </a:r>
             <a:endParaRPr lang="en-US" sz="1400" dirty="0"/>
           </a:p>
         </p:txBody>
       </p:sp>
-      <p:sp>
-        <p:nvSpPr>
-          <p:cNvPr id="4" name="Shape 2"/>
-          <p:cNvSpPr/>
-          <p:nvPr/>
-        </p:nvSpPr>
-        <p:spPr>
-          <a:xfrm>
-            <a:off x="548640" y="1645920"/>
-            <a:ext cx="5349240" cy="3108960"/>
-          </a:xfrm>
-          <a:prstGeom prst="roundRect">
-            <a:avLst>
-              <a:gd name="adj" fmla="val 1765"/>
-            </a:avLst>
-          </a:prstGeom>
-          <a:solidFill>
-            <a:srgbClr val="F1F2F4"/>
-          </a:solidFill>
-          <a:ln/>
-        </p:spPr>
-      </p:sp>
-      <p:sp>
-        <p:nvSpPr>
-          <p:cNvPr id="5" name="Text 3"/>
-          <p:cNvSpPr txBox="1"/>
-          <p:nvPr/>
-        </p:nvSpPr>
-        <p:spPr>
-          <a:xfrm>
-            <a:off x="914400" y="1828800"/>
-            <a:ext cx="4617720" cy="365760"/>
+      <p:graphicFrame>
+        <p:nvGraphicFramePr>
+          <p:cNvPr id="4" name="Chart 0" descr=""/>
+          <p:cNvGraphicFramePr/>
+          <p:nvPr/>
+        </p:nvGraphicFramePr>
+        <p:xfrm>
+          <a:off x="457200" y="1737360"/>
+          <a:ext cx="7315200" cy="3840480"/>
+        </p:xfrm>
+        <a:graphic xmlns:a="http://schemas.openxmlformats.org/drawingml/2006/main">
+          <a:graphicData uri="http://schemas.openxmlformats.org/drawingml/2006/chart">
+            <c:chart xmlns:c="http://schemas.openxmlformats.org/drawingml/2006/chart" r:id="rId1"/>
+          </a:graphicData>
+        </a:graphic>
+      </p:graphicFrame>
+      <p:sp>
+        <p:nvSpPr>
+          <p:cNvPr id="5" name="Text 2"/>
+          <p:cNvSpPr txBox="1"/>
+          <p:nvPr/>
+        </p:nvSpPr>
+        <p:spPr>
+          <a:xfrm>
+            <a:off x="8092440" y="1783080"/>
+            <a:ext cx="3520440" cy="594360"/>
           </a:xfrm>
           <a:prstGeom prst="rect">
             <a:avLst/>
@@ -11516,7 +14167,7 @@
               <a:buNone/>
             </a:pPr>
             <a:r>
-              <a:rPr lang="en-US" sz="1600" b="1" dirty="0">
+              <a:rPr lang="en-US" sz="1500" b="1" dirty="0">
                 <a:solidFill>
                   <a:srgbClr val="14213D"/>
                 </a:solidFill>
@@ -11524,58 +14175,155 @@
                 <a:ea typeface="Calibri" pitchFamily="34" charset="-122"/>
                 <a:cs typeface="Calibri" pitchFamily="34" charset="-120"/>
               </a:rPr>
-              <a:t>По эффективности (ROAS)</a:t>
-            </a:r>
-            <a:endParaRPr lang="en-US" sz="1600" dirty="0"/>
-          </a:p>
-        </p:txBody>
-      </p:sp>
-      <p:sp>
-        <p:nvSpPr>
-          <p:cNvPr id="6" name="Shape 4"/>
-          <p:cNvSpPr/>
-          <p:nvPr/>
-        </p:nvSpPr>
-        <p:spPr>
-          <a:xfrm>
-            <a:off x="914400" y="2331720"/>
-            <a:ext cx="274320" cy="274320"/>
-          </a:xfrm>
-          <a:prstGeom prst="ellipse">
-            <a:avLst/>
-          </a:prstGeom>
-          <a:solidFill>
-            <a:srgbClr val="FCA311"/>
-          </a:solidFill>
-          <a:ln/>
-        </p:spPr>
-      </p:sp>
-      <p:sp>
-        <p:nvSpPr>
-          <p:cNvPr id="7" name="Text 5"/>
-          <p:cNvSpPr txBox="1"/>
-          <p:nvPr/>
-        </p:nvSpPr>
-        <p:spPr>
-          <a:xfrm>
-            <a:off x="914400" y="2368296"/>
-            <a:ext cx="274320" cy="237744"/>
-          </a:xfrm>
-          <a:prstGeom prst="rect">
-            <a:avLst/>
-          </a:prstGeom>
-          <a:noFill/>
-          <a:ln/>
-        </p:spPr>
-        <p:txBody>
-          <a:bodyPr wrap="square" lIns="0" tIns="0" rIns="0" bIns="0" rtlCol="0" anchor="ctr"/>
-          <a:lstStyle/>
-          <a:p>
-            <a:pPr algn="ctr" indent="0" marL="0">
-              <a:buNone/>
-            </a:pPr>
-            <a:r>
-              <a:rPr lang="en-US" sz="1200" b="1" dirty="0">
+              <a:t>Доля маржи, которую съедает привлечение</a:t>
+            </a:r>
+            <a:endParaRPr lang="en-US" sz="1500" dirty="0"/>
+          </a:p>
+        </p:txBody>
+      </p:sp>
+      <p:sp>
+        <p:nvSpPr>
+          <p:cNvPr id="6" name="Text 3"/>
+          <p:cNvSpPr txBox="1"/>
+          <p:nvPr/>
+        </p:nvSpPr>
+        <p:spPr>
+          <a:xfrm>
+            <a:off x="8092440" y="2514600"/>
+            <a:ext cx="1920240" cy="329184"/>
+          </a:xfrm>
+          <a:prstGeom prst="rect">
+            <a:avLst/>
+          </a:prstGeom>
+          <a:noFill/>
+          <a:ln/>
+        </p:spPr>
+        <p:txBody>
+          <a:bodyPr wrap="square" lIns="0" tIns="0" rIns="0" bIns="0" rtlCol="0" anchor="ctr"/>
+          <a:lstStyle/>
+          <a:p>
+            <a:pPr indent="0" marL="0">
+              <a:buNone/>
+            </a:pPr>
+            <a:r>
+              <a:rPr lang="en-US" sz="1400" dirty="0">
+                <a:solidFill>
+                  <a:srgbClr val="1F2937"/>
+                </a:solidFill>
+                <a:latin typeface="Calibri" pitchFamily="34" charset="0"/>
+                <a:ea typeface="Calibri" pitchFamily="34" charset="-122"/>
+                <a:cs typeface="Calibri" pitchFamily="34" charset="-120"/>
+              </a:rPr>
+              <a:t>сайт</a:t>
+            </a:r>
+            <a:endParaRPr lang="en-US" sz="1400" dirty="0"/>
+          </a:p>
+        </p:txBody>
+      </p:sp>
+      <p:sp>
+        <p:nvSpPr>
+          <p:cNvPr id="7" name="Text 4"/>
+          <p:cNvSpPr txBox="1"/>
+          <p:nvPr/>
+        </p:nvSpPr>
+        <p:spPr>
+          <a:xfrm>
+            <a:off x="10012680" y="2478024"/>
+            <a:ext cx="1600200" cy="365760"/>
+          </a:xfrm>
+          <a:prstGeom prst="rect">
+            <a:avLst/>
+          </a:prstGeom>
+          <a:noFill/>
+          <a:ln/>
+        </p:spPr>
+        <p:txBody>
+          <a:bodyPr wrap="square" lIns="0" tIns="0" rIns="0" bIns="0" rtlCol="0" anchor="ctr"/>
+          <a:lstStyle/>
+          <a:p>
+            <a:pPr algn="r" indent="0" marL="0">
+              <a:buNone/>
+            </a:pPr>
+            <a:r>
+              <a:rPr lang="en-US" sz="1900" b="1" dirty="0">
+                <a:solidFill>
+                  <a:srgbClr val="FCA311"/>
+                </a:solidFill>
+                <a:latin typeface="Calibri" pitchFamily="34" charset="0"/>
+                <a:ea typeface="Calibri" pitchFamily="34" charset="-122"/>
+                <a:cs typeface="Calibri" pitchFamily="34" charset="-120"/>
+              </a:rPr>
+              <a:t>18%</a:t>
+            </a:r>
+            <a:endParaRPr lang="en-US" sz="1900" dirty="0"/>
+          </a:p>
+        </p:txBody>
+      </p:sp>
+      <p:sp>
+        <p:nvSpPr>
+          <p:cNvPr id="8" name="Text 5"/>
+          <p:cNvSpPr txBox="1"/>
+          <p:nvPr/>
+        </p:nvSpPr>
+        <p:spPr>
+          <a:xfrm>
+            <a:off x="8092440" y="3081528"/>
+            <a:ext cx="1920240" cy="329184"/>
+          </a:xfrm>
+          <a:prstGeom prst="rect">
+            <a:avLst/>
+          </a:prstGeom>
+          <a:noFill/>
+          <a:ln/>
+        </p:spPr>
+        <p:txBody>
+          <a:bodyPr wrap="square" lIns="0" tIns="0" rIns="0" bIns="0" rtlCol="0" anchor="ctr"/>
+          <a:lstStyle/>
+          <a:p>
+            <a:pPr indent="0" marL="0">
+              <a:buNone/>
+            </a:pPr>
+            <a:r>
+              <a:rPr lang="en-US" sz="1400" dirty="0">
+                <a:solidFill>
+                  <a:srgbClr val="1F2937"/>
+                </a:solidFill>
+                <a:latin typeface="Calibri" pitchFamily="34" charset="0"/>
+                <a:ea typeface="Calibri" pitchFamily="34" charset="-122"/>
+                <a:cs typeface="Calibri" pitchFamily="34" charset="-120"/>
+              </a:rPr>
+              <a:t>LaModa</a:t>
+            </a:r>
+            <a:endParaRPr lang="en-US" sz="1400" dirty="0"/>
+          </a:p>
+        </p:txBody>
+      </p:sp>
+      <p:sp>
+        <p:nvSpPr>
+          <p:cNvPr id="9" name="Text 6"/>
+          <p:cNvSpPr txBox="1"/>
+          <p:nvPr/>
+        </p:nvSpPr>
+        <p:spPr>
+          <a:xfrm>
+            <a:off x="10012680" y="3044952"/>
+            <a:ext cx="1600200" cy="365760"/>
+          </a:xfrm>
+          <a:prstGeom prst="rect">
+            <a:avLst/>
+          </a:prstGeom>
+          <a:noFill/>
+          <a:ln/>
+        </p:spPr>
+        <p:txBody>
+          <a:bodyPr wrap="square" lIns="0" tIns="0" rIns="0" bIns="0" rtlCol="0" anchor="ctr"/>
+          <a:lstStyle/>
+          <a:p>
+            <a:pPr algn="r" indent="0" marL="0">
+              <a:buNone/>
+            </a:pPr>
+            <a:r>
+              <a:rPr lang="en-US" sz="1900" b="1" dirty="0">
                 <a:solidFill>
                   <a:srgbClr val="14213D"/>
                 </a:solidFill>
@@ -11583,22 +14331,22 @@
                 <a:ea typeface="Calibri" pitchFamily="34" charset="-122"/>
                 <a:cs typeface="Calibri" pitchFamily="34" charset="-120"/>
               </a:rPr>
-              <a:t>1</a:t>
-            </a:r>
-            <a:endParaRPr lang="en-US" sz="1200" dirty="0"/>
-          </a:p>
-        </p:txBody>
-      </p:sp>
-      <p:sp>
-        <p:nvSpPr>
-          <p:cNvPr id="8" name="Text 6"/>
-          <p:cNvSpPr txBox="1"/>
-          <p:nvPr/>
-        </p:nvSpPr>
-        <p:spPr>
-          <a:xfrm>
-            <a:off x="1325880" y="2350008"/>
-            <a:ext cx="4206240" cy="292608"/>
+              <a:t>33%</a:t>
+            </a:r>
+            <a:endParaRPr lang="en-US" sz="1900" dirty="0"/>
+          </a:p>
+        </p:txBody>
+      </p:sp>
+      <p:sp>
+        <p:nvSpPr>
+          <p:cNvPr id="10" name="Text 7"/>
+          <p:cNvSpPr txBox="1"/>
+          <p:nvPr/>
+        </p:nvSpPr>
+        <p:spPr>
+          <a:xfrm>
+            <a:off x="8092440" y="3648456"/>
+            <a:ext cx="1920240" cy="329184"/>
           </a:xfrm>
           <a:prstGeom prst="rect">
             <a:avLst/>
@@ -11622,7 +14370,7 @@
                 <a:ea typeface="Calibri" pitchFamily="34" charset="-122"/>
                 <a:cs typeface="Calibri" pitchFamily="34" charset="-120"/>
               </a:rPr>
-              <a:t>сайт — 5,64</a:t>
+              <a:t>Блогеры</a:t>
             </a:r>
             <a:endParaRPr lang="en-US" sz="1400" dirty="0"/>
           </a:p>
@@ -11630,50 +14378,30 @@
       </p:sp>
       <p:sp>
         <p:nvSpPr>
-          <p:cNvPr id="9" name="Shape 7"/>
-          <p:cNvSpPr/>
-          <p:nvPr/>
-        </p:nvSpPr>
-        <p:spPr>
-          <a:xfrm>
-            <a:off x="914400" y="2834640"/>
-            <a:ext cx="274320" cy="274320"/>
-          </a:xfrm>
-          <a:prstGeom prst="ellipse">
-            <a:avLst/>
-          </a:prstGeom>
-          <a:solidFill>
-            <a:srgbClr val="D7DAE0"/>
-          </a:solidFill>
-          <a:ln/>
-        </p:spPr>
-      </p:sp>
-      <p:sp>
-        <p:nvSpPr>
-          <p:cNvPr id="10" name="Text 8"/>
-          <p:cNvSpPr txBox="1"/>
-          <p:nvPr/>
-        </p:nvSpPr>
-        <p:spPr>
-          <a:xfrm>
-            <a:off x="914400" y="2871216"/>
-            <a:ext cx="274320" cy="237744"/>
-          </a:xfrm>
-          <a:prstGeom prst="rect">
-            <a:avLst/>
-          </a:prstGeom>
-          <a:noFill/>
-          <a:ln/>
-        </p:spPr>
-        <p:txBody>
-          <a:bodyPr wrap="square" lIns="0" tIns="0" rIns="0" bIns="0" rtlCol="0" anchor="ctr"/>
-          <a:lstStyle/>
-          <a:p>
-            <a:pPr algn="ctr" indent="0" marL="0">
-              <a:buNone/>
-            </a:pPr>
-            <a:r>
-              <a:rPr lang="en-US" sz="1200" b="1" dirty="0">
+          <p:cNvPr id="11" name="Text 8"/>
+          <p:cNvSpPr txBox="1"/>
+          <p:nvPr/>
+        </p:nvSpPr>
+        <p:spPr>
+          <a:xfrm>
+            <a:off x="10012680" y="3611880"/>
+            <a:ext cx="1600200" cy="365760"/>
+          </a:xfrm>
+          <a:prstGeom prst="rect">
+            <a:avLst/>
+          </a:prstGeom>
+          <a:noFill/>
+          <a:ln/>
+        </p:spPr>
+        <p:txBody>
+          <a:bodyPr wrap="square" lIns="0" tIns="0" rIns="0" bIns="0" rtlCol="0" anchor="ctr"/>
+          <a:lstStyle/>
+          <a:p>
+            <a:pPr algn="r" indent="0" marL="0">
+              <a:buNone/>
+            </a:pPr>
+            <a:r>
+              <a:rPr lang="en-US" sz="1900" b="1" dirty="0">
                 <a:solidFill>
                   <a:srgbClr val="14213D"/>
                 </a:solidFill>
@@ -11681,22 +14409,22 @@
                 <a:ea typeface="Calibri" pitchFamily="34" charset="-122"/>
                 <a:cs typeface="Calibri" pitchFamily="34" charset="-120"/>
               </a:rPr>
-              <a:t>2</a:t>
-            </a:r>
-            <a:endParaRPr lang="en-US" sz="1200" dirty="0"/>
-          </a:p>
-        </p:txBody>
-      </p:sp>
-      <p:sp>
-        <p:nvSpPr>
-          <p:cNvPr id="11" name="Text 9"/>
-          <p:cNvSpPr txBox="1"/>
-          <p:nvPr/>
-        </p:nvSpPr>
-        <p:spPr>
-          <a:xfrm>
-            <a:off x="1325880" y="2852928"/>
-            <a:ext cx="4206240" cy="292608"/>
+              <a:t>41%</a:t>
+            </a:r>
+            <a:endParaRPr lang="en-US" sz="1900" dirty="0"/>
+          </a:p>
+        </p:txBody>
+      </p:sp>
+      <p:sp>
+        <p:nvSpPr>
+          <p:cNvPr id="12" name="Text 9"/>
+          <p:cNvSpPr txBox="1"/>
+          <p:nvPr/>
+        </p:nvSpPr>
+        <p:spPr>
+          <a:xfrm>
+            <a:off x="8092440" y="4215384"/>
+            <a:ext cx="1920240" cy="329184"/>
           </a:xfrm>
           <a:prstGeom prst="rect">
             <a:avLst/>
@@ -11720,7 +14448,7 @@
                 <a:ea typeface="Calibri" pitchFamily="34" charset="-122"/>
                 <a:cs typeface="Calibri" pitchFamily="34" charset="-120"/>
               </a:rPr>
-              <a:t>LaModa — 3,01</a:t>
+              <a:t>директ</a:t>
             </a:r>
             <a:endParaRPr lang="en-US" sz="1400" dirty="0"/>
           </a:p>
@@ -11728,50 +14456,30 @@
       </p:sp>
       <p:sp>
         <p:nvSpPr>
-          <p:cNvPr id="12" name="Shape 10"/>
-          <p:cNvSpPr/>
-          <p:nvPr/>
-        </p:nvSpPr>
-        <p:spPr>
-          <a:xfrm>
-            <a:off x="914400" y="3337560"/>
-            <a:ext cx="274320" cy="274320"/>
-          </a:xfrm>
-          <a:prstGeom prst="ellipse">
-            <a:avLst/>
-          </a:prstGeom>
-          <a:solidFill>
-            <a:srgbClr val="D7DAE0"/>
-          </a:solidFill>
-          <a:ln/>
-        </p:spPr>
-      </p:sp>
-      <p:sp>
-        <p:nvSpPr>
-          <p:cNvPr id="13" name="Text 11"/>
-          <p:cNvSpPr txBox="1"/>
-          <p:nvPr/>
-        </p:nvSpPr>
-        <p:spPr>
-          <a:xfrm>
-            <a:off x="914400" y="3374136"/>
-            <a:ext cx="274320" cy="237744"/>
-          </a:xfrm>
-          <a:prstGeom prst="rect">
-            <a:avLst/>
-          </a:prstGeom>
-          <a:noFill/>
-          <a:ln/>
-        </p:spPr>
-        <p:txBody>
-          <a:bodyPr wrap="square" lIns="0" tIns="0" rIns="0" bIns="0" rtlCol="0" anchor="ctr"/>
-          <a:lstStyle/>
-          <a:p>
-            <a:pPr algn="ctr" indent="0" marL="0">
-              <a:buNone/>
-            </a:pPr>
-            <a:r>
-              <a:rPr lang="en-US" sz="1200" b="1" dirty="0">
+          <p:cNvPr id="13" name="Text 10"/>
+          <p:cNvSpPr txBox="1"/>
+          <p:nvPr/>
+        </p:nvSpPr>
+        <p:spPr>
+          <a:xfrm>
+            <a:off x="10012680" y="4178808"/>
+            <a:ext cx="1600200" cy="365760"/>
+          </a:xfrm>
+          <a:prstGeom prst="rect">
+            <a:avLst/>
+          </a:prstGeom>
+          <a:noFill/>
+          <a:ln/>
+        </p:spPr>
+        <p:txBody>
+          <a:bodyPr wrap="square" lIns="0" tIns="0" rIns="0" bIns="0" rtlCol="0" anchor="ctr"/>
+          <a:lstStyle/>
+          <a:p>
+            <a:pPr algn="r" indent="0" marL="0">
+              <a:buNone/>
+            </a:pPr>
+            <a:r>
+              <a:rPr lang="en-US" sz="1900" b="1" dirty="0">
                 <a:solidFill>
                   <a:srgbClr val="14213D"/>
                 </a:solidFill>
@@ -11779,22 +14487,22 @@
                 <a:ea typeface="Calibri" pitchFamily="34" charset="-122"/>
                 <a:cs typeface="Calibri" pitchFamily="34" charset="-120"/>
               </a:rPr>
-              <a:t>3</a:t>
-            </a:r>
-            <a:endParaRPr lang="en-US" sz="1200" dirty="0"/>
-          </a:p>
-        </p:txBody>
-      </p:sp>
-      <p:sp>
-        <p:nvSpPr>
-          <p:cNvPr id="14" name="Text 12"/>
-          <p:cNvSpPr txBox="1"/>
-          <p:nvPr/>
-        </p:nvSpPr>
-        <p:spPr>
-          <a:xfrm>
-            <a:off x="1325880" y="3355848"/>
-            <a:ext cx="4206240" cy="292608"/>
+              <a:t>46%</a:t>
+            </a:r>
+            <a:endParaRPr lang="en-US" sz="1900" dirty="0"/>
+          </a:p>
+        </p:txBody>
+      </p:sp>
+      <p:sp>
+        <p:nvSpPr>
+          <p:cNvPr id="14" name="Text 11"/>
+          <p:cNvSpPr txBox="1"/>
+          <p:nvPr/>
+        </p:nvSpPr>
+        <p:spPr>
+          <a:xfrm>
+            <a:off x="8092440" y="4782312"/>
+            <a:ext cx="1920240" cy="329184"/>
           </a:xfrm>
           <a:prstGeom prst="rect">
             <a:avLst/>
@@ -11818,7 +14526,7 @@
                 <a:ea typeface="Calibri" pitchFamily="34" charset="-122"/>
                 <a:cs typeface="Calibri" pitchFamily="34" charset="-120"/>
               </a:rPr>
-              <a:t>Блогеры — 2,45</a:t>
+              <a:t>ВК</a:t>
             </a:r>
             <a:endParaRPr lang="en-US" sz="1400" dirty="0"/>
           </a:p>
@@ -11826,73 +14534,53 @@
       </p:sp>
       <p:sp>
         <p:nvSpPr>
-          <p:cNvPr id="15" name="Shape 13"/>
-          <p:cNvSpPr/>
-          <p:nvPr/>
-        </p:nvSpPr>
-        <p:spPr>
-          <a:xfrm>
-            <a:off x="914400" y="3840480"/>
-            <a:ext cx="274320" cy="274320"/>
-          </a:xfrm>
-          <a:prstGeom prst="ellipse">
-            <a:avLst/>
-          </a:prstGeom>
-          <a:solidFill>
-            <a:srgbClr val="D7DAE0"/>
-          </a:solidFill>
-          <a:ln/>
-        </p:spPr>
-      </p:sp>
-      <p:sp>
-        <p:nvSpPr>
-          <p:cNvPr id="16" name="Text 14"/>
-          <p:cNvSpPr txBox="1"/>
-          <p:nvPr/>
-        </p:nvSpPr>
-        <p:spPr>
-          <a:xfrm>
-            <a:off x="914400" y="3877056"/>
-            <a:ext cx="274320" cy="237744"/>
-          </a:xfrm>
-          <a:prstGeom prst="rect">
-            <a:avLst/>
-          </a:prstGeom>
-          <a:noFill/>
-          <a:ln/>
-        </p:spPr>
-        <p:txBody>
-          <a:bodyPr wrap="square" lIns="0" tIns="0" rIns="0" bIns="0" rtlCol="0" anchor="ctr"/>
-          <a:lstStyle/>
-          <a:p>
-            <a:pPr algn="ctr" indent="0" marL="0">
-              <a:buNone/>
-            </a:pPr>
-            <a:r>
-              <a:rPr lang="en-US" sz="1200" b="1" dirty="0">
-                <a:solidFill>
-                  <a:srgbClr val="14213D"/>
-                </a:solidFill>
-                <a:latin typeface="Calibri" pitchFamily="34" charset="0"/>
-                <a:ea typeface="Calibri" pitchFamily="34" charset="-122"/>
-                <a:cs typeface="Calibri" pitchFamily="34" charset="-120"/>
-              </a:rPr>
-              <a:t>4</a:t>
-            </a:r>
-            <a:endParaRPr lang="en-US" sz="1200" dirty="0"/>
-          </a:p>
-        </p:txBody>
-      </p:sp>
-      <p:sp>
-        <p:nvSpPr>
-          <p:cNvPr id="17" name="Text 15"/>
-          <p:cNvSpPr txBox="1"/>
-          <p:nvPr/>
-        </p:nvSpPr>
-        <p:spPr>
-          <a:xfrm>
-            <a:off x="1325880" y="3858768"/>
-            <a:ext cx="4206240" cy="292608"/>
+          <p:cNvPr id="15" name="Text 12"/>
+          <p:cNvSpPr txBox="1"/>
+          <p:nvPr/>
+        </p:nvSpPr>
+        <p:spPr>
+          <a:xfrm>
+            <a:off x="10012680" y="4745736"/>
+            <a:ext cx="1600200" cy="365760"/>
+          </a:xfrm>
+          <a:prstGeom prst="rect">
+            <a:avLst/>
+          </a:prstGeom>
+          <a:noFill/>
+          <a:ln/>
+        </p:spPr>
+        <p:txBody>
+          <a:bodyPr wrap="square" lIns="0" tIns="0" rIns="0" bIns="0" rtlCol="0" anchor="ctr"/>
+          <a:lstStyle/>
+          <a:p>
+            <a:pPr algn="r" indent="0" marL="0">
+              <a:buNone/>
+            </a:pPr>
+            <a:r>
+              <a:rPr lang="en-US" sz="1900" b="1" dirty="0">
+                <a:solidFill>
+                  <a:srgbClr val="C1121F"/>
+                </a:solidFill>
+                <a:latin typeface="Calibri" pitchFamily="34" charset="0"/>
+                <a:ea typeface="Calibri" pitchFamily="34" charset="-122"/>
+                <a:cs typeface="Calibri" pitchFamily="34" charset="-120"/>
+              </a:rPr>
+              <a:t>81%</a:t>
+            </a:r>
+            <a:endParaRPr lang="en-US" sz="1900" dirty="0"/>
+          </a:p>
+        </p:txBody>
+      </p:sp>
+      <p:sp>
+        <p:nvSpPr>
+          <p:cNvPr id="16" name="Text 13"/>
+          <p:cNvSpPr txBox="1"/>
+          <p:nvPr/>
+        </p:nvSpPr>
+        <p:spPr>
+          <a:xfrm>
+            <a:off x="548640" y="5806440"/>
+            <a:ext cx="11064240" cy="365760"/>
           </a:xfrm>
           <a:prstGeom prst="rect">
             <a:avLst/>
@@ -11908,744 +14596,17 @@
               <a:buNone/>
             </a:pPr>
             <a:r>
-              <a:rPr lang="en-US" sz="1400" dirty="0">
-                <a:solidFill>
-                  <a:srgbClr val="1F2937"/>
-                </a:solidFill>
-                <a:latin typeface="Calibri" pitchFamily="34" charset="0"/>
-                <a:ea typeface="Calibri" pitchFamily="34" charset="-122"/>
-                <a:cs typeface="Calibri" pitchFamily="34" charset="-120"/>
-              </a:rPr>
-              <a:t>директ — 2,17</a:t>
-            </a:r>
-            <a:endParaRPr lang="en-US" sz="1400" dirty="0"/>
-          </a:p>
-        </p:txBody>
-      </p:sp>
-      <p:sp>
-        <p:nvSpPr>
-          <p:cNvPr id="18" name="Shape 16"/>
-          <p:cNvSpPr/>
-          <p:nvPr/>
-        </p:nvSpPr>
-        <p:spPr>
-          <a:xfrm>
-            <a:off x="914400" y="4343400"/>
-            <a:ext cx="274320" cy="274320"/>
-          </a:xfrm>
-          <a:prstGeom prst="ellipse">
-            <a:avLst/>
-          </a:prstGeom>
-          <a:solidFill>
-            <a:srgbClr val="D7DAE0"/>
-          </a:solidFill>
-          <a:ln/>
-        </p:spPr>
-      </p:sp>
-      <p:sp>
-        <p:nvSpPr>
-          <p:cNvPr id="19" name="Text 17"/>
-          <p:cNvSpPr txBox="1"/>
-          <p:nvPr/>
-        </p:nvSpPr>
-        <p:spPr>
-          <a:xfrm>
-            <a:off x="914400" y="4379976"/>
-            <a:ext cx="274320" cy="237744"/>
-          </a:xfrm>
-          <a:prstGeom prst="rect">
-            <a:avLst/>
-          </a:prstGeom>
-          <a:noFill/>
-          <a:ln/>
-        </p:spPr>
-        <p:txBody>
-          <a:bodyPr wrap="square" lIns="0" tIns="0" rIns="0" bIns="0" rtlCol="0" anchor="ctr"/>
-          <a:lstStyle/>
-          <a:p>
-            <a:pPr algn="ctr" indent="0" marL="0">
-              <a:buNone/>
-            </a:pPr>
-            <a:r>
-              <a:rPr lang="en-US" sz="1200" b="1" dirty="0">
-                <a:solidFill>
-                  <a:srgbClr val="14213D"/>
-                </a:solidFill>
-                <a:latin typeface="Calibri" pitchFamily="34" charset="0"/>
-                <a:ea typeface="Calibri" pitchFamily="34" charset="-122"/>
-                <a:cs typeface="Calibri" pitchFamily="34" charset="-120"/>
-              </a:rPr>
-              <a:t>5</a:t>
-            </a:r>
-            <a:endParaRPr lang="en-US" sz="1200" dirty="0"/>
-          </a:p>
-        </p:txBody>
-      </p:sp>
-      <p:sp>
-        <p:nvSpPr>
-          <p:cNvPr id="20" name="Text 18"/>
-          <p:cNvSpPr txBox="1"/>
-          <p:nvPr/>
-        </p:nvSpPr>
-        <p:spPr>
-          <a:xfrm>
-            <a:off x="1325880" y="4361688"/>
-            <a:ext cx="4206240" cy="292608"/>
-          </a:xfrm>
-          <a:prstGeom prst="rect">
-            <a:avLst/>
-          </a:prstGeom>
-          <a:noFill/>
-          <a:ln/>
-        </p:spPr>
-        <p:txBody>
-          <a:bodyPr wrap="square" lIns="0" tIns="0" rIns="0" bIns="0" rtlCol="0" anchor="ctr"/>
-          <a:lstStyle/>
-          <a:p>
-            <a:pPr indent="0" marL="0">
-              <a:buNone/>
-            </a:pPr>
-            <a:r>
-              <a:rPr lang="en-US" sz="1400" dirty="0">
-                <a:solidFill>
-                  <a:srgbClr val="1F2937"/>
-                </a:solidFill>
-                <a:latin typeface="Calibri" pitchFamily="34" charset="0"/>
-                <a:ea typeface="Calibri" pitchFamily="34" charset="-122"/>
-                <a:cs typeface="Calibri" pitchFamily="34" charset="-120"/>
-              </a:rPr>
-              <a:t>ВК — 1,23</a:t>
-            </a:r>
-            <a:endParaRPr lang="en-US" sz="1400" dirty="0"/>
-          </a:p>
-        </p:txBody>
-      </p:sp>
-      <p:sp>
-        <p:nvSpPr>
-          <p:cNvPr id="21" name="Shape 19"/>
-          <p:cNvSpPr/>
-          <p:nvPr/>
-        </p:nvSpPr>
-        <p:spPr>
-          <a:xfrm>
-            <a:off x="6263640" y="1645920"/>
-            <a:ext cx="5349240" cy="3108960"/>
-          </a:xfrm>
-          <a:prstGeom prst="roundRect">
-            <a:avLst>
-              <a:gd name="adj" fmla="val 1765"/>
-            </a:avLst>
-          </a:prstGeom>
-          <a:solidFill>
-            <a:srgbClr val="F1F2F4"/>
-          </a:solidFill>
-          <a:ln/>
-        </p:spPr>
-      </p:sp>
-      <p:sp>
-        <p:nvSpPr>
-          <p:cNvPr id="22" name="Text 20"/>
-          <p:cNvSpPr txBox="1"/>
-          <p:nvPr/>
-        </p:nvSpPr>
-        <p:spPr>
-          <a:xfrm>
-            <a:off x="6629400" y="1828800"/>
-            <a:ext cx="4617720" cy="365760"/>
-          </a:xfrm>
-          <a:prstGeom prst="rect">
-            <a:avLst/>
-          </a:prstGeom>
-          <a:noFill/>
-          <a:ln/>
-        </p:spPr>
-        <p:txBody>
-          <a:bodyPr wrap="square" lIns="0" tIns="0" rIns="0" bIns="0" rtlCol="0" anchor="ctr"/>
-          <a:lstStyle/>
-          <a:p>
-            <a:pPr indent="0" marL="0">
-              <a:buNone/>
-            </a:pPr>
-            <a:r>
-              <a:rPr lang="en-US" sz="1600" b="1" dirty="0">
-                <a:solidFill>
-                  <a:srgbClr val="14213D"/>
-                </a:solidFill>
-                <a:latin typeface="Calibri" pitchFamily="34" charset="0"/>
-                <a:ea typeface="Calibri" pitchFamily="34" charset="-122"/>
-                <a:cs typeface="Calibri" pitchFamily="34" charset="-120"/>
-              </a:rPr>
-              <a:t>По деньгам в кассе</a:t>
-            </a:r>
-            <a:endParaRPr lang="en-US" sz="1600" dirty="0"/>
-          </a:p>
-        </p:txBody>
-      </p:sp>
-      <p:sp>
-        <p:nvSpPr>
-          <p:cNvPr id="23" name="Shape 21"/>
-          <p:cNvSpPr/>
-          <p:nvPr/>
-        </p:nvSpPr>
-        <p:spPr>
-          <a:xfrm>
-            <a:off x="6629400" y="2331720"/>
-            <a:ext cx="274320" cy="274320"/>
-          </a:xfrm>
-          <a:prstGeom prst="ellipse">
-            <a:avLst/>
-          </a:prstGeom>
-          <a:solidFill>
-            <a:srgbClr val="FCA311"/>
-          </a:solidFill>
-          <a:ln/>
-        </p:spPr>
-      </p:sp>
-      <p:sp>
-        <p:nvSpPr>
-          <p:cNvPr id="24" name="Text 22"/>
-          <p:cNvSpPr txBox="1"/>
-          <p:nvPr/>
-        </p:nvSpPr>
-        <p:spPr>
-          <a:xfrm>
-            <a:off x="6629400" y="2368296"/>
-            <a:ext cx="274320" cy="237744"/>
-          </a:xfrm>
-          <a:prstGeom prst="rect">
-            <a:avLst/>
-          </a:prstGeom>
-          <a:noFill/>
-          <a:ln/>
-        </p:spPr>
-        <p:txBody>
-          <a:bodyPr wrap="square" lIns="0" tIns="0" rIns="0" bIns="0" rtlCol="0" anchor="ctr"/>
-          <a:lstStyle/>
-          <a:p>
-            <a:pPr algn="ctr" indent="0" marL="0">
-              <a:buNone/>
-            </a:pPr>
-            <a:r>
-              <a:rPr lang="en-US" sz="1200" b="1" dirty="0">
-                <a:solidFill>
-                  <a:srgbClr val="14213D"/>
-                </a:solidFill>
-                <a:latin typeface="Calibri" pitchFamily="34" charset="0"/>
-                <a:ea typeface="Calibri" pitchFamily="34" charset="-122"/>
-                <a:cs typeface="Calibri" pitchFamily="34" charset="-120"/>
-              </a:rPr>
-              <a:t>1</a:t>
-            </a:r>
-            <a:endParaRPr lang="en-US" sz="1200" dirty="0"/>
-          </a:p>
-        </p:txBody>
-      </p:sp>
-      <p:sp>
-        <p:nvSpPr>
-          <p:cNvPr id="25" name="Text 23"/>
-          <p:cNvSpPr txBox="1"/>
-          <p:nvPr/>
-        </p:nvSpPr>
-        <p:spPr>
-          <a:xfrm>
-            <a:off x="7040880" y="2350008"/>
-            <a:ext cx="4206240" cy="292608"/>
-          </a:xfrm>
-          <a:prstGeom prst="rect">
-            <a:avLst/>
-          </a:prstGeom>
-          <a:noFill/>
-          <a:ln/>
-        </p:spPr>
-        <p:txBody>
-          <a:bodyPr wrap="square" lIns="0" tIns="0" rIns="0" bIns="0" rtlCol="0" anchor="ctr"/>
-          <a:lstStyle/>
-          <a:p>
-            <a:pPr indent="0" marL="0">
-              <a:buNone/>
-            </a:pPr>
-            <a:r>
-              <a:rPr lang="en-US" sz="1400" dirty="0">
-                <a:solidFill>
-                  <a:srgbClr val="1F2937"/>
-                </a:solidFill>
-                <a:latin typeface="Calibri" pitchFamily="34" charset="0"/>
-                <a:ea typeface="Calibri" pitchFamily="34" charset="-122"/>
-                <a:cs typeface="Calibri" pitchFamily="34" charset="-120"/>
-              </a:rPr>
-              <a:t>LaModa — 24 060 ₽</a:t>
-            </a:r>
-            <a:endParaRPr lang="en-US" sz="1400" dirty="0"/>
-          </a:p>
-        </p:txBody>
-      </p:sp>
-      <p:sp>
-        <p:nvSpPr>
-          <p:cNvPr id="26" name="Shape 24"/>
-          <p:cNvSpPr/>
-          <p:nvPr/>
-        </p:nvSpPr>
-        <p:spPr>
-          <a:xfrm>
-            <a:off x="6629400" y="2834640"/>
-            <a:ext cx="274320" cy="274320"/>
-          </a:xfrm>
-          <a:prstGeom prst="ellipse">
-            <a:avLst/>
-          </a:prstGeom>
-          <a:solidFill>
-            <a:srgbClr val="D7DAE0"/>
-          </a:solidFill>
-          <a:ln/>
-        </p:spPr>
-      </p:sp>
-      <p:sp>
-        <p:nvSpPr>
-          <p:cNvPr id="27" name="Text 25"/>
-          <p:cNvSpPr txBox="1"/>
-          <p:nvPr/>
-        </p:nvSpPr>
-        <p:spPr>
-          <a:xfrm>
-            <a:off x="6629400" y="2871216"/>
-            <a:ext cx="274320" cy="237744"/>
-          </a:xfrm>
-          <a:prstGeom prst="rect">
-            <a:avLst/>
-          </a:prstGeom>
-          <a:noFill/>
-          <a:ln/>
-        </p:spPr>
-        <p:txBody>
-          <a:bodyPr wrap="square" lIns="0" tIns="0" rIns="0" bIns="0" rtlCol="0" anchor="ctr"/>
-          <a:lstStyle/>
-          <a:p>
-            <a:pPr algn="ctr" indent="0" marL="0">
-              <a:buNone/>
-            </a:pPr>
-            <a:r>
-              <a:rPr lang="en-US" sz="1200" b="1" dirty="0">
-                <a:solidFill>
-                  <a:srgbClr val="14213D"/>
-                </a:solidFill>
-                <a:latin typeface="Calibri" pitchFamily="34" charset="0"/>
-                <a:ea typeface="Calibri" pitchFamily="34" charset="-122"/>
-                <a:cs typeface="Calibri" pitchFamily="34" charset="-120"/>
-              </a:rPr>
-              <a:t>2</a:t>
-            </a:r>
-            <a:endParaRPr lang="en-US" sz="1200" dirty="0"/>
-          </a:p>
-        </p:txBody>
-      </p:sp>
-      <p:sp>
-        <p:nvSpPr>
-          <p:cNvPr id="28" name="Text 26"/>
-          <p:cNvSpPr txBox="1"/>
-          <p:nvPr/>
-        </p:nvSpPr>
-        <p:spPr>
-          <a:xfrm>
-            <a:off x="7040880" y="2852928"/>
-            <a:ext cx="4206240" cy="292608"/>
-          </a:xfrm>
-          <a:prstGeom prst="rect">
-            <a:avLst/>
-          </a:prstGeom>
-          <a:noFill/>
-          <a:ln/>
-        </p:spPr>
-        <p:txBody>
-          <a:bodyPr wrap="square" lIns="0" tIns="0" rIns="0" bIns="0" rtlCol="0" anchor="ctr"/>
-          <a:lstStyle/>
-          <a:p>
-            <a:pPr indent="0" marL="0">
-              <a:buNone/>
-            </a:pPr>
-            <a:r>
-              <a:rPr lang="en-US" sz="1400" dirty="0">
-                <a:solidFill>
-                  <a:srgbClr val="1F2937"/>
-                </a:solidFill>
-                <a:latin typeface="Calibri" pitchFamily="34" charset="0"/>
-                <a:ea typeface="Calibri" pitchFamily="34" charset="-122"/>
-                <a:cs typeface="Calibri" pitchFamily="34" charset="-120"/>
-              </a:rPr>
-              <a:t>сайт — 23 223 ₽</a:t>
-            </a:r>
-            <a:endParaRPr lang="en-US" sz="1400" dirty="0"/>
-          </a:p>
-        </p:txBody>
-      </p:sp>
-      <p:sp>
-        <p:nvSpPr>
-          <p:cNvPr id="29" name="Shape 27"/>
-          <p:cNvSpPr/>
-          <p:nvPr/>
-        </p:nvSpPr>
-        <p:spPr>
-          <a:xfrm>
-            <a:off x="6629400" y="3337560"/>
-            <a:ext cx="274320" cy="274320"/>
-          </a:xfrm>
-          <a:prstGeom prst="ellipse">
-            <a:avLst/>
-          </a:prstGeom>
-          <a:solidFill>
-            <a:srgbClr val="D7DAE0"/>
-          </a:solidFill>
-          <a:ln/>
-        </p:spPr>
-      </p:sp>
-      <p:sp>
-        <p:nvSpPr>
-          <p:cNvPr id="30" name="Text 28"/>
-          <p:cNvSpPr txBox="1"/>
-          <p:nvPr/>
-        </p:nvSpPr>
-        <p:spPr>
-          <a:xfrm>
-            <a:off x="6629400" y="3374136"/>
-            <a:ext cx="274320" cy="237744"/>
-          </a:xfrm>
-          <a:prstGeom prst="rect">
-            <a:avLst/>
-          </a:prstGeom>
-          <a:noFill/>
-          <a:ln/>
-        </p:spPr>
-        <p:txBody>
-          <a:bodyPr wrap="square" lIns="0" tIns="0" rIns="0" bIns="0" rtlCol="0" anchor="ctr"/>
-          <a:lstStyle/>
-          <a:p>
-            <a:pPr algn="ctr" indent="0" marL="0">
-              <a:buNone/>
-            </a:pPr>
-            <a:r>
-              <a:rPr lang="en-US" sz="1200" b="1" dirty="0">
-                <a:solidFill>
-                  <a:srgbClr val="14213D"/>
-                </a:solidFill>
-                <a:latin typeface="Calibri" pitchFamily="34" charset="0"/>
-                <a:ea typeface="Calibri" pitchFamily="34" charset="-122"/>
-                <a:cs typeface="Calibri" pitchFamily="34" charset="-120"/>
-              </a:rPr>
-              <a:t>3</a:t>
-            </a:r>
-            <a:endParaRPr lang="en-US" sz="1200" dirty="0"/>
-          </a:p>
-        </p:txBody>
-      </p:sp>
-      <p:sp>
-        <p:nvSpPr>
-          <p:cNvPr id="31" name="Text 29"/>
-          <p:cNvSpPr txBox="1"/>
-          <p:nvPr/>
-        </p:nvSpPr>
-        <p:spPr>
-          <a:xfrm>
-            <a:off x="7040880" y="3355848"/>
-            <a:ext cx="4206240" cy="292608"/>
-          </a:xfrm>
-          <a:prstGeom prst="rect">
-            <a:avLst/>
-          </a:prstGeom>
-          <a:noFill/>
-          <a:ln/>
-        </p:spPr>
-        <p:txBody>
-          <a:bodyPr wrap="square" lIns="0" tIns="0" rIns="0" bIns="0" rtlCol="0" anchor="ctr"/>
-          <a:lstStyle/>
-          <a:p>
-            <a:pPr indent="0" marL="0">
-              <a:buNone/>
-            </a:pPr>
-            <a:r>
-              <a:rPr lang="en-US" sz="1400" dirty="0">
-                <a:solidFill>
-                  <a:srgbClr val="1F2937"/>
-                </a:solidFill>
-                <a:latin typeface="Calibri" pitchFamily="34" charset="0"/>
-                <a:ea typeface="Calibri" pitchFamily="34" charset="-122"/>
-                <a:cs typeface="Calibri" pitchFamily="34" charset="-120"/>
-              </a:rPr>
-              <a:t>Блогеры — 21 780 ₽</a:t>
-            </a:r>
-            <a:endParaRPr lang="en-US" sz="1400" dirty="0"/>
-          </a:p>
-        </p:txBody>
-      </p:sp>
-      <p:sp>
-        <p:nvSpPr>
-          <p:cNvPr id="32" name="Shape 30"/>
-          <p:cNvSpPr/>
-          <p:nvPr/>
-        </p:nvSpPr>
-        <p:spPr>
-          <a:xfrm>
-            <a:off x="6629400" y="3840480"/>
-            <a:ext cx="274320" cy="274320"/>
-          </a:xfrm>
-          <a:prstGeom prst="ellipse">
-            <a:avLst/>
-          </a:prstGeom>
-          <a:solidFill>
-            <a:srgbClr val="D7DAE0"/>
-          </a:solidFill>
-          <a:ln/>
-        </p:spPr>
-      </p:sp>
-      <p:sp>
-        <p:nvSpPr>
-          <p:cNvPr id="33" name="Text 31"/>
-          <p:cNvSpPr txBox="1"/>
-          <p:nvPr/>
-        </p:nvSpPr>
-        <p:spPr>
-          <a:xfrm>
-            <a:off x="6629400" y="3877056"/>
-            <a:ext cx="274320" cy="237744"/>
-          </a:xfrm>
-          <a:prstGeom prst="rect">
-            <a:avLst/>
-          </a:prstGeom>
-          <a:noFill/>
-          <a:ln/>
-        </p:spPr>
-        <p:txBody>
-          <a:bodyPr wrap="square" lIns="0" tIns="0" rIns="0" bIns="0" rtlCol="0" anchor="ctr"/>
-          <a:lstStyle/>
-          <a:p>
-            <a:pPr algn="ctr" indent="0" marL="0">
-              <a:buNone/>
-            </a:pPr>
-            <a:r>
-              <a:rPr lang="en-US" sz="1200" b="1" dirty="0">
-                <a:solidFill>
-                  <a:srgbClr val="14213D"/>
-                </a:solidFill>
-                <a:latin typeface="Calibri" pitchFamily="34" charset="0"/>
-                <a:ea typeface="Calibri" pitchFamily="34" charset="-122"/>
-                <a:cs typeface="Calibri" pitchFamily="34" charset="-120"/>
-              </a:rPr>
-              <a:t>4</a:t>
-            </a:r>
-            <a:endParaRPr lang="en-US" sz="1200" dirty="0"/>
-          </a:p>
-        </p:txBody>
-      </p:sp>
-      <p:sp>
-        <p:nvSpPr>
-          <p:cNvPr id="34" name="Text 32"/>
-          <p:cNvSpPr txBox="1"/>
-          <p:nvPr/>
-        </p:nvSpPr>
-        <p:spPr>
-          <a:xfrm>
-            <a:off x="7040880" y="3858768"/>
-            <a:ext cx="4206240" cy="292608"/>
-          </a:xfrm>
-          <a:prstGeom prst="rect">
-            <a:avLst/>
-          </a:prstGeom>
-          <a:noFill/>
-          <a:ln/>
-        </p:spPr>
-        <p:txBody>
-          <a:bodyPr wrap="square" lIns="0" tIns="0" rIns="0" bIns="0" rtlCol="0" anchor="ctr"/>
-          <a:lstStyle/>
-          <a:p>
-            <a:pPr indent="0" marL="0">
-              <a:buNone/>
-            </a:pPr>
-            <a:r>
-              <a:rPr lang="en-US" sz="1400" dirty="0">
-                <a:solidFill>
-                  <a:srgbClr val="1F2937"/>
-                </a:solidFill>
-                <a:latin typeface="Calibri" pitchFamily="34" charset="0"/>
-                <a:ea typeface="Calibri" pitchFamily="34" charset="-122"/>
-                <a:cs typeface="Calibri" pitchFamily="34" charset="-120"/>
-              </a:rPr>
-              <a:t>директ — 14 052 ₽</a:t>
-            </a:r>
-            <a:endParaRPr lang="en-US" sz="1400" dirty="0"/>
-          </a:p>
-        </p:txBody>
-      </p:sp>
-      <p:sp>
-        <p:nvSpPr>
-          <p:cNvPr id="35" name="Shape 33"/>
-          <p:cNvSpPr/>
-          <p:nvPr/>
-        </p:nvSpPr>
-        <p:spPr>
-          <a:xfrm>
-            <a:off x="6629400" y="4343400"/>
-            <a:ext cx="274320" cy="274320"/>
-          </a:xfrm>
-          <a:prstGeom prst="ellipse">
-            <a:avLst/>
-          </a:prstGeom>
-          <a:solidFill>
-            <a:srgbClr val="D7DAE0"/>
-          </a:solidFill>
-          <a:ln/>
-        </p:spPr>
-      </p:sp>
-      <p:sp>
-        <p:nvSpPr>
-          <p:cNvPr id="36" name="Text 34"/>
-          <p:cNvSpPr txBox="1"/>
-          <p:nvPr/>
-        </p:nvSpPr>
-        <p:spPr>
-          <a:xfrm>
-            <a:off x="6629400" y="4379976"/>
-            <a:ext cx="274320" cy="237744"/>
-          </a:xfrm>
-          <a:prstGeom prst="rect">
-            <a:avLst/>
-          </a:prstGeom>
-          <a:noFill/>
-          <a:ln/>
-        </p:spPr>
-        <p:txBody>
-          <a:bodyPr wrap="square" lIns="0" tIns="0" rIns="0" bIns="0" rtlCol="0" anchor="ctr"/>
-          <a:lstStyle/>
-          <a:p>
-            <a:pPr algn="ctr" indent="0" marL="0">
-              <a:buNone/>
-            </a:pPr>
-            <a:r>
-              <a:rPr lang="en-US" sz="1200" b="1" dirty="0">
-                <a:solidFill>
-                  <a:srgbClr val="14213D"/>
-                </a:solidFill>
-                <a:latin typeface="Calibri" pitchFamily="34" charset="0"/>
-                <a:ea typeface="Calibri" pitchFamily="34" charset="-122"/>
-                <a:cs typeface="Calibri" pitchFamily="34" charset="-120"/>
-              </a:rPr>
-              <a:t>5</a:t>
-            </a:r>
-            <a:endParaRPr lang="en-US" sz="1200" dirty="0"/>
-          </a:p>
-        </p:txBody>
-      </p:sp>
-      <p:sp>
-        <p:nvSpPr>
-          <p:cNvPr id="37" name="Text 35"/>
-          <p:cNvSpPr txBox="1"/>
-          <p:nvPr/>
-        </p:nvSpPr>
-        <p:spPr>
-          <a:xfrm>
-            <a:off x="7040880" y="4361688"/>
-            <a:ext cx="4206240" cy="292608"/>
-          </a:xfrm>
-          <a:prstGeom prst="rect">
-            <a:avLst/>
-          </a:prstGeom>
-          <a:noFill/>
-          <a:ln/>
-        </p:spPr>
-        <p:txBody>
-          <a:bodyPr wrap="square" lIns="0" tIns="0" rIns="0" bIns="0" rtlCol="0" anchor="ctr"/>
-          <a:lstStyle/>
-          <a:p>
-            <a:pPr indent="0" marL="0">
-              <a:buNone/>
-            </a:pPr>
-            <a:r>
-              <a:rPr lang="en-US" sz="1400" dirty="0">
-                <a:solidFill>
-                  <a:srgbClr val="1F2937"/>
-                </a:solidFill>
-                <a:latin typeface="Calibri" pitchFamily="34" charset="0"/>
-                <a:ea typeface="Calibri" pitchFamily="34" charset="-122"/>
-                <a:cs typeface="Calibri" pitchFamily="34" charset="-120"/>
-              </a:rPr>
-              <a:t>ВК — 2 342 ₽</a:t>
-            </a:r>
-            <a:endParaRPr lang="en-US" sz="1400" dirty="0"/>
-          </a:p>
-        </p:txBody>
-      </p:sp>
-      <p:sp>
-        <p:nvSpPr>
-          <p:cNvPr id="38" name="Shape 36"/>
-          <p:cNvSpPr/>
-          <p:nvPr/>
-        </p:nvSpPr>
-        <p:spPr>
-          <a:xfrm>
-            <a:off x="548640" y="4983480"/>
-            <a:ext cx="11064240" cy="1280160"/>
-          </a:xfrm>
-          <a:prstGeom prst="roundRect">
-            <a:avLst>
-              <a:gd name="adj" fmla="val 3571"/>
-            </a:avLst>
-          </a:prstGeom>
-          <a:solidFill>
-            <a:srgbClr val="14213D"/>
-          </a:solidFill>
-          <a:ln/>
-        </p:spPr>
-      </p:sp>
-      <p:sp>
-        <p:nvSpPr>
-          <p:cNvPr id="39" name="Text 37"/>
-          <p:cNvSpPr txBox="1"/>
-          <p:nvPr/>
-        </p:nvSpPr>
-        <p:spPr>
-          <a:xfrm>
-            <a:off x="914400" y="5166360"/>
-            <a:ext cx="10332720" cy="914400"/>
-          </a:xfrm>
-          <a:prstGeom prst="rect">
-            <a:avLst/>
-          </a:prstGeom>
-          <a:noFill/>
-          <a:ln/>
-        </p:spPr>
-        <p:txBody>
-          <a:bodyPr wrap="square" lIns="0" tIns="0" rIns="0" bIns="0" rtlCol="0" anchor="ctr"/>
-          <a:lstStyle/>
-          <a:p>
-            <a:pPr indent="0" marL="0">
-              <a:buNone/>
-            </a:pPr>
-            <a:r>
-              <a:rPr lang="en-US" sz="1500" dirty="0">
-                <a:solidFill>
-                  <a:srgbClr val="FFFFFF"/>
-                </a:solidFill>
-                <a:latin typeface="Calibri" pitchFamily="34" charset="0"/>
-                <a:ea typeface="Calibri" pitchFamily="34" charset="-122"/>
-                <a:cs typeface="Calibri" pitchFamily="34" charset="-120"/>
-              </a:rPr>
-              <a:t>Сайт — самый эффективный, но он упёрся в потолок: 260 переходов, SEO деньгами не разгонишь.</a:t>
-            </a:r>
-            <a:endParaRPr lang="en-US" sz="1500" dirty="0"/>
-          </a:p>
-          <a:p>
-            <a:pPr indent="0" marL="0">
-              <a:buNone/>
-            </a:pPr>
-            <a:r>
-              <a:rPr lang="en-US" sz="1500" dirty="0">
-                <a:solidFill>
-                  <a:srgbClr val="FFFFFF"/>
-                </a:solidFill>
-                <a:latin typeface="Calibri" pitchFamily="34" charset="0"/>
-                <a:ea typeface="Calibri" pitchFamily="34" charset="-122"/>
-                <a:cs typeface="Calibri" pitchFamily="34" charset="-120"/>
-              </a:rPr>
-              <a:t>LaModa — самый денежный: берёт объём сразу, платим за это комиссией.</a:t>
-            </a:r>
-            <a:endParaRPr lang="en-US" sz="1500" dirty="0"/>
+              <a:rPr lang="en-US" sz="1300" i="1" dirty="0">
+                <a:solidFill>
+                  <a:srgbClr val="6B7280"/>
+                </a:solidFill>
+                <a:latin typeface="Calibri" pitchFamily="34" charset="0"/>
+                <a:ea typeface="Calibri" pitchFamily="34" charset="-122"/>
+                <a:cs typeface="Calibri" pitchFamily="34" charset="-120"/>
+              </a:rPr>
+              <a:t>У ВК на привлечение уходит 81% маржи — с заказа остаётся 334 ₽. Это не канал, это тест на выживание.</a:t>
+            </a:r>
+            <a:endParaRPr lang="en-US" sz="1300" dirty="0"/>
           </a:p>
         </p:txBody>
       </p:sp>
@@ -12707,7 +14668,7 @@
                 <a:ea typeface="Cambria" pitchFamily="34" charset="-122"/>
                 <a:cs typeface="Cambria" pitchFamily="34" charset="-120"/>
               </a:rPr>
-              <a:t>Парадокс LaModa</a:t>
+              <a:t>Эффективность ≠ деньги</a:t>
             </a:r>
             <a:endParaRPr lang="en-US" sz="3400" dirty="0"/>
           </a:p>
@@ -12746,198 +14707,1128 @@
                 <a:ea typeface="Calibri" pitchFamily="34" charset="-122"/>
                 <a:cs typeface="Calibri" pitchFamily="34" charset="-120"/>
               </a:rPr>
-              <a:t>Лучшая воронка в таблице — и худшая маржа</a:t>
+              <a:t>Один и тот же месяц, два разных рейтинга</a:t>
             </a:r>
             <a:endParaRPr lang="en-US" sz="1400" dirty="0"/>
           </a:p>
         </p:txBody>
       </p:sp>
-      <p:graphicFrame>
-        <p:nvGraphicFramePr>
-          <p:cNvPr id="4" name="Chart 0" descr=""/>
-          <p:cNvGraphicFramePr/>
-          <p:nvPr/>
-        </p:nvGraphicFramePr>
-        <p:xfrm>
-          <a:off x="457200" y="1645920"/>
-          <a:ext cx="6675120" cy="3931920"/>
-        </p:xfrm>
-        <a:graphic xmlns:a="http://schemas.openxmlformats.org/drawingml/2006/main">
-          <a:graphicData uri="http://schemas.openxmlformats.org/drawingml/2006/chart">
-            <c:chart xmlns:c="http://schemas.openxmlformats.org/drawingml/2006/chart" r:id="rId1"/>
-          </a:graphicData>
-        </a:graphic>
-      </p:graphicFrame>
-      <p:sp>
-        <p:nvSpPr>
-          <p:cNvPr id="5" name="Text 2"/>
-          <p:cNvSpPr txBox="1"/>
-          <p:nvPr/>
-        </p:nvSpPr>
-        <p:spPr>
-          <a:xfrm>
-            <a:off x="7498080" y="1828800"/>
-            <a:ext cx="4114800" cy="329184"/>
-          </a:xfrm>
-          <a:prstGeom prst="rect">
-            <a:avLst/>
-          </a:prstGeom>
-          <a:noFill/>
-          <a:ln/>
-        </p:spPr>
-        <p:txBody>
-          <a:bodyPr wrap="square" lIns="0" tIns="0" rIns="0" bIns="0" rtlCol="0" anchor="ctr"/>
-          <a:lstStyle/>
-          <a:p>
-            <a:pPr indent="0" marL="0">
-              <a:buNone/>
-            </a:pPr>
-            <a:r>
-              <a:rPr lang="en-US" sz="1600" b="1" dirty="0">
-                <a:solidFill>
-                  <a:srgbClr val="14213D"/>
-                </a:solidFill>
-                <a:latin typeface="Calibri" pitchFamily="34" charset="0"/>
-                <a:ea typeface="Calibri" pitchFamily="34" charset="-122"/>
-                <a:cs typeface="Calibri" pitchFamily="34" charset="-120"/>
-              </a:rPr>
-              <a:t>Вход лучший из всех</a:t>
-            </a:r>
-            <a:endParaRPr lang="en-US" sz="1600" dirty="0"/>
-          </a:p>
-        </p:txBody>
-      </p:sp>
-      <p:sp>
-        <p:nvSpPr>
-          <p:cNvPr id="6" name="Text 3"/>
-          <p:cNvSpPr txBox="1"/>
-          <p:nvPr/>
-        </p:nvSpPr>
-        <p:spPr>
-          <a:xfrm>
-            <a:off x="7498080" y="2194560"/>
-            <a:ext cx="4114800" cy="822960"/>
-          </a:xfrm>
-          <a:prstGeom prst="rect">
-            <a:avLst/>
-          </a:prstGeom>
-          <a:noFill/>
-          <a:ln/>
-        </p:spPr>
-        <p:txBody>
-          <a:bodyPr wrap="square" lIns="0" tIns="0" rIns="0" bIns="0" rtlCol="0" anchor="ctr"/>
-          <a:lstStyle/>
-          <a:p>
-            <a:pPr indent="0" marL="0">
-              <a:buNone/>
-            </a:pPr>
-            <a:r>
-              <a:rPr lang="en-US" sz="1300" dirty="0">
-                <a:solidFill>
-                  <a:srgbClr val="6B7280"/>
-                </a:solidFill>
-                <a:latin typeface="Calibri" pitchFamily="34" charset="0"/>
-                <a:ea typeface="Calibri" pitchFamily="34" charset="-122"/>
-                <a:cs typeface="Calibri" pitchFamily="34" charset="-120"/>
-              </a:rPr>
-              <a:t>3,00% из показа в переход — втрое лучше сайта и директа. Человек уже внутри магазина одежды.</a:t>
-            </a:r>
-            <a:endParaRPr lang="en-US" sz="1300" dirty="0"/>
-          </a:p>
-        </p:txBody>
-      </p:sp>
-      <p:sp>
-        <p:nvSpPr>
-          <p:cNvPr id="7" name="Text 4"/>
-          <p:cNvSpPr txBox="1"/>
-          <p:nvPr/>
-        </p:nvSpPr>
-        <p:spPr>
-          <a:xfrm>
-            <a:off x="7498080" y="3200400"/>
-            <a:ext cx="4114800" cy="329184"/>
-          </a:xfrm>
-          <a:prstGeom prst="rect">
-            <a:avLst/>
-          </a:prstGeom>
-          <a:noFill/>
-          <a:ln/>
-        </p:spPr>
-        <p:txBody>
-          <a:bodyPr wrap="square" lIns="0" tIns="0" rIns="0" bIns="0" rtlCol="0" anchor="ctr"/>
-          <a:lstStyle/>
-          <a:p>
-            <a:pPr indent="0" marL="0">
-              <a:buNone/>
-            </a:pPr>
-            <a:r>
-              <a:rPr lang="en-US" sz="1600" b="1" dirty="0">
-                <a:solidFill>
-                  <a:srgbClr val="14213D"/>
-                </a:solidFill>
-                <a:latin typeface="Calibri" pitchFamily="34" charset="0"/>
-                <a:ea typeface="Calibri" pitchFamily="34" charset="-122"/>
-                <a:cs typeface="Calibri" pitchFamily="34" charset="-120"/>
-              </a:rPr>
-              <a:t>Цена — комиссия 35%</a:t>
-            </a:r>
-            <a:endParaRPr lang="en-US" sz="1600" dirty="0"/>
-          </a:p>
-        </p:txBody>
-      </p:sp>
-      <p:sp>
-        <p:nvSpPr>
-          <p:cNvPr id="8" name="Text 5"/>
-          <p:cNvSpPr txBox="1"/>
-          <p:nvPr/>
-        </p:nvSpPr>
-        <p:spPr>
-          <a:xfrm>
-            <a:off x="7498080" y="3566160"/>
-            <a:ext cx="4114800" cy="1005840"/>
-          </a:xfrm>
-          <a:prstGeom prst="rect">
-            <a:avLst/>
-          </a:prstGeom>
-          <a:noFill/>
-          <a:ln/>
-        </p:spPr>
-        <p:txBody>
-          <a:bodyPr wrap="square" lIns="0" tIns="0" rIns="0" bIns="0" rtlCol="0" anchor="ctr"/>
-          <a:lstStyle/>
-          <a:p>
-            <a:pPr indent="0" marL="0">
-              <a:buNone/>
-            </a:pPr>
-            <a:r>
-              <a:rPr lang="en-US" sz="1300" dirty="0">
-                <a:solidFill>
-                  <a:srgbClr val="6B7280"/>
-                </a:solidFill>
-                <a:latin typeface="Calibri" pitchFamily="34" charset="0"/>
-                <a:ea typeface="Calibri" pitchFamily="34" charset="-122"/>
-                <a:cs typeface="Calibri" pitchFamily="34" charset="-120"/>
-              </a:rPr>
-              <a:t>1 202 ₽ с заказа вместо 2 171 ₽. Мы платим не за трафик, а за чужое доверие: возврат, примерку, отзывы.</a:t>
-            </a:r>
-            <a:endParaRPr lang="en-US" sz="1300" dirty="0"/>
-          </a:p>
-        </p:txBody>
-      </p:sp>
-      <p:sp>
-        <p:nvSpPr>
-          <p:cNvPr id="9" name="Shape 6"/>
+      <p:sp>
+        <p:nvSpPr>
+          <p:cNvPr id="4" name="Shape 2"/>
           <p:cNvSpPr/>
           <p:nvPr/>
         </p:nvSpPr>
         <p:spPr>
           <a:xfrm>
-            <a:off x="548640" y="5029200"/>
-            <a:ext cx="11064240" cy="960120"/>
+            <a:off x="548640" y="1645920"/>
+            <a:ext cx="5349240" cy="3108960"/>
           </a:xfrm>
           <a:prstGeom prst="roundRect">
             <a:avLst>
-              <a:gd name="adj" fmla="val 4762"/>
+              <a:gd name="adj" fmla="val 1765"/>
+            </a:avLst>
+          </a:prstGeom>
+          <a:solidFill>
+            <a:srgbClr val="F1F2F4"/>
+          </a:solidFill>
+          <a:ln/>
+        </p:spPr>
+      </p:sp>
+      <p:sp>
+        <p:nvSpPr>
+          <p:cNvPr id="5" name="Text 3"/>
+          <p:cNvSpPr txBox="1"/>
+          <p:nvPr/>
+        </p:nvSpPr>
+        <p:spPr>
+          <a:xfrm>
+            <a:off x="914400" y="1828800"/>
+            <a:ext cx="4617720" cy="365760"/>
+          </a:xfrm>
+          <a:prstGeom prst="rect">
+            <a:avLst/>
+          </a:prstGeom>
+          <a:noFill/>
+          <a:ln/>
+        </p:spPr>
+        <p:txBody>
+          <a:bodyPr wrap="square" lIns="0" tIns="0" rIns="0" bIns="0" rtlCol="0" anchor="ctr"/>
+          <a:lstStyle/>
+          <a:p>
+            <a:pPr indent="0" marL="0">
+              <a:buNone/>
+            </a:pPr>
+            <a:r>
+              <a:rPr lang="en-US" sz="1600" b="1" dirty="0">
+                <a:solidFill>
+                  <a:srgbClr val="14213D"/>
+                </a:solidFill>
+                <a:latin typeface="Calibri" pitchFamily="34" charset="0"/>
+                <a:ea typeface="Calibri" pitchFamily="34" charset="-122"/>
+                <a:cs typeface="Calibri" pitchFamily="34" charset="-120"/>
+              </a:rPr>
+              <a:t>По эффективности (ROAS)</a:t>
+            </a:r>
+            <a:endParaRPr lang="en-US" sz="1600" dirty="0"/>
+          </a:p>
+        </p:txBody>
+      </p:sp>
+      <p:sp>
+        <p:nvSpPr>
+          <p:cNvPr id="6" name="Shape 4"/>
+          <p:cNvSpPr/>
+          <p:nvPr/>
+        </p:nvSpPr>
+        <p:spPr>
+          <a:xfrm>
+            <a:off x="914400" y="2331720"/>
+            <a:ext cx="274320" cy="274320"/>
+          </a:xfrm>
+          <a:prstGeom prst="ellipse">
+            <a:avLst/>
+          </a:prstGeom>
+          <a:solidFill>
+            <a:srgbClr val="FCA311"/>
+          </a:solidFill>
+          <a:ln/>
+        </p:spPr>
+      </p:sp>
+      <p:sp>
+        <p:nvSpPr>
+          <p:cNvPr id="7" name="Text 5"/>
+          <p:cNvSpPr txBox="1"/>
+          <p:nvPr/>
+        </p:nvSpPr>
+        <p:spPr>
+          <a:xfrm>
+            <a:off x="914400" y="2368296"/>
+            <a:ext cx="274320" cy="237744"/>
+          </a:xfrm>
+          <a:prstGeom prst="rect">
+            <a:avLst/>
+          </a:prstGeom>
+          <a:noFill/>
+          <a:ln/>
+        </p:spPr>
+        <p:txBody>
+          <a:bodyPr wrap="square" lIns="0" tIns="0" rIns="0" bIns="0" rtlCol="0" anchor="ctr"/>
+          <a:lstStyle/>
+          <a:p>
+            <a:pPr algn="ctr" indent="0" marL="0">
+              <a:buNone/>
+            </a:pPr>
+            <a:r>
+              <a:rPr lang="en-US" sz="1200" b="1" dirty="0">
+                <a:solidFill>
+                  <a:srgbClr val="14213D"/>
+                </a:solidFill>
+                <a:latin typeface="Calibri" pitchFamily="34" charset="0"/>
+                <a:ea typeface="Calibri" pitchFamily="34" charset="-122"/>
+                <a:cs typeface="Calibri" pitchFamily="34" charset="-120"/>
+              </a:rPr>
+              <a:t>1</a:t>
+            </a:r>
+            <a:endParaRPr lang="en-US" sz="1200" dirty="0"/>
+          </a:p>
+        </p:txBody>
+      </p:sp>
+      <p:sp>
+        <p:nvSpPr>
+          <p:cNvPr id="8" name="Text 6"/>
+          <p:cNvSpPr txBox="1"/>
+          <p:nvPr/>
+        </p:nvSpPr>
+        <p:spPr>
+          <a:xfrm>
+            <a:off x="1325880" y="2350008"/>
+            <a:ext cx="4206240" cy="292608"/>
+          </a:xfrm>
+          <a:prstGeom prst="rect">
+            <a:avLst/>
+          </a:prstGeom>
+          <a:noFill/>
+          <a:ln/>
+        </p:spPr>
+        <p:txBody>
+          <a:bodyPr wrap="square" lIns="0" tIns="0" rIns="0" bIns="0" rtlCol="0" anchor="ctr"/>
+          <a:lstStyle/>
+          <a:p>
+            <a:pPr indent="0" marL="0">
+              <a:buNone/>
+            </a:pPr>
+            <a:r>
+              <a:rPr lang="en-US" sz="1400" dirty="0">
+                <a:solidFill>
+                  <a:srgbClr val="1F2937"/>
+                </a:solidFill>
+                <a:latin typeface="Calibri" pitchFamily="34" charset="0"/>
+                <a:ea typeface="Calibri" pitchFamily="34" charset="-122"/>
+                <a:cs typeface="Calibri" pitchFamily="34" charset="-120"/>
+              </a:rPr>
+              <a:t>сайт — 5,64</a:t>
+            </a:r>
+            <a:endParaRPr lang="en-US" sz="1400" dirty="0"/>
+          </a:p>
+        </p:txBody>
+      </p:sp>
+      <p:sp>
+        <p:nvSpPr>
+          <p:cNvPr id="9" name="Shape 7"/>
+          <p:cNvSpPr/>
+          <p:nvPr/>
+        </p:nvSpPr>
+        <p:spPr>
+          <a:xfrm>
+            <a:off x="914400" y="2834640"/>
+            <a:ext cx="274320" cy="274320"/>
+          </a:xfrm>
+          <a:prstGeom prst="ellipse">
+            <a:avLst/>
+          </a:prstGeom>
+          <a:solidFill>
+            <a:srgbClr val="D7DAE0"/>
+          </a:solidFill>
+          <a:ln/>
+        </p:spPr>
+      </p:sp>
+      <p:sp>
+        <p:nvSpPr>
+          <p:cNvPr id="10" name="Text 8"/>
+          <p:cNvSpPr txBox="1"/>
+          <p:nvPr/>
+        </p:nvSpPr>
+        <p:spPr>
+          <a:xfrm>
+            <a:off x="914400" y="2871216"/>
+            <a:ext cx="274320" cy="237744"/>
+          </a:xfrm>
+          <a:prstGeom prst="rect">
+            <a:avLst/>
+          </a:prstGeom>
+          <a:noFill/>
+          <a:ln/>
+        </p:spPr>
+        <p:txBody>
+          <a:bodyPr wrap="square" lIns="0" tIns="0" rIns="0" bIns="0" rtlCol="0" anchor="ctr"/>
+          <a:lstStyle/>
+          <a:p>
+            <a:pPr algn="ctr" indent="0" marL="0">
+              <a:buNone/>
+            </a:pPr>
+            <a:r>
+              <a:rPr lang="en-US" sz="1200" b="1" dirty="0">
+                <a:solidFill>
+                  <a:srgbClr val="14213D"/>
+                </a:solidFill>
+                <a:latin typeface="Calibri" pitchFamily="34" charset="0"/>
+                <a:ea typeface="Calibri" pitchFamily="34" charset="-122"/>
+                <a:cs typeface="Calibri" pitchFamily="34" charset="-120"/>
+              </a:rPr>
+              <a:t>2</a:t>
+            </a:r>
+            <a:endParaRPr lang="en-US" sz="1200" dirty="0"/>
+          </a:p>
+        </p:txBody>
+      </p:sp>
+      <p:sp>
+        <p:nvSpPr>
+          <p:cNvPr id="11" name="Text 9"/>
+          <p:cNvSpPr txBox="1"/>
+          <p:nvPr/>
+        </p:nvSpPr>
+        <p:spPr>
+          <a:xfrm>
+            <a:off x="1325880" y="2852928"/>
+            <a:ext cx="4206240" cy="292608"/>
+          </a:xfrm>
+          <a:prstGeom prst="rect">
+            <a:avLst/>
+          </a:prstGeom>
+          <a:noFill/>
+          <a:ln/>
+        </p:spPr>
+        <p:txBody>
+          <a:bodyPr wrap="square" lIns="0" tIns="0" rIns="0" bIns="0" rtlCol="0" anchor="ctr"/>
+          <a:lstStyle/>
+          <a:p>
+            <a:pPr indent="0" marL="0">
+              <a:buNone/>
+            </a:pPr>
+            <a:r>
+              <a:rPr lang="en-US" sz="1400" dirty="0">
+                <a:solidFill>
+                  <a:srgbClr val="1F2937"/>
+                </a:solidFill>
+                <a:latin typeface="Calibri" pitchFamily="34" charset="0"/>
+                <a:ea typeface="Calibri" pitchFamily="34" charset="-122"/>
+                <a:cs typeface="Calibri" pitchFamily="34" charset="-120"/>
+              </a:rPr>
+              <a:t>LaModa — 3,01</a:t>
+            </a:r>
+            <a:endParaRPr lang="en-US" sz="1400" dirty="0"/>
+          </a:p>
+        </p:txBody>
+      </p:sp>
+      <p:sp>
+        <p:nvSpPr>
+          <p:cNvPr id="12" name="Shape 10"/>
+          <p:cNvSpPr/>
+          <p:nvPr/>
+        </p:nvSpPr>
+        <p:spPr>
+          <a:xfrm>
+            <a:off x="914400" y="3337560"/>
+            <a:ext cx="274320" cy="274320"/>
+          </a:xfrm>
+          <a:prstGeom prst="ellipse">
+            <a:avLst/>
+          </a:prstGeom>
+          <a:solidFill>
+            <a:srgbClr val="D7DAE0"/>
+          </a:solidFill>
+          <a:ln/>
+        </p:spPr>
+      </p:sp>
+      <p:sp>
+        <p:nvSpPr>
+          <p:cNvPr id="13" name="Text 11"/>
+          <p:cNvSpPr txBox="1"/>
+          <p:nvPr/>
+        </p:nvSpPr>
+        <p:spPr>
+          <a:xfrm>
+            <a:off x="914400" y="3374136"/>
+            <a:ext cx="274320" cy="237744"/>
+          </a:xfrm>
+          <a:prstGeom prst="rect">
+            <a:avLst/>
+          </a:prstGeom>
+          <a:noFill/>
+          <a:ln/>
+        </p:spPr>
+        <p:txBody>
+          <a:bodyPr wrap="square" lIns="0" tIns="0" rIns="0" bIns="0" rtlCol="0" anchor="ctr"/>
+          <a:lstStyle/>
+          <a:p>
+            <a:pPr algn="ctr" indent="0" marL="0">
+              <a:buNone/>
+            </a:pPr>
+            <a:r>
+              <a:rPr lang="en-US" sz="1200" b="1" dirty="0">
+                <a:solidFill>
+                  <a:srgbClr val="14213D"/>
+                </a:solidFill>
+                <a:latin typeface="Calibri" pitchFamily="34" charset="0"/>
+                <a:ea typeface="Calibri" pitchFamily="34" charset="-122"/>
+                <a:cs typeface="Calibri" pitchFamily="34" charset="-120"/>
+              </a:rPr>
+              <a:t>3</a:t>
+            </a:r>
+            <a:endParaRPr lang="en-US" sz="1200" dirty="0"/>
+          </a:p>
+        </p:txBody>
+      </p:sp>
+      <p:sp>
+        <p:nvSpPr>
+          <p:cNvPr id="14" name="Text 12"/>
+          <p:cNvSpPr txBox="1"/>
+          <p:nvPr/>
+        </p:nvSpPr>
+        <p:spPr>
+          <a:xfrm>
+            <a:off x="1325880" y="3355848"/>
+            <a:ext cx="4206240" cy="292608"/>
+          </a:xfrm>
+          <a:prstGeom prst="rect">
+            <a:avLst/>
+          </a:prstGeom>
+          <a:noFill/>
+          <a:ln/>
+        </p:spPr>
+        <p:txBody>
+          <a:bodyPr wrap="square" lIns="0" tIns="0" rIns="0" bIns="0" rtlCol="0" anchor="ctr"/>
+          <a:lstStyle/>
+          <a:p>
+            <a:pPr indent="0" marL="0">
+              <a:buNone/>
+            </a:pPr>
+            <a:r>
+              <a:rPr lang="en-US" sz="1400" dirty="0">
+                <a:solidFill>
+                  <a:srgbClr val="1F2937"/>
+                </a:solidFill>
+                <a:latin typeface="Calibri" pitchFamily="34" charset="0"/>
+                <a:ea typeface="Calibri" pitchFamily="34" charset="-122"/>
+                <a:cs typeface="Calibri" pitchFamily="34" charset="-120"/>
+              </a:rPr>
+              <a:t>Блогеры — 2,45</a:t>
+            </a:r>
+            <a:endParaRPr lang="en-US" sz="1400" dirty="0"/>
+          </a:p>
+        </p:txBody>
+      </p:sp>
+      <p:sp>
+        <p:nvSpPr>
+          <p:cNvPr id="15" name="Shape 13"/>
+          <p:cNvSpPr/>
+          <p:nvPr/>
+        </p:nvSpPr>
+        <p:spPr>
+          <a:xfrm>
+            <a:off x="914400" y="3840480"/>
+            <a:ext cx="274320" cy="274320"/>
+          </a:xfrm>
+          <a:prstGeom prst="ellipse">
+            <a:avLst/>
+          </a:prstGeom>
+          <a:solidFill>
+            <a:srgbClr val="D7DAE0"/>
+          </a:solidFill>
+          <a:ln/>
+        </p:spPr>
+      </p:sp>
+      <p:sp>
+        <p:nvSpPr>
+          <p:cNvPr id="16" name="Text 14"/>
+          <p:cNvSpPr txBox="1"/>
+          <p:nvPr/>
+        </p:nvSpPr>
+        <p:spPr>
+          <a:xfrm>
+            <a:off x="914400" y="3877056"/>
+            <a:ext cx="274320" cy="237744"/>
+          </a:xfrm>
+          <a:prstGeom prst="rect">
+            <a:avLst/>
+          </a:prstGeom>
+          <a:noFill/>
+          <a:ln/>
+        </p:spPr>
+        <p:txBody>
+          <a:bodyPr wrap="square" lIns="0" tIns="0" rIns="0" bIns="0" rtlCol="0" anchor="ctr"/>
+          <a:lstStyle/>
+          <a:p>
+            <a:pPr algn="ctr" indent="0" marL="0">
+              <a:buNone/>
+            </a:pPr>
+            <a:r>
+              <a:rPr lang="en-US" sz="1200" b="1" dirty="0">
+                <a:solidFill>
+                  <a:srgbClr val="14213D"/>
+                </a:solidFill>
+                <a:latin typeface="Calibri" pitchFamily="34" charset="0"/>
+                <a:ea typeface="Calibri" pitchFamily="34" charset="-122"/>
+                <a:cs typeface="Calibri" pitchFamily="34" charset="-120"/>
+              </a:rPr>
+              <a:t>4</a:t>
+            </a:r>
+            <a:endParaRPr lang="en-US" sz="1200" dirty="0"/>
+          </a:p>
+        </p:txBody>
+      </p:sp>
+      <p:sp>
+        <p:nvSpPr>
+          <p:cNvPr id="17" name="Text 15"/>
+          <p:cNvSpPr txBox="1"/>
+          <p:nvPr/>
+        </p:nvSpPr>
+        <p:spPr>
+          <a:xfrm>
+            <a:off x="1325880" y="3858768"/>
+            <a:ext cx="4206240" cy="292608"/>
+          </a:xfrm>
+          <a:prstGeom prst="rect">
+            <a:avLst/>
+          </a:prstGeom>
+          <a:noFill/>
+          <a:ln/>
+        </p:spPr>
+        <p:txBody>
+          <a:bodyPr wrap="square" lIns="0" tIns="0" rIns="0" bIns="0" rtlCol="0" anchor="ctr"/>
+          <a:lstStyle/>
+          <a:p>
+            <a:pPr indent="0" marL="0">
+              <a:buNone/>
+            </a:pPr>
+            <a:r>
+              <a:rPr lang="en-US" sz="1400" dirty="0">
+                <a:solidFill>
+                  <a:srgbClr val="1F2937"/>
+                </a:solidFill>
+                <a:latin typeface="Calibri" pitchFamily="34" charset="0"/>
+                <a:ea typeface="Calibri" pitchFamily="34" charset="-122"/>
+                <a:cs typeface="Calibri" pitchFamily="34" charset="-120"/>
+              </a:rPr>
+              <a:t>директ — 2,17</a:t>
+            </a:r>
+            <a:endParaRPr lang="en-US" sz="1400" dirty="0"/>
+          </a:p>
+        </p:txBody>
+      </p:sp>
+      <p:sp>
+        <p:nvSpPr>
+          <p:cNvPr id="18" name="Shape 16"/>
+          <p:cNvSpPr/>
+          <p:nvPr/>
+        </p:nvSpPr>
+        <p:spPr>
+          <a:xfrm>
+            <a:off x="914400" y="4343400"/>
+            <a:ext cx="274320" cy="274320"/>
+          </a:xfrm>
+          <a:prstGeom prst="ellipse">
+            <a:avLst/>
+          </a:prstGeom>
+          <a:solidFill>
+            <a:srgbClr val="D7DAE0"/>
+          </a:solidFill>
+          <a:ln/>
+        </p:spPr>
+      </p:sp>
+      <p:sp>
+        <p:nvSpPr>
+          <p:cNvPr id="19" name="Text 17"/>
+          <p:cNvSpPr txBox="1"/>
+          <p:nvPr/>
+        </p:nvSpPr>
+        <p:spPr>
+          <a:xfrm>
+            <a:off x="914400" y="4379976"/>
+            <a:ext cx="274320" cy="237744"/>
+          </a:xfrm>
+          <a:prstGeom prst="rect">
+            <a:avLst/>
+          </a:prstGeom>
+          <a:noFill/>
+          <a:ln/>
+        </p:spPr>
+        <p:txBody>
+          <a:bodyPr wrap="square" lIns="0" tIns="0" rIns="0" bIns="0" rtlCol="0" anchor="ctr"/>
+          <a:lstStyle/>
+          <a:p>
+            <a:pPr algn="ctr" indent="0" marL="0">
+              <a:buNone/>
+            </a:pPr>
+            <a:r>
+              <a:rPr lang="en-US" sz="1200" b="1" dirty="0">
+                <a:solidFill>
+                  <a:srgbClr val="14213D"/>
+                </a:solidFill>
+                <a:latin typeface="Calibri" pitchFamily="34" charset="0"/>
+                <a:ea typeface="Calibri" pitchFamily="34" charset="-122"/>
+                <a:cs typeface="Calibri" pitchFamily="34" charset="-120"/>
+              </a:rPr>
+              <a:t>5</a:t>
+            </a:r>
+            <a:endParaRPr lang="en-US" sz="1200" dirty="0"/>
+          </a:p>
+        </p:txBody>
+      </p:sp>
+      <p:sp>
+        <p:nvSpPr>
+          <p:cNvPr id="20" name="Text 18"/>
+          <p:cNvSpPr txBox="1"/>
+          <p:nvPr/>
+        </p:nvSpPr>
+        <p:spPr>
+          <a:xfrm>
+            <a:off x="1325880" y="4361688"/>
+            <a:ext cx="4206240" cy="292608"/>
+          </a:xfrm>
+          <a:prstGeom prst="rect">
+            <a:avLst/>
+          </a:prstGeom>
+          <a:noFill/>
+          <a:ln/>
+        </p:spPr>
+        <p:txBody>
+          <a:bodyPr wrap="square" lIns="0" tIns="0" rIns="0" bIns="0" rtlCol="0" anchor="ctr"/>
+          <a:lstStyle/>
+          <a:p>
+            <a:pPr indent="0" marL="0">
+              <a:buNone/>
+            </a:pPr>
+            <a:r>
+              <a:rPr lang="en-US" sz="1400" dirty="0">
+                <a:solidFill>
+                  <a:srgbClr val="1F2937"/>
+                </a:solidFill>
+                <a:latin typeface="Calibri" pitchFamily="34" charset="0"/>
+                <a:ea typeface="Calibri" pitchFamily="34" charset="-122"/>
+                <a:cs typeface="Calibri" pitchFamily="34" charset="-120"/>
+              </a:rPr>
+              <a:t>ВК — 1,23</a:t>
+            </a:r>
+            <a:endParaRPr lang="en-US" sz="1400" dirty="0"/>
+          </a:p>
+        </p:txBody>
+      </p:sp>
+      <p:sp>
+        <p:nvSpPr>
+          <p:cNvPr id="21" name="Shape 19"/>
+          <p:cNvSpPr/>
+          <p:nvPr/>
+        </p:nvSpPr>
+        <p:spPr>
+          <a:xfrm>
+            <a:off x="6263640" y="1645920"/>
+            <a:ext cx="5349240" cy="3108960"/>
+          </a:xfrm>
+          <a:prstGeom prst="roundRect">
+            <a:avLst>
+              <a:gd name="adj" fmla="val 1765"/>
+            </a:avLst>
+          </a:prstGeom>
+          <a:solidFill>
+            <a:srgbClr val="F1F2F4"/>
+          </a:solidFill>
+          <a:ln/>
+        </p:spPr>
+      </p:sp>
+      <p:sp>
+        <p:nvSpPr>
+          <p:cNvPr id="22" name="Text 20"/>
+          <p:cNvSpPr txBox="1"/>
+          <p:nvPr/>
+        </p:nvSpPr>
+        <p:spPr>
+          <a:xfrm>
+            <a:off x="6629400" y="1828800"/>
+            <a:ext cx="4617720" cy="365760"/>
+          </a:xfrm>
+          <a:prstGeom prst="rect">
+            <a:avLst/>
+          </a:prstGeom>
+          <a:noFill/>
+          <a:ln/>
+        </p:spPr>
+        <p:txBody>
+          <a:bodyPr wrap="square" lIns="0" tIns="0" rIns="0" bIns="0" rtlCol="0" anchor="ctr"/>
+          <a:lstStyle/>
+          <a:p>
+            <a:pPr indent="0" marL="0">
+              <a:buNone/>
+            </a:pPr>
+            <a:r>
+              <a:rPr lang="en-US" sz="1600" b="1" dirty="0">
+                <a:solidFill>
+                  <a:srgbClr val="14213D"/>
+                </a:solidFill>
+                <a:latin typeface="Calibri" pitchFamily="34" charset="0"/>
+                <a:ea typeface="Calibri" pitchFamily="34" charset="-122"/>
+                <a:cs typeface="Calibri" pitchFamily="34" charset="-120"/>
+              </a:rPr>
+              <a:t>По деньгам в кассе</a:t>
+            </a:r>
+            <a:endParaRPr lang="en-US" sz="1600" dirty="0"/>
+          </a:p>
+        </p:txBody>
+      </p:sp>
+      <p:sp>
+        <p:nvSpPr>
+          <p:cNvPr id="23" name="Shape 21"/>
+          <p:cNvSpPr/>
+          <p:nvPr/>
+        </p:nvSpPr>
+        <p:spPr>
+          <a:xfrm>
+            <a:off x="6629400" y="2331720"/>
+            <a:ext cx="274320" cy="274320"/>
+          </a:xfrm>
+          <a:prstGeom prst="ellipse">
+            <a:avLst/>
+          </a:prstGeom>
+          <a:solidFill>
+            <a:srgbClr val="FCA311"/>
+          </a:solidFill>
+          <a:ln/>
+        </p:spPr>
+      </p:sp>
+      <p:sp>
+        <p:nvSpPr>
+          <p:cNvPr id="24" name="Text 22"/>
+          <p:cNvSpPr txBox="1"/>
+          <p:nvPr/>
+        </p:nvSpPr>
+        <p:spPr>
+          <a:xfrm>
+            <a:off x="6629400" y="2368296"/>
+            <a:ext cx="274320" cy="237744"/>
+          </a:xfrm>
+          <a:prstGeom prst="rect">
+            <a:avLst/>
+          </a:prstGeom>
+          <a:noFill/>
+          <a:ln/>
+        </p:spPr>
+        <p:txBody>
+          <a:bodyPr wrap="square" lIns="0" tIns="0" rIns="0" bIns="0" rtlCol="0" anchor="ctr"/>
+          <a:lstStyle/>
+          <a:p>
+            <a:pPr algn="ctr" indent="0" marL="0">
+              <a:buNone/>
+            </a:pPr>
+            <a:r>
+              <a:rPr lang="en-US" sz="1200" b="1" dirty="0">
+                <a:solidFill>
+                  <a:srgbClr val="14213D"/>
+                </a:solidFill>
+                <a:latin typeface="Calibri" pitchFamily="34" charset="0"/>
+                <a:ea typeface="Calibri" pitchFamily="34" charset="-122"/>
+                <a:cs typeface="Calibri" pitchFamily="34" charset="-120"/>
+              </a:rPr>
+              <a:t>1</a:t>
+            </a:r>
+            <a:endParaRPr lang="en-US" sz="1200" dirty="0"/>
+          </a:p>
+        </p:txBody>
+      </p:sp>
+      <p:sp>
+        <p:nvSpPr>
+          <p:cNvPr id="25" name="Text 23"/>
+          <p:cNvSpPr txBox="1"/>
+          <p:nvPr/>
+        </p:nvSpPr>
+        <p:spPr>
+          <a:xfrm>
+            <a:off x="7040880" y="2350008"/>
+            <a:ext cx="4206240" cy="292608"/>
+          </a:xfrm>
+          <a:prstGeom prst="rect">
+            <a:avLst/>
+          </a:prstGeom>
+          <a:noFill/>
+          <a:ln/>
+        </p:spPr>
+        <p:txBody>
+          <a:bodyPr wrap="square" lIns="0" tIns="0" rIns="0" bIns="0" rtlCol="0" anchor="ctr"/>
+          <a:lstStyle/>
+          <a:p>
+            <a:pPr indent="0" marL="0">
+              <a:buNone/>
+            </a:pPr>
+            <a:r>
+              <a:rPr lang="en-US" sz="1400" dirty="0">
+                <a:solidFill>
+                  <a:srgbClr val="1F2937"/>
+                </a:solidFill>
+                <a:latin typeface="Calibri" pitchFamily="34" charset="0"/>
+                <a:ea typeface="Calibri" pitchFamily="34" charset="-122"/>
+                <a:cs typeface="Calibri" pitchFamily="34" charset="-120"/>
+              </a:rPr>
+              <a:t>LaModa — 24 060 ₽</a:t>
+            </a:r>
+            <a:endParaRPr lang="en-US" sz="1400" dirty="0"/>
+          </a:p>
+        </p:txBody>
+      </p:sp>
+      <p:sp>
+        <p:nvSpPr>
+          <p:cNvPr id="26" name="Shape 24"/>
+          <p:cNvSpPr/>
+          <p:nvPr/>
+        </p:nvSpPr>
+        <p:spPr>
+          <a:xfrm>
+            <a:off x="6629400" y="2834640"/>
+            <a:ext cx="274320" cy="274320"/>
+          </a:xfrm>
+          <a:prstGeom prst="ellipse">
+            <a:avLst/>
+          </a:prstGeom>
+          <a:solidFill>
+            <a:srgbClr val="D7DAE0"/>
+          </a:solidFill>
+          <a:ln/>
+        </p:spPr>
+      </p:sp>
+      <p:sp>
+        <p:nvSpPr>
+          <p:cNvPr id="27" name="Text 25"/>
+          <p:cNvSpPr txBox="1"/>
+          <p:nvPr/>
+        </p:nvSpPr>
+        <p:spPr>
+          <a:xfrm>
+            <a:off x="6629400" y="2871216"/>
+            <a:ext cx="274320" cy="237744"/>
+          </a:xfrm>
+          <a:prstGeom prst="rect">
+            <a:avLst/>
+          </a:prstGeom>
+          <a:noFill/>
+          <a:ln/>
+        </p:spPr>
+        <p:txBody>
+          <a:bodyPr wrap="square" lIns="0" tIns="0" rIns="0" bIns="0" rtlCol="0" anchor="ctr"/>
+          <a:lstStyle/>
+          <a:p>
+            <a:pPr algn="ctr" indent="0" marL="0">
+              <a:buNone/>
+            </a:pPr>
+            <a:r>
+              <a:rPr lang="en-US" sz="1200" b="1" dirty="0">
+                <a:solidFill>
+                  <a:srgbClr val="14213D"/>
+                </a:solidFill>
+                <a:latin typeface="Calibri" pitchFamily="34" charset="0"/>
+                <a:ea typeface="Calibri" pitchFamily="34" charset="-122"/>
+                <a:cs typeface="Calibri" pitchFamily="34" charset="-120"/>
+              </a:rPr>
+              <a:t>2</a:t>
+            </a:r>
+            <a:endParaRPr lang="en-US" sz="1200" dirty="0"/>
+          </a:p>
+        </p:txBody>
+      </p:sp>
+      <p:sp>
+        <p:nvSpPr>
+          <p:cNvPr id="28" name="Text 26"/>
+          <p:cNvSpPr txBox="1"/>
+          <p:nvPr/>
+        </p:nvSpPr>
+        <p:spPr>
+          <a:xfrm>
+            <a:off x="7040880" y="2852928"/>
+            <a:ext cx="4206240" cy="292608"/>
+          </a:xfrm>
+          <a:prstGeom prst="rect">
+            <a:avLst/>
+          </a:prstGeom>
+          <a:noFill/>
+          <a:ln/>
+        </p:spPr>
+        <p:txBody>
+          <a:bodyPr wrap="square" lIns="0" tIns="0" rIns="0" bIns="0" rtlCol="0" anchor="ctr"/>
+          <a:lstStyle/>
+          <a:p>
+            <a:pPr indent="0" marL="0">
+              <a:buNone/>
+            </a:pPr>
+            <a:r>
+              <a:rPr lang="en-US" sz="1400" dirty="0">
+                <a:solidFill>
+                  <a:srgbClr val="1F2937"/>
+                </a:solidFill>
+                <a:latin typeface="Calibri" pitchFamily="34" charset="0"/>
+                <a:ea typeface="Calibri" pitchFamily="34" charset="-122"/>
+                <a:cs typeface="Calibri" pitchFamily="34" charset="-120"/>
+              </a:rPr>
+              <a:t>сайт — 23 223 ₽</a:t>
+            </a:r>
+            <a:endParaRPr lang="en-US" sz="1400" dirty="0"/>
+          </a:p>
+        </p:txBody>
+      </p:sp>
+      <p:sp>
+        <p:nvSpPr>
+          <p:cNvPr id="29" name="Shape 27"/>
+          <p:cNvSpPr/>
+          <p:nvPr/>
+        </p:nvSpPr>
+        <p:spPr>
+          <a:xfrm>
+            <a:off x="6629400" y="3337560"/>
+            <a:ext cx="274320" cy="274320"/>
+          </a:xfrm>
+          <a:prstGeom prst="ellipse">
+            <a:avLst/>
+          </a:prstGeom>
+          <a:solidFill>
+            <a:srgbClr val="D7DAE0"/>
+          </a:solidFill>
+          <a:ln/>
+        </p:spPr>
+      </p:sp>
+      <p:sp>
+        <p:nvSpPr>
+          <p:cNvPr id="30" name="Text 28"/>
+          <p:cNvSpPr txBox="1"/>
+          <p:nvPr/>
+        </p:nvSpPr>
+        <p:spPr>
+          <a:xfrm>
+            <a:off x="6629400" y="3374136"/>
+            <a:ext cx="274320" cy="237744"/>
+          </a:xfrm>
+          <a:prstGeom prst="rect">
+            <a:avLst/>
+          </a:prstGeom>
+          <a:noFill/>
+          <a:ln/>
+        </p:spPr>
+        <p:txBody>
+          <a:bodyPr wrap="square" lIns="0" tIns="0" rIns="0" bIns="0" rtlCol="0" anchor="ctr"/>
+          <a:lstStyle/>
+          <a:p>
+            <a:pPr algn="ctr" indent="0" marL="0">
+              <a:buNone/>
+            </a:pPr>
+            <a:r>
+              <a:rPr lang="en-US" sz="1200" b="1" dirty="0">
+                <a:solidFill>
+                  <a:srgbClr val="14213D"/>
+                </a:solidFill>
+                <a:latin typeface="Calibri" pitchFamily="34" charset="0"/>
+                <a:ea typeface="Calibri" pitchFamily="34" charset="-122"/>
+                <a:cs typeface="Calibri" pitchFamily="34" charset="-120"/>
+              </a:rPr>
+              <a:t>3</a:t>
+            </a:r>
+            <a:endParaRPr lang="en-US" sz="1200" dirty="0"/>
+          </a:p>
+        </p:txBody>
+      </p:sp>
+      <p:sp>
+        <p:nvSpPr>
+          <p:cNvPr id="31" name="Text 29"/>
+          <p:cNvSpPr txBox="1"/>
+          <p:nvPr/>
+        </p:nvSpPr>
+        <p:spPr>
+          <a:xfrm>
+            <a:off x="7040880" y="3355848"/>
+            <a:ext cx="4206240" cy="292608"/>
+          </a:xfrm>
+          <a:prstGeom prst="rect">
+            <a:avLst/>
+          </a:prstGeom>
+          <a:noFill/>
+          <a:ln/>
+        </p:spPr>
+        <p:txBody>
+          <a:bodyPr wrap="square" lIns="0" tIns="0" rIns="0" bIns="0" rtlCol="0" anchor="ctr"/>
+          <a:lstStyle/>
+          <a:p>
+            <a:pPr indent="0" marL="0">
+              <a:buNone/>
+            </a:pPr>
+            <a:r>
+              <a:rPr lang="en-US" sz="1400" dirty="0">
+                <a:solidFill>
+                  <a:srgbClr val="1F2937"/>
+                </a:solidFill>
+                <a:latin typeface="Calibri" pitchFamily="34" charset="0"/>
+                <a:ea typeface="Calibri" pitchFamily="34" charset="-122"/>
+                <a:cs typeface="Calibri" pitchFamily="34" charset="-120"/>
+              </a:rPr>
+              <a:t>Блогеры — 21 780 ₽</a:t>
+            </a:r>
+            <a:endParaRPr lang="en-US" sz="1400" dirty="0"/>
+          </a:p>
+        </p:txBody>
+      </p:sp>
+      <p:sp>
+        <p:nvSpPr>
+          <p:cNvPr id="32" name="Shape 30"/>
+          <p:cNvSpPr/>
+          <p:nvPr/>
+        </p:nvSpPr>
+        <p:spPr>
+          <a:xfrm>
+            <a:off x="6629400" y="3840480"/>
+            <a:ext cx="274320" cy="274320"/>
+          </a:xfrm>
+          <a:prstGeom prst="ellipse">
+            <a:avLst/>
+          </a:prstGeom>
+          <a:solidFill>
+            <a:srgbClr val="D7DAE0"/>
+          </a:solidFill>
+          <a:ln/>
+        </p:spPr>
+      </p:sp>
+      <p:sp>
+        <p:nvSpPr>
+          <p:cNvPr id="33" name="Text 31"/>
+          <p:cNvSpPr txBox="1"/>
+          <p:nvPr/>
+        </p:nvSpPr>
+        <p:spPr>
+          <a:xfrm>
+            <a:off x="6629400" y="3877056"/>
+            <a:ext cx="274320" cy="237744"/>
+          </a:xfrm>
+          <a:prstGeom prst="rect">
+            <a:avLst/>
+          </a:prstGeom>
+          <a:noFill/>
+          <a:ln/>
+        </p:spPr>
+        <p:txBody>
+          <a:bodyPr wrap="square" lIns="0" tIns="0" rIns="0" bIns="0" rtlCol="0" anchor="ctr"/>
+          <a:lstStyle/>
+          <a:p>
+            <a:pPr algn="ctr" indent="0" marL="0">
+              <a:buNone/>
+            </a:pPr>
+            <a:r>
+              <a:rPr lang="en-US" sz="1200" b="1" dirty="0">
+                <a:solidFill>
+                  <a:srgbClr val="14213D"/>
+                </a:solidFill>
+                <a:latin typeface="Calibri" pitchFamily="34" charset="0"/>
+                <a:ea typeface="Calibri" pitchFamily="34" charset="-122"/>
+                <a:cs typeface="Calibri" pitchFamily="34" charset="-120"/>
+              </a:rPr>
+              <a:t>4</a:t>
+            </a:r>
+            <a:endParaRPr lang="en-US" sz="1200" dirty="0"/>
+          </a:p>
+        </p:txBody>
+      </p:sp>
+      <p:sp>
+        <p:nvSpPr>
+          <p:cNvPr id="34" name="Text 32"/>
+          <p:cNvSpPr txBox="1"/>
+          <p:nvPr/>
+        </p:nvSpPr>
+        <p:spPr>
+          <a:xfrm>
+            <a:off x="7040880" y="3858768"/>
+            <a:ext cx="4206240" cy="292608"/>
+          </a:xfrm>
+          <a:prstGeom prst="rect">
+            <a:avLst/>
+          </a:prstGeom>
+          <a:noFill/>
+          <a:ln/>
+        </p:spPr>
+        <p:txBody>
+          <a:bodyPr wrap="square" lIns="0" tIns="0" rIns="0" bIns="0" rtlCol="0" anchor="ctr"/>
+          <a:lstStyle/>
+          <a:p>
+            <a:pPr indent="0" marL="0">
+              <a:buNone/>
+            </a:pPr>
+            <a:r>
+              <a:rPr lang="en-US" sz="1400" dirty="0">
+                <a:solidFill>
+                  <a:srgbClr val="1F2937"/>
+                </a:solidFill>
+                <a:latin typeface="Calibri" pitchFamily="34" charset="0"/>
+                <a:ea typeface="Calibri" pitchFamily="34" charset="-122"/>
+                <a:cs typeface="Calibri" pitchFamily="34" charset="-120"/>
+              </a:rPr>
+              <a:t>директ — 14 052 ₽</a:t>
+            </a:r>
+            <a:endParaRPr lang="en-US" sz="1400" dirty="0"/>
+          </a:p>
+        </p:txBody>
+      </p:sp>
+      <p:sp>
+        <p:nvSpPr>
+          <p:cNvPr id="35" name="Shape 33"/>
+          <p:cNvSpPr/>
+          <p:nvPr/>
+        </p:nvSpPr>
+        <p:spPr>
+          <a:xfrm>
+            <a:off x="6629400" y="4343400"/>
+            <a:ext cx="274320" cy="274320"/>
+          </a:xfrm>
+          <a:prstGeom prst="ellipse">
+            <a:avLst/>
+          </a:prstGeom>
+          <a:solidFill>
+            <a:srgbClr val="D7DAE0"/>
+          </a:solidFill>
+          <a:ln/>
+        </p:spPr>
+      </p:sp>
+      <p:sp>
+        <p:nvSpPr>
+          <p:cNvPr id="36" name="Text 34"/>
+          <p:cNvSpPr txBox="1"/>
+          <p:nvPr/>
+        </p:nvSpPr>
+        <p:spPr>
+          <a:xfrm>
+            <a:off x="6629400" y="4379976"/>
+            <a:ext cx="274320" cy="237744"/>
+          </a:xfrm>
+          <a:prstGeom prst="rect">
+            <a:avLst/>
+          </a:prstGeom>
+          <a:noFill/>
+          <a:ln/>
+        </p:spPr>
+        <p:txBody>
+          <a:bodyPr wrap="square" lIns="0" tIns="0" rIns="0" bIns="0" rtlCol="0" anchor="ctr"/>
+          <a:lstStyle/>
+          <a:p>
+            <a:pPr algn="ctr" indent="0" marL="0">
+              <a:buNone/>
+            </a:pPr>
+            <a:r>
+              <a:rPr lang="en-US" sz="1200" b="1" dirty="0">
+                <a:solidFill>
+                  <a:srgbClr val="14213D"/>
+                </a:solidFill>
+                <a:latin typeface="Calibri" pitchFamily="34" charset="0"/>
+                <a:ea typeface="Calibri" pitchFamily="34" charset="-122"/>
+                <a:cs typeface="Calibri" pitchFamily="34" charset="-120"/>
+              </a:rPr>
+              <a:t>5</a:t>
+            </a:r>
+            <a:endParaRPr lang="en-US" sz="1200" dirty="0"/>
+          </a:p>
+        </p:txBody>
+      </p:sp>
+      <p:sp>
+        <p:nvSpPr>
+          <p:cNvPr id="37" name="Text 35"/>
+          <p:cNvSpPr txBox="1"/>
+          <p:nvPr/>
+        </p:nvSpPr>
+        <p:spPr>
+          <a:xfrm>
+            <a:off x="7040880" y="4361688"/>
+            <a:ext cx="4206240" cy="292608"/>
+          </a:xfrm>
+          <a:prstGeom prst="rect">
+            <a:avLst/>
+          </a:prstGeom>
+          <a:noFill/>
+          <a:ln/>
+        </p:spPr>
+        <p:txBody>
+          <a:bodyPr wrap="square" lIns="0" tIns="0" rIns="0" bIns="0" rtlCol="0" anchor="ctr"/>
+          <a:lstStyle/>
+          <a:p>
+            <a:pPr indent="0" marL="0">
+              <a:buNone/>
+            </a:pPr>
+            <a:r>
+              <a:rPr lang="en-US" sz="1400" dirty="0">
+                <a:solidFill>
+                  <a:srgbClr val="1F2937"/>
+                </a:solidFill>
+                <a:latin typeface="Calibri" pitchFamily="34" charset="0"/>
+                <a:ea typeface="Calibri" pitchFamily="34" charset="-122"/>
+                <a:cs typeface="Calibri" pitchFamily="34" charset="-120"/>
+              </a:rPr>
+              <a:t>ВК — 2 342 ₽</a:t>
+            </a:r>
+            <a:endParaRPr lang="en-US" sz="1400" dirty="0"/>
+          </a:p>
+        </p:txBody>
+      </p:sp>
+      <p:sp>
+        <p:nvSpPr>
+          <p:cNvPr id="38" name="Shape 36"/>
+          <p:cNvSpPr/>
+          <p:nvPr/>
+        </p:nvSpPr>
+        <p:spPr>
+          <a:xfrm>
+            <a:off x="548640" y="4983480"/>
+            <a:ext cx="11064240" cy="1280160"/>
+          </a:xfrm>
+          <a:prstGeom prst="roundRect">
+            <a:avLst>
+              <a:gd name="adj" fmla="val 3571"/>
             </a:avLst>
           </a:prstGeom>
           <a:solidFill>
@@ -12948,14 +15839,14 @@
       </p:sp>
       <p:sp>
         <p:nvSpPr>
-          <p:cNvPr id="10" name="Text 7"/>
-          <p:cNvSpPr txBox="1"/>
-          <p:nvPr/>
-        </p:nvSpPr>
-        <p:spPr>
-          <a:xfrm>
-            <a:off x="914400" y="5212080"/>
-            <a:ext cx="10332720" cy="594360"/>
+          <p:cNvPr id="39" name="Text 37"/>
+          <p:cNvSpPr txBox="1"/>
+          <p:nvPr/>
+        </p:nvSpPr>
+        <p:spPr>
+          <a:xfrm>
+            <a:off x="914400" y="5166360"/>
+            <a:ext cx="10332720" cy="914400"/>
           </a:xfrm>
           <a:prstGeom prst="rect">
             <a:avLst/>
@@ -12979,7 +15870,24 @@
                 <a:ea typeface="Calibri" pitchFamily="34" charset="-122"/>
                 <a:cs typeface="Calibri" pitchFamily="34" charset="-120"/>
               </a:rPr>
-              <a:t>Вывод: LaModa наращиваем ради объёма и оборота, но прибыль на единицу растёт только на своём сайте.</a:t>
+              <a:t>Сайт — самый эффективный, но он упёрся в потолок: 260 переходов, SEO деньгами не разгонишь.</a:t>
+            </a:r>
+            <a:endParaRPr lang="en-US" sz="1500" dirty="0"/>
+          </a:p>
+          <a:p>
+            <a:pPr indent="0" marL="0">
+              <a:buNone/>
+            </a:pPr>
+            <a:r>
+              <a:rPr lang="en-US" sz="1500" dirty="0">
+                <a:solidFill>
+                  <a:srgbClr val="FFFFFF"/>
+                </a:solidFill>
+                <a:latin typeface="Calibri" pitchFamily="34" charset="0"/>
+                <a:ea typeface="Calibri" pitchFamily="34" charset="-122"/>
+                <a:cs typeface="Calibri" pitchFamily="34" charset="-120"/>
+              </a:rPr>
+              <a:t>LaModa — самый денежный: берёт объём сразу, платим за это комиссией.</a:t>
             </a:r>
             <a:endParaRPr lang="en-US" sz="1500" dirty="0"/>
           </a:p>
@@ -13043,7 +15951,7 @@
                 <a:ea typeface="Cambria" pitchFamily="34" charset="-122"/>
                 <a:cs typeface="Cambria" pitchFamily="34" charset="-120"/>
               </a:rPr>
-              <a:t>Где теряется покупатель</a:t>
+              <a:t>Куда уходит бюджет и откуда приходит прибыль</a:t>
             </a:r>
             <a:endParaRPr lang="en-US" sz="3400" dirty="0"/>
           </a:p>
@@ -13082,26 +15990,58 @@
                 <a:ea typeface="Calibri" pitchFamily="34" charset="-122"/>
                 <a:cs typeface="Calibri" pitchFamily="34" charset="-120"/>
               </a:rPr>
-              <a:t>Сквозная воронка по всем каналам</a:t>
+              <a:t>Сайт даёт 20% прибыли на 9% бюджета. ВК — 9% прибыли на 19% бюджета</a:t>
             </a:r>
             <a:endParaRPr lang="en-US" sz="1400" dirty="0"/>
           </a:p>
         </p:txBody>
       </p:sp>
-      <p:sp>
-        <p:nvSpPr>
-          <p:cNvPr id="4" name="Shape 2"/>
+      <p:graphicFrame>
+        <p:nvGraphicFramePr>
+          <p:cNvPr id="4" name="Chart 0" descr=""/>
+          <p:cNvGraphicFramePr/>
+          <p:nvPr/>
+        </p:nvGraphicFramePr>
+        <p:xfrm>
+          <a:off x="548640" y="1874520"/>
+          <a:ext cx="5120640" cy="3291840"/>
+        </p:xfrm>
+        <a:graphic xmlns:a="http://schemas.openxmlformats.org/drawingml/2006/main">
+          <a:graphicData uri="http://schemas.openxmlformats.org/drawingml/2006/chart">
+            <c:chart xmlns:c="http://schemas.openxmlformats.org/drawingml/2006/chart" r:id="rId1"/>
+          </a:graphicData>
+        </a:graphic>
+      </p:graphicFrame>
+      <p:graphicFrame>
+        <p:nvGraphicFramePr>
+          <p:cNvPr id="5" name="Chart 1" descr=""/>
+          <p:cNvGraphicFramePr/>
+          <p:nvPr/>
+        </p:nvGraphicFramePr>
+        <p:xfrm>
+          <a:off x="6263640" y="1874520"/>
+          <a:ext cx="5120640" cy="3291840"/>
+        </p:xfrm>
+        <a:graphic xmlns:a="http://schemas.openxmlformats.org/drawingml/2006/main">
+          <a:graphicData uri="http://schemas.openxmlformats.org/drawingml/2006/chart">
+            <c:chart xmlns:c="http://schemas.openxmlformats.org/drawingml/2006/chart" r:id="rId2"/>
+          </a:graphicData>
+        </a:graphic>
+      </p:graphicFrame>
+      <p:sp>
+        <p:nvSpPr>
+          <p:cNvPr id="6" name="Shape 2"/>
           <p:cNvSpPr/>
           <p:nvPr/>
         </p:nvSpPr>
         <p:spPr>
           <a:xfrm>
-            <a:off x="548640" y="1645920"/>
-            <a:ext cx="3529584" cy="1783080"/>
+            <a:off x="548640" y="5349240"/>
+            <a:ext cx="2103120" cy="914400"/>
           </a:xfrm>
           <a:prstGeom prst="roundRect">
             <a:avLst>
-              <a:gd name="adj" fmla="val 3077"/>
+              <a:gd name="adj" fmla="val 6000"/>
             </a:avLst>
           </a:prstGeom>
           <a:solidFill>
@@ -13112,14 +16052,14 @@
       </p:sp>
       <p:sp>
         <p:nvSpPr>
-          <p:cNvPr id="5" name="Text 3"/>
-          <p:cNvSpPr txBox="1"/>
-          <p:nvPr/>
-        </p:nvSpPr>
-        <p:spPr>
-          <a:xfrm>
-            <a:off x="804672" y="1828800"/>
-            <a:ext cx="3017520" cy="658368"/>
+          <p:cNvPr id="7" name="Text 3"/>
+          <p:cNvSpPr txBox="1"/>
+          <p:nvPr/>
+        </p:nvSpPr>
+        <p:spPr>
+          <a:xfrm>
+            <a:off x="731520" y="5477256"/>
+            <a:ext cx="1737360" cy="274320"/>
           </a:xfrm>
           <a:prstGeom prst="rect">
             <a:avLst/>
@@ -13135,7 +16075,46 @@
               <a:buNone/>
             </a:pPr>
             <a:r>
-              <a:rPr lang="en-US" sz="3200" b="1" dirty="0">
+              <a:rPr lang="en-US" sz="1200" b="1" dirty="0">
+                <a:solidFill>
+                  <a:srgbClr val="6B7280"/>
+                </a:solidFill>
+                <a:latin typeface="Calibri" pitchFamily="34" charset="0"/>
+                <a:ea typeface="Calibri" pitchFamily="34" charset="-122"/>
+                <a:cs typeface="Calibri" pitchFamily="34" charset="-120"/>
+              </a:rPr>
+              <a:t>сайт</a:t>
+            </a:r>
+            <a:endParaRPr lang="en-US" sz="1200" dirty="0"/>
+          </a:p>
+        </p:txBody>
+      </p:sp>
+      <p:sp>
+        <p:nvSpPr>
+          <p:cNvPr id="8" name="Text 4"/>
+          <p:cNvSpPr txBox="1"/>
+          <p:nvPr/>
+        </p:nvSpPr>
+        <p:spPr>
+          <a:xfrm>
+            <a:off x="731520" y="5788152"/>
+            <a:ext cx="1737360" cy="347472"/>
+          </a:xfrm>
+          <a:prstGeom prst="rect">
+            <a:avLst/>
+          </a:prstGeom>
+          <a:noFill/>
+          <a:ln/>
+        </p:spPr>
+        <p:txBody>
+          <a:bodyPr wrap="square" lIns="0" tIns="0" rIns="0" bIns="0" rtlCol="0" anchor="ctr"/>
+          <a:lstStyle/>
+          <a:p>
+            <a:pPr indent="0" marL="0">
+              <a:buNone/>
+            </a:pPr>
+            <a:r>
+              <a:rPr lang="en-US" sz="1600" b="1" dirty="0">
                 <a:solidFill>
                   <a:srgbClr val="14213D"/>
                 </a:solidFill>
@@ -13143,104 +16122,26 @@
                 <a:ea typeface="Calibri" pitchFamily="34" charset="-122"/>
                 <a:cs typeface="Calibri" pitchFamily="34" charset="-120"/>
               </a:rPr>
-              <a:t>1,44%</a:t>
-            </a:r>
-            <a:endParaRPr lang="en-US" sz="3200" dirty="0"/>
-          </a:p>
-        </p:txBody>
-      </p:sp>
-      <p:sp>
-        <p:nvSpPr>
-          <p:cNvPr id="6" name="Text 4"/>
-          <p:cNvSpPr txBox="1"/>
-          <p:nvPr/>
-        </p:nvSpPr>
-        <p:spPr>
-          <a:xfrm>
-            <a:off x="804672" y="2505456"/>
-            <a:ext cx="3017520" cy="292608"/>
-          </a:xfrm>
-          <a:prstGeom prst="rect">
-            <a:avLst/>
-          </a:prstGeom>
-          <a:noFill/>
-          <a:ln/>
-        </p:spPr>
-        <p:txBody>
-          <a:bodyPr wrap="square" lIns="0" tIns="0" rIns="0" bIns="0" rtlCol="0" anchor="ctr"/>
-          <a:lstStyle/>
-          <a:p>
-            <a:pPr indent="0" marL="0">
-              <a:buNone/>
-            </a:pPr>
-            <a:r>
-              <a:rPr lang="en-US" sz="1300" b="1" dirty="0">
-                <a:solidFill>
-                  <a:srgbClr val="1F2937"/>
-                </a:solidFill>
-                <a:latin typeface="Calibri" pitchFamily="34" charset="0"/>
-                <a:ea typeface="Calibri" pitchFamily="34" charset="-122"/>
-                <a:cs typeface="Calibri" pitchFamily="34" charset="-120"/>
-              </a:rPr>
-              <a:t>показ → переход</a:t>
-            </a:r>
-            <a:endParaRPr lang="en-US" sz="1300" dirty="0"/>
-          </a:p>
-        </p:txBody>
-      </p:sp>
-      <p:sp>
-        <p:nvSpPr>
-          <p:cNvPr id="7" name="Text 5"/>
-          <p:cNvSpPr txBox="1"/>
-          <p:nvPr/>
-        </p:nvSpPr>
-        <p:spPr>
-          <a:xfrm>
-            <a:off x="804672" y="2816352"/>
-            <a:ext cx="3017520" cy="502920"/>
-          </a:xfrm>
-          <a:prstGeom prst="rect">
-            <a:avLst/>
-          </a:prstGeom>
-          <a:noFill/>
-          <a:ln/>
-        </p:spPr>
-        <p:txBody>
-          <a:bodyPr wrap="square" lIns="0" tIns="0" rIns="0" bIns="0" rtlCol="0" anchor="ctr"/>
-          <a:lstStyle/>
-          <a:p>
-            <a:pPr indent="0" marL="0">
-              <a:buNone/>
-            </a:pPr>
-            <a:r>
-              <a:rPr lang="en-US" sz="1100" dirty="0">
-                <a:solidFill>
-                  <a:srgbClr val="6B7280"/>
-                </a:solidFill>
-                <a:latin typeface="Calibri" pitchFamily="34" charset="0"/>
-                <a:ea typeface="Calibri" pitchFamily="34" charset="-122"/>
-                <a:cs typeface="Calibri" pitchFamily="34" charset="-120"/>
-              </a:rPr>
-              <a:t>386 000 показов дали 5 560 переходов</a:t>
-            </a:r>
-            <a:endParaRPr lang="en-US" sz="1100" dirty="0"/>
-          </a:p>
-        </p:txBody>
-      </p:sp>
-      <p:sp>
-        <p:nvSpPr>
-          <p:cNvPr id="8" name="Shape 6"/>
+              <a:t>9% → 20%</a:t>
+            </a:r>
+            <a:endParaRPr lang="en-US" sz="1600" dirty="0"/>
+          </a:p>
+        </p:txBody>
+      </p:sp>
+      <p:sp>
+        <p:nvSpPr>
+          <p:cNvPr id="9" name="Shape 5"/>
           <p:cNvSpPr/>
           <p:nvPr/>
         </p:nvSpPr>
         <p:spPr>
           <a:xfrm>
-            <a:off x="4315968" y="1645920"/>
-            <a:ext cx="3529584" cy="1783080"/>
+            <a:off x="2788920" y="5349240"/>
+            <a:ext cx="2103120" cy="914400"/>
           </a:xfrm>
           <a:prstGeom prst="roundRect">
             <a:avLst>
-              <a:gd name="adj" fmla="val 3077"/>
+              <a:gd name="adj" fmla="val 6000"/>
             </a:avLst>
           </a:prstGeom>
           <a:solidFill>
@@ -13251,14 +16152,14 @@
       </p:sp>
       <p:sp>
         <p:nvSpPr>
-          <p:cNvPr id="9" name="Text 7"/>
-          <p:cNvSpPr txBox="1"/>
-          <p:nvPr/>
-        </p:nvSpPr>
-        <p:spPr>
-          <a:xfrm>
-            <a:off x="4572000" y="1828800"/>
-            <a:ext cx="3017520" cy="658368"/>
+          <p:cNvPr id="10" name="Text 6"/>
+          <p:cNvSpPr txBox="1"/>
+          <p:nvPr/>
+        </p:nvSpPr>
+        <p:spPr>
+          <a:xfrm>
+            <a:off x="2971800" y="5477256"/>
+            <a:ext cx="1737360" cy="274320"/>
           </a:xfrm>
           <a:prstGeom prst="rect">
             <a:avLst/>
@@ -13274,30 +16175,30 @@
               <a:buNone/>
             </a:pPr>
             <a:r>
-              <a:rPr lang="en-US" sz="3200" b="1" dirty="0">
-                <a:solidFill>
-                  <a:srgbClr val="14213D"/>
-                </a:solidFill>
-                <a:latin typeface="Calibri" pitchFamily="34" charset="0"/>
-                <a:ea typeface="Calibri" pitchFamily="34" charset="-122"/>
-                <a:cs typeface="Calibri" pitchFamily="34" charset="-120"/>
-              </a:rPr>
-              <a:t>9,14%</a:t>
-            </a:r>
-            <a:endParaRPr lang="en-US" sz="3200" dirty="0"/>
-          </a:p>
-        </p:txBody>
-      </p:sp>
-      <p:sp>
-        <p:nvSpPr>
-          <p:cNvPr id="10" name="Text 8"/>
-          <p:cNvSpPr txBox="1"/>
-          <p:nvPr/>
-        </p:nvSpPr>
-        <p:spPr>
-          <a:xfrm>
-            <a:off x="4572000" y="2505456"/>
-            <a:ext cx="3017520" cy="292608"/>
+              <a:rPr lang="en-US" sz="1200" b="1" dirty="0">
+                <a:solidFill>
+                  <a:srgbClr val="6B7280"/>
+                </a:solidFill>
+                <a:latin typeface="Calibri" pitchFamily="34" charset="0"/>
+                <a:ea typeface="Calibri" pitchFamily="34" charset="-122"/>
+                <a:cs typeface="Calibri" pitchFamily="34" charset="-120"/>
+              </a:rPr>
+              <a:t>директ</a:t>
+            </a:r>
+            <a:endParaRPr lang="en-US" sz="1200" dirty="0"/>
+          </a:p>
+        </p:txBody>
+      </p:sp>
+      <p:sp>
+        <p:nvSpPr>
+          <p:cNvPr id="11" name="Text 7"/>
+          <p:cNvSpPr txBox="1"/>
+          <p:nvPr/>
+        </p:nvSpPr>
+        <p:spPr>
+          <a:xfrm>
+            <a:off x="2971800" y="5788152"/>
+            <a:ext cx="1737360" cy="347472"/>
           </a:xfrm>
           <a:prstGeom prst="rect">
             <a:avLst/>
@@ -13313,7 +16214,7 @@
               <a:buNone/>
             </a:pPr>
             <a:r>
-              <a:rPr lang="en-US" sz="1300" b="1" dirty="0">
+              <a:rPr lang="en-US" sz="1600" b="1" dirty="0">
                 <a:solidFill>
                   <a:srgbClr val="1F2937"/>
                 </a:solidFill>
@@ -13321,65 +16222,26 @@
                 <a:ea typeface="Calibri" pitchFamily="34" charset="-122"/>
                 <a:cs typeface="Calibri" pitchFamily="34" charset="-120"/>
               </a:rPr>
-              <a:t>переход → корзина</a:t>
-            </a:r>
-            <a:endParaRPr lang="en-US" sz="1300" dirty="0"/>
-          </a:p>
-        </p:txBody>
-      </p:sp>
-      <p:sp>
-        <p:nvSpPr>
-          <p:cNvPr id="11" name="Text 9"/>
-          <p:cNvSpPr txBox="1"/>
-          <p:nvPr/>
-        </p:nvSpPr>
-        <p:spPr>
-          <a:xfrm>
-            <a:off x="4572000" y="2816352"/>
-            <a:ext cx="3017520" cy="502920"/>
-          </a:xfrm>
-          <a:prstGeom prst="rect">
-            <a:avLst/>
-          </a:prstGeom>
-          <a:noFill/>
-          <a:ln/>
-        </p:spPr>
-        <p:txBody>
-          <a:bodyPr wrap="square" lIns="0" tIns="0" rIns="0" bIns="0" rtlCol="0" anchor="ctr"/>
-          <a:lstStyle/>
-          <a:p>
-            <a:pPr indent="0" marL="0">
-              <a:buNone/>
-            </a:pPr>
-            <a:r>
-              <a:rPr lang="en-US" sz="1100" dirty="0">
-                <a:solidFill>
-                  <a:srgbClr val="6B7280"/>
-                </a:solidFill>
-                <a:latin typeface="Calibri" pitchFamily="34" charset="0"/>
-                <a:ea typeface="Calibri" pitchFamily="34" charset="-122"/>
-                <a:cs typeface="Calibri" pitchFamily="34" charset="-120"/>
-              </a:rPr>
-              <a:t>из 5 560 в корзину попали 508</a:t>
-            </a:r>
-            <a:endParaRPr lang="en-US" sz="1100" dirty="0"/>
-          </a:p>
-        </p:txBody>
-      </p:sp>
-      <p:sp>
-        <p:nvSpPr>
-          <p:cNvPr id="12" name="Shape 10"/>
+              <a:t>22% → 19%</a:t>
+            </a:r>
+            <a:endParaRPr lang="en-US" sz="1600" dirty="0"/>
+          </a:p>
+        </p:txBody>
+      </p:sp>
+      <p:sp>
+        <p:nvSpPr>
+          <p:cNvPr id="12" name="Shape 8"/>
           <p:cNvSpPr/>
           <p:nvPr/>
         </p:nvSpPr>
         <p:spPr>
           <a:xfrm>
-            <a:off x="8083296" y="1645920"/>
-            <a:ext cx="3529584" cy="1783080"/>
+            <a:off x="5029200" y="5349240"/>
+            <a:ext cx="2103120" cy="914400"/>
           </a:xfrm>
           <a:prstGeom prst="roundRect">
             <a:avLst>
-              <a:gd name="adj" fmla="val 3077"/>
+              <a:gd name="adj" fmla="val 6000"/>
             </a:avLst>
           </a:prstGeom>
           <a:solidFill>
@@ -13390,14 +16252,14 @@
       </p:sp>
       <p:sp>
         <p:nvSpPr>
-          <p:cNvPr id="13" name="Text 11"/>
-          <p:cNvSpPr txBox="1"/>
-          <p:nvPr/>
-        </p:nvSpPr>
-        <p:spPr>
-          <a:xfrm>
-            <a:off x="8339328" y="1828800"/>
-            <a:ext cx="3017520" cy="658368"/>
+          <p:cNvPr id="13" name="Text 9"/>
+          <p:cNvSpPr txBox="1"/>
+          <p:nvPr/>
+        </p:nvSpPr>
+        <p:spPr>
+          <a:xfrm>
+            <a:off x="5212080" y="5477256"/>
+            <a:ext cx="1737360" cy="274320"/>
           </a:xfrm>
           <a:prstGeom prst="rect">
             <a:avLst/>
@@ -13413,7 +16275,246 @@
               <a:buNone/>
             </a:pPr>
             <a:r>
-              <a:rPr lang="en-US" sz="3200" b="1" dirty="0">
+              <a:rPr lang="en-US" sz="1200" b="1" dirty="0">
+                <a:solidFill>
+                  <a:srgbClr val="6B7280"/>
+                </a:solidFill>
+                <a:latin typeface="Calibri" pitchFamily="34" charset="0"/>
+                <a:ea typeface="Calibri" pitchFamily="34" charset="-122"/>
+                <a:cs typeface="Calibri" pitchFamily="34" charset="-120"/>
+              </a:rPr>
+              <a:t>LaModa</a:t>
+            </a:r>
+            <a:endParaRPr lang="en-US" sz="1200" dirty="0"/>
+          </a:p>
+        </p:txBody>
+      </p:sp>
+      <p:sp>
+        <p:nvSpPr>
+          <p:cNvPr id="14" name="Text 10"/>
+          <p:cNvSpPr txBox="1"/>
+          <p:nvPr/>
+        </p:nvSpPr>
+        <p:spPr>
+          <a:xfrm>
+            <a:off x="5212080" y="5788152"/>
+            <a:ext cx="1737360" cy="347472"/>
+          </a:xfrm>
+          <a:prstGeom prst="rect">
+            <a:avLst/>
+          </a:prstGeom>
+          <a:noFill/>
+          <a:ln/>
+        </p:spPr>
+        <p:txBody>
+          <a:bodyPr wrap="square" lIns="0" tIns="0" rIns="0" bIns="0" rtlCol="0" anchor="ctr"/>
+          <a:lstStyle/>
+          <a:p>
+            <a:pPr indent="0" marL="0">
+              <a:buNone/>
+            </a:pPr>
+            <a:r>
+              <a:rPr lang="en-US" sz="1600" b="1" dirty="0">
+                <a:solidFill>
+                  <a:srgbClr val="14213D"/>
+                </a:solidFill>
+                <a:latin typeface="Calibri" pitchFamily="34" charset="0"/>
+                <a:ea typeface="Calibri" pitchFamily="34" charset="-122"/>
+                <a:cs typeface="Calibri" pitchFamily="34" charset="-120"/>
+              </a:rPr>
+              <a:t>22% → 26%</a:t>
+            </a:r>
+            <a:endParaRPr lang="en-US" sz="1600" dirty="0"/>
+          </a:p>
+        </p:txBody>
+      </p:sp>
+      <p:sp>
+        <p:nvSpPr>
+          <p:cNvPr id="15" name="Shape 11"/>
+          <p:cNvSpPr/>
+          <p:nvPr/>
+        </p:nvSpPr>
+        <p:spPr>
+          <a:xfrm>
+            <a:off x="7269480" y="5349240"/>
+            <a:ext cx="2103120" cy="914400"/>
+          </a:xfrm>
+          <a:prstGeom prst="roundRect">
+            <a:avLst>
+              <a:gd name="adj" fmla="val 6000"/>
+            </a:avLst>
+          </a:prstGeom>
+          <a:solidFill>
+            <a:srgbClr val="F1F2F4"/>
+          </a:solidFill>
+          <a:ln/>
+        </p:spPr>
+      </p:sp>
+      <p:sp>
+        <p:nvSpPr>
+          <p:cNvPr id="16" name="Text 12"/>
+          <p:cNvSpPr txBox="1"/>
+          <p:nvPr/>
+        </p:nvSpPr>
+        <p:spPr>
+          <a:xfrm>
+            <a:off x="7452360" y="5477256"/>
+            <a:ext cx="1737360" cy="274320"/>
+          </a:xfrm>
+          <a:prstGeom prst="rect">
+            <a:avLst/>
+          </a:prstGeom>
+          <a:noFill/>
+          <a:ln/>
+        </p:spPr>
+        <p:txBody>
+          <a:bodyPr wrap="square" lIns="0" tIns="0" rIns="0" bIns="0" rtlCol="0" anchor="ctr"/>
+          <a:lstStyle/>
+          <a:p>
+            <a:pPr indent="0" marL="0">
+              <a:buNone/>
+            </a:pPr>
+            <a:r>
+              <a:rPr lang="en-US" sz="1200" b="1" dirty="0">
+                <a:solidFill>
+                  <a:srgbClr val="6B7280"/>
+                </a:solidFill>
+                <a:latin typeface="Calibri" pitchFamily="34" charset="0"/>
+                <a:ea typeface="Calibri" pitchFamily="34" charset="-122"/>
+                <a:cs typeface="Calibri" pitchFamily="34" charset="-120"/>
+              </a:rPr>
+              <a:t>Блогеры</a:t>
+            </a:r>
+            <a:endParaRPr lang="en-US" sz="1200" dirty="0"/>
+          </a:p>
+        </p:txBody>
+      </p:sp>
+      <p:sp>
+        <p:nvSpPr>
+          <p:cNvPr id="17" name="Text 13"/>
+          <p:cNvSpPr txBox="1"/>
+          <p:nvPr/>
+        </p:nvSpPr>
+        <p:spPr>
+          <a:xfrm>
+            <a:off x="7452360" y="5788152"/>
+            <a:ext cx="1737360" cy="347472"/>
+          </a:xfrm>
+          <a:prstGeom prst="rect">
+            <a:avLst/>
+          </a:prstGeom>
+          <a:noFill/>
+          <a:ln/>
+        </p:spPr>
+        <p:txBody>
+          <a:bodyPr wrap="square" lIns="0" tIns="0" rIns="0" bIns="0" rtlCol="0" anchor="ctr"/>
+          <a:lstStyle/>
+          <a:p>
+            <a:pPr indent="0" marL="0">
+              <a:buNone/>
+            </a:pPr>
+            <a:r>
+              <a:rPr lang="en-US" sz="1600" b="1" dirty="0">
+                <a:solidFill>
+                  <a:srgbClr val="1F2937"/>
+                </a:solidFill>
+                <a:latin typeface="Calibri" pitchFamily="34" charset="0"/>
+                <a:ea typeface="Calibri" pitchFamily="34" charset="-122"/>
+                <a:cs typeface="Calibri" pitchFamily="34" charset="-120"/>
+              </a:rPr>
+              <a:t>28% → 26%</a:t>
+            </a:r>
+            <a:endParaRPr lang="en-US" sz="1600" dirty="0"/>
+          </a:p>
+        </p:txBody>
+      </p:sp>
+      <p:sp>
+        <p:nvSpPr>
+          <p:cNvPr id="18" name="Shape 14"/>
+          <p:cNvSpPr/>
+          <p:nvPr/>
+        </p:nvSpPr>
+        <p:spPr>
+          <a:xfrm>
+            <a:off x="9509760" y="5349240"/>
+            <a:ext cx="2103120" cy="914400"/>
+          </a:xfrm>
+          <a:prstGeom prst="roundRect">
+            <a:avLst>
+              <a:gd name="adj" fmla="val 6000"/>
+            </a:avLst>
+          </a:prstGeom>
+          <a:solidFill>
+            <a:srgbClr val="F1F2F4"/>
+          </a:solidFill>
+          <a:ln/>
+        </p:spPr>
+      </p:sp>
+      <p:sp>
+        <p:nvSpPr>
+          <p:cNvPr id="19" name="Text 15"/>
+          <p:cNvSpPr txBox="1"/>
+          <p:nvPr/>
+        </p:nvSpPr>
+        <p:spPr>
+          <a:xfrm>
+            <a:off x="9692640" y="5477256"/>
+            <a:ext cx="1737360" cy="274320"/>
+          </a:xfrm>
+          <a:prstGeom prst="rect">
+            <a:avLst/>
+          </a:prstGeom>
+          <a:noFill/>
+          <a:ln/>
+        </p:spPr>
+        <p:txBody>
+          <a:bodyPr wrap="square" lIns="0" tIns="0" rIns="0" bIns="0" rtlCol="0" anchor="ctr"/>
+          <a:lstStyle/>
+          <a:p>
+            <a:pPr indent="0" marL="0">
+              <a:buNone/>
+            </a:pPr>
+            <a:r>
+              <a:rPr lang="en-US" sz="1200" b="1" dirty="0">
+                <a:solidFill>
+                  <a:srgbClr val="6B7280"/>
+                </a:solidFill>
+                <a:latin typeface="Calibri" pitchFamily="34" charset="0"/>
+                <a:ea typeface="Calibri" pitchFamily="34" charset="-122"/>
+                <a:cs typeface="Calibri" pitchFamily="34" charset="-120"/>
+              </a:rPr>
+              <a:t>ВК</a:t>
+            </a:r>
+            <a:endParaRPr lang="en-US" sz="1200" dirty="0"/>
+          </a:p>
+        </p:txBody>
+      </p:sp>
+      <p:sp>
+        <p:nvSpPr>
+          <p:cNvPr id="20" name="Text 16"/>
+          <p:cNvSpPr txBox="1"/>
+          <p:nvPr/>
+        </p:nvSpPr>
+        <p:spPr>
+          <a:xfrm>
+            <a:off x="9692640" y="5788152"/>
+            <a:ext cx="1737360" cy="347472"/>
+          </a:xfrm>
+          <a:prstGeom prst="rect">
+            <a:avLst/>
+          </a:prstGeom>
+          <a:noFill/>
+          <a:ln/>
+        </p:spPr>
+        <p:txBody>
+          <a:bodyPr wrap="square" lIns="0" tIns="0" rIns="0" bIns="0" rtlCol="0" anchor="ctr"/>
+          <a:lstStyle/>
+          <a:p>
+            <a:pPr indent="0" marL="0">
+              <a:buNone/>
+            </a:pPr>
+            <a:r>
+              <a:rPr lang="en-US" sz="1600" b="1" dirty="0">
                 <a:solidFill>
                   <a:srgbClr val="C1121F"/>
                 </a:solidFill>
@@ -13421,555 +16522,9 @@
                 <a:ea typeface="Calibri" pitchFamily="34" charset="-122"/>
                 <a:cs typeface="Calibri" pitchFamily="34" charset="-120"/>
               </a:rPr>
-              <a:t>16,14%</a:t>
-            </a:r>
-            <a:endParaRPr lang="en-US" sz="3200" dirty="0"/>
-          </a:p>
-        </p:txBody>
-      </p:sp>
-      <p:sp>
-        <p:nvSpPr>
-          <p:cNvPr id="14" name="Text 12"/>
-          <p:cNvSpPr txBox="1"/>
-          <p:nvPr/>
-        </p:nvSpPr>
-        <p:spPr>
-          <a:xfrm>
-            <a:off x="8339328" y="2505456"/>
-            <a:ext cx="3017520" cy="292608"/>
-          </a:xfrm>
-          <a:prstGeom prst="rect">
-            <a:avLst/>
-          </a:prstGeom>
-          <a:noFill/>
-          <a:ln/>
-        </p:spPr>
-        <p:txBody>
-          <a:bodyPr wrap="square" lIns="0" tIns="0" rIns="0" bIns="0" rtlCol="0" anchor="ctr"/>
-          <a:lstStyle/>
-          <a:p>
-            <a:pPr indent="0" marL="0">
-              <a:buNone/>
-            </a:pPr>
-            <a:r>
-              <a:rPr lang="en-US" sz="1300" b="1" dirty="0">
-                <a:solidFill>
-                  <a:srgbClr val="1F2937"/>
-                </a:solidFill>
-                <a:latin typeface="Calibri" pitchFamily="34" charset="0"/>
-                <a:ea typeface="Calibri" pitchFamily="34" charset="-122"/>
-                <a:cs typeface="Calibri" pitchFamily="34" charset="-120"/>
-              </a:rPr>
-              <a:t>корзина → оплата</a:t>
-            </a:r>
-            <a:endParaRPr lang="en-US" sz="1300" dirty="0"/>
-          </a:p>
-        </p:txBody>
-      </p:sp>
-      <p:sp>
-        <p:nvSpPr>
-          <p:cNvPr id="15" name="Text 13"/>
-          <p:cNvSpPr txBox="1"/>
-          <p:nvPr/>
-        </p:nvSpPr>
-        <p:spPr>
-          <a:xfrm>
-            <a:off x="8339328" y="2816352"/>
-            <a:ext cx="3017520" cy="502920"/>
-          </a:xfrm>
-          <a:prstGeom prst="rect">
-            <a:avLst/>
-          </a:prstGeom>
-          <a:noFill/>
-          <a:ln/>
-        </p:spPr>
-        <p:txBody>
-          <a:bodyPr wrap="square" lIns="0" tIns="0" rIns="0" bIns="0" rtlCol="0" anchor="ctr"/>
-          <a:lstStyle/>
-          <a:p>
-            <a:pPr indent="0" marL="0">
-              <a:buNone/>
-            </a:pPr>
-            <a:r>
-              <a:rPr lang="en-US" sz="1100" dirty="0">
-                <a:solidFill>
-                  <a:srgbClr val="6B7280"/>
-                </a:solidFill>
-                <a:latin typeface="Calibri" pitchFamily="34" charset="0"/>
-                <a:ea typeface="Calibri" pitchFamily="34" charset="-122"/>
-                <a:cs typeface="Calibri" pitchFamily="34" charset="-120"/>
-              </a:rPr>
-              <a:t>из 508 корзин оплачены 82</a:t>
-            </a:r>
-            <a:endParaRPr lang="en-US" sz="1100" dirty="0"/>
-          </a:p>
-        </p:txBody>
-      </p:sp>
-      <p:sp>
-        <p:nvSpPr>
-          <p:cNvPr id="16" name="Text 14"/>
-          <p:cNvSpPr txBox="1"/>
-          <p:nvPr/>
-        </p:nvSpPr>
-        <p:spPr>
-          <a:xfrm>
-            <a:off x="548640" y="3749040"/>
-            <a:ext cx="11064240" cy="365760"/>
-          </a:xfrm>
-          <a:prstGeom prst="rect">
-            <a:avLst/>
-          </a:prstGeom>
-          <a:noFill/>
-          <a:ln/>
-        </p:spPr>
-        <p:txBody>
-          <a:bodyPr wrap="square" lIns="0" tIns="0" rIns="0" bIns="0" rtlCol="0" anchor="ctr"/>
-          <a:lstStyle/>
-          <a:p>
-            <a:pPr indent="0" marL="0">
-              <a:buNone/>
-            </a:pPr>
-            <a:r>
-              <a:rPr lang="en-US" sz="1600" b="1" dirty="0">
-                <a:solidFill>
-                  <a:srgbClr val="14213D"/>
-                </a:solidFill>
-                <a:latin typeface="Calibri" pitchFamily="34" charset="0"/>
-                <a:ea typeface="Calibri" pitchFamily="34" charset="-122"/>
-                <a:cs typeface="Calibri" pitchFamily="34" charset="-120"/>
-              </a:rPr>
-              <a:t>Узкое место по каналам</a:t>
+              <a:t>19% → 9%</a:t>
             </a:r>
             <a:endParaRPr lang="en-US" sz="1600" dirty="0"/>
-          </a:p>
-        </p:txBody>
-      </p:sp>
-      <p:sp>
-        <p:nvSpPr>
-          <p:cNvPr id="17" name="Text 15"/>
-          <p:cNvSpPr txBox="1"/>
-          <p:nvPr/>
-        </p:nvSpPr>
-        <p:spPr>
-          <a:xfrm>
-            <a:off x="548640" y="4206240"/>
-            <a:ext cx="1371600" cy="310896"/>
-          </a:xfrm>
-          <a:prstGeom prst="rect">
-            <a:avLst/>
-          </a:prstGeom>
-          <a:noFill/>
-          <a:ln/>
-        </p:spPr>
-        <p:txBody>
-          <a:bodyPr wrap="square" lIns="0" tIns="0" rIns="0" bIns="0" rtlCol="0" anchor="ctr"/>
-          <a:lstStyle/>
-          <a:p>
-            <a:pPr indent="0" marL="0">
-              <a:buNone/>
-            </a:pPr>
-            <a:r>
-              <a:rPr lang="en-US" sz="1300" b="1" dirty="0">
-                <a:solidFill>
-                  <a:srgbClr val="14213D"/>
-                </a:solidFill>
-                <a:latin typeface="Calibri" pitchFamily="34" charset="0"/>
-                <a:ea typeface="Calibri" pitchFamily="34" charset="-122"/>
-                <a:cs typeface="Calibri" pitchFamily="34" charset="-120"/>
-              </a:rPr>
-              <a:t>сайт</a:t>
-            </a:r>
-            <a:endParaRPr lang="en-US" sz="1300" dirty="0"/>
-          </a:p>
-        </p:txBody>
-      </p:sp>
-      <p:sp>
-        <p:nvSpPr>
-          <p:cNvPr id="18" name="Text 16"/>
-          <p:cNvSpPr txBox="1"/>
-          <p:nvPr/>
-        </p:nvSpPr>
-        <p:spPr>
-          <a:xfrm>
-            <a:off x="1965960" y="4206240"/>
-            <a:ext cx="9601200" cy="310896"/>
-          </a:xfrm>
-          <a:prstGeom prst="rect">
-            <a:avLst/>
-          </a:prstGeom>
-          <a:noFill/>
-          <a:ln/>
-        </p:spPr>
-        <p:txBody>
-          <a:bodyPr wrap="square" lIns="0" tIns="0" rIns="0" bIns="0" rtlCol="0" anchor="ctr"/>
-          <a:lstStyle/>
-          <a:p>
-            <a:pPr indent="0" marL="0">
-              <a:buNone/>
-            </a:pPr>
-            <a:r>
-              <a:rPr lang="en-US" sz="1300" dirty="0">
-                <a:solidFill>
-                  <a:srgbClr val="1F2937"/>
-                </a:solidFill>
-                <a:latin typeface="Calibri" pitchFamily="34" charset="0"/>
-                <a:ea typeface="Calibri" pitchFamily="34" charset="-122"/>
-                <a:cs typeface="Calibri" pitchFamily="34" charset="-120"/>
-              </a:rPr>
-              <a:t>вход: 1% из показов — мы в выдаче, но не в топе</a:t>
-            </a:r>
-            <a:endParaRPr lang="en-US" sz="1300" dirty="0"/>
-          </a:p>
-        </p:txBody>
-      </p:sp>
-      <p:sp>
-        <p:nvSpPr>
-          <p:cNvPr id="19" name="Text 17"/>
-          <p:cNvSpPr txBox="1"/>
-          <p:nvPr/>
-        </p:nvSpPr>
-        <p:spPr>
-          <a:xfrm>
-            <a:off x="548640" y="4590288"/>
-            <a:ext cx="1371600" cy="310896"/>
-          </a:xfrm>
-          <a:prstGeom prst="rect">
-            <a:avLst/>
-          </a:prstGeom>
-          <a:noFill/>
-          <a:ln/>
-        </p:spPr>
-        <p:txBody>
-          <a:bodyPr wrap="square" lIns="0" tIns="0" rIns="0" bIns="0" rtlCol="0" anchor="ctr"/>
-          <a:lstStyle/>
-          <a:p>
-            <a:pPr indent="0" marL="0">
-              <a:buNone/>
-            </a:pPr>
-            <a:r>
-              <a:rPr lang="en-US" sz="1300" b="1" dirty="0">
-                <a:solidFill>
-                  <a:srgbClr val="14213D"/>
-                </a:solidFill>
-                <a:latin typeface="Calibri" pitchFamily="34" charset="0"/>
-                <a:ea typeface="Calibri" pitchFamily="34" charset="-122"/>
-                <a:cs typeface="Calibri" pitchFamily="34" charset="-120"/>
-              </a:rPr>
-              <a:t>директ</a:t>
-            </a:r>
-            <a:endParaRPr lang="en-US" sz="1300" dirty="0"/>
-          </a:p>
-        </p:txBody>
-      </p:sp>
-      <p:sp>
-        <p:nvSpPr>
-          <p:cNvPr id="20" name="Text 18"/>
-          <p:cNvSpPr txBox="1"/>
-          <p:nvPr/>
-        </p:nvSpPr>
-        <p:spPr>
-          <a:xfrm>
-            <a:off x="1965960" y="4590288"/>
-            <a:ext cx="9601200" cy="310896"/>
-          </a:xfrm>
-          <a:prstGeom prst="rect">
-            <a:avLst/>
-          </a:prstGeom>
-          <a:noFill/>
-          <a:ln/>
-        </p:spPr>
-        <p:txBody>
-          <a:bodyPr wrap="square" lIns="0" tIns="0" rIns="0" bIns="0" rtlCol="0" anchor="ctr"/>
-          <a:lstStyle/>
-          <a:p>
-            <a:pPr indent="0" marL="0">
-              <a:buNone/>
-            </a:pPr>
-            <a:r>
-              <a:rPr lang="en-US" sz="1300" dirty="0">
-                <a:solidFill>
-                  <a:srgbClr val="1F2937"/>
-                </a:solidFill>
-                <a:latin typeface="Calibri" pitchFamily="34" charset="0"/>
-                <a:ea typeface="Calibri" pitchFamily="34" charset="-122"/>
-                <a:cs typeface="Calibri" pitchFamily="34" charset="-120"/>
-              </a:rPr>
-              <a:t>корзина 8% и оплата 12,5% — самая холодная аудитория</a:t>
-            </a:r>
-            <a:endParaRPr lang="en-US" sz="1300" dirty="0"/>
-          </a:p>
-        </p:txBody>
-      </p:sp>
-      <p:sp>
-        <p:nvSpPr>
-          <p:cNvPr id="21" name="Text 19"/>
-          <p:cNvSpPr txBox="1"/>
-          <p:nvPr/>
-        </p:nvSpPr>
-        <p:spPr>
-          <a:xfrm>
-            <a:off x="548640" y="4974336"/>
-            <a:ext cx="1371600" cy="310896"/>
-          </a:xfrm>
-          <a:prstGeom prst="rect">
-            <a:avLst/>
-          </a:prstGeom>
-          <a:noFill/>
-          <a:ln/>
-        </p:spPr>
-        <p:txBody>
-          <a:bodyPr wrap="square" lIns="0" tIns="0" rIns="0" bIns="0" rtlCol="0" anchor="ctr"/>
-          <a:lstStyle/>
-          <a:p>
-            <a:pPr indent="0" marL="0">
-              <a:buNone/>
-            </a:pPr>
-            <a:r>
-              <a:rPr lang="en-US" sz="1300" b="1" dirty="0">
-                <a:solidFill>
-                  <a:srgbClr val="14213D"/>
-                </a:solidFill>
-                <a:latin typeface="Calibri" pitchFamily="34" charset="0"/>
-                <a:ea typeface="Calibri" pitchFamily="34" charset="-122"/>
-                <a:cs typeface="Calibri" pitchFamily="34" charset="-120"/>
-              </a:rPr>
-              <a:t>LaModa</a:t>
-            </a:r>
-            <a:endParaRPr lang="en-US" sz="1300" dirty="0"/>
-          </a:p>
-        </p:txBody>
-      </p:sp>
-      <p:sp>
-        <p:nvSpPr>
-          <p:cNvPr id="22" name="Text 20"/>
-          <p:cNvSpPr txBox="1"/>
-          <p:nvPr/>
-        </p:nvSpPr>
-        <p:spPr>
-          <a:xfrm>
-            <a:off x="1965960" y="4974336"/>
-            <a:ext cx="9601200" cy="310896"/>
-          </a:xfrm>
-          <a:prstGeom prst="rect">
-            <a:avLst/>
-          </a:prstGeom>
-          <a:noFill/>
-          <a:ln/>
-        </p:spPr>
-        <p:txBody>
-          <a:bodyPr wrap="square" lIns="0" tIns="0" rIns="0" bIns="0" rtlCol="0" anchor="ctr"/>
-          <a:lstStyle/>
-          <a:p>
-            <a:pPr indent="0" marL="0">
-              <a:buNone/>
-            </a:pPr>
-            <a:r>
-              <a:rPr lang="en-US" sz="1300" dirty="0">
-                <a:solidFill>
-                  <a:srgbClr val="1F2937"/>
-                </a:solidFill>
-                <a:latin typeface="Calibri" pitchFamily="34" charset="0"/>
-                <a:ea typeface="Calibri" pitchFamily="34" charset="-122"/>
-                <a:cs typeface="Calibri" pitchFamily="34" charset="-120"/>
-              </a:rPr>
-              <a:t>узких мест нет, ограничение — комиссия</a:t>
-            </a:r>
-            <a:endParaRPr lang="en-US" sz="1300" dirty="0"/>
-          </a:p>
-        </p:txBody>
-      </p:sp>
-      <p:sp>
-        <p:nvSpPr>
-          <p:cNvPr id="23" name="Text 21"/>
-          <p:cNvSpPr txBox="1"/>
-          <p:nvPr/>
-        </p:nvSpPr>
-        <p:spPr>
-          <a:xfrm>
-            <a:off x="548640" y="5358384"/>
-            <a:ext cx="1371600" cy="310896"/>
-          </a:xfrm>
-          <a:prstGeom prst="rect">
-            <a:avLst/>
-          </a:prstGeom>
-          <a:noFill/>
-          <a:ln/>
-        </p:spPr>
-        <p:txBody>
-          <a:bodyPr wrap="square" lIns="0" tIns="0" rIns="0" bIns="0" rtlCol="0" anchor="ctr"/>
-          <a:lstStyle/>
-          <a:p>
-            <a:pPr indent="0" marL="0">
-              <a:buNone/>
-            </a:pPr>
-            <a:r>
-              <a:rPr lang="en-US" sz="1300" b="1" dirty="0">
-                <a:solidFill>
-                  <a:srgbClr val="14213D"/>
-                </a:solidFill>
-                <a:latin typeface="Calibri" pitchFamily="34" charset="0"/>
-                <a:ea typeface="Calibri" pitchFamily="34" charset="-122"/>
-                <a:cs typeface="Calibri" pitchFamily="34" charset="-120"/>
-              </a:rPr>
-              <a:t>Блогеры</a:t>
-            </a:r>
-            <a:endParaRPr lang="en-US" sz="1300" dirty="0"/>
-          </a:p>
-        </p:txBody>
-      </p:sp>
-      <p:sp>
-        <p:nvSpPr>
-          <p:cNvPr id="24" name="Text 22"/>
-          <p:cNvSpPr txBox="1"/>
-          <p:nvPr/>
-        </p:nvSpPr>
-        <p:spPr>
-          <a:xfrm>
-            <a:off x="1965960" y="5358384"/>
-            <a:ext cx="9601200" cy="310896"/>
-          </a:xfrm>
-          <a:prstGeom prst="rect">
-            <a:avLst/>
-          </a:prstGeom>
-          <a:noFill/>
-          <a:ln/>
-        </p:spPr>
-        <p:txBody>
-          <a:bodyPr wrap="square" lIns="0" tIns="0" rIns="0" bIns="0" rtlCol="0" anchor="ctr"/>
-          <a:lstStyle/>
-          <a:p>
-            <a:pPr indent="0" marL="0">
-              <a:buNone/>
-            </a:pPr>
-            <a:r>
-              <a:rPr lang="en-US" sz="1300" dirty="0">
-                <a:solidFill>
-                  <a:srgbClr val="1F2937"/>
-                </a:solidFill>
-                <a:latin typeface="Calibri" pitchFamily="34" charset="0"/>
-                <a:ea typeface="Calibri" pitchFamily="34" charset="-122"/>
-                <a:cs typeface="Calibri" pitchFamily="34" charset="-120"/>
-              </a:rPr>
-              <a:t>оплата 12,5%: доверие блогеру ≠ доверие бренду</a:t>
-            </a:r>
-            <a:endParaRPr lang="en-US" sz="1300" dirty="0"/>
-          </a:p>
-        </p:txBody>
-      </p:sp>
-      <p:sp>
-        <p:nvSpPr>
-          <p:cNvPr id="25" name="Text 23"/>
-          <p:cNvSpPr txBox="1"/>
-          <p:nvPr/>
-        </p:nvSpPr>
-        <p:spPr>
-          <a:xfrm>
-            <a:off x="548640" y="5742432"/>
-            <a:ext cx="1371600" cy="310896"/>
-          </a:xfrm>
-          <a:prstGeom prst="rect">
-            <a:avLst/>
-          </a:prstGeom>
-          <a:noFill/>
-          <a:ln/>
-        </p:spPr>
-        <p:txBody>
-          <a:bodyPr wrap="square" lIns="0" tIns="0" rIns="0" bIns="0" rtlCol="0" anchor="ctr"/>
-          <a:lstStyle/>
-          <a:p>
-            <a:pPr indent="0" marL="0">
-              <a:buNone/>
-            </a:pPr>
-            <a:r>
-              <a:rPr lang="en-US" sz="1300" b="1" dirty="0">
-                <a:solidFill>
-                  <a:srgbClr val="14213D"/>
-                </a:solidFill>
-                <a:latin typeface="Calibri" pitchFamily="34" charset="0"/>
-                <a:ea typeface="Calibri" pitchFamily="34" charset="-122"/>
-                <a:cs typeface="Calibri" pitchFamily="34" charset="-120"/>
-              </a:rPr>
-              <a:t>ВК</a:t>
-            </a:r>
-            <a:endParaRPr lang="en-US" sz="1300" dirty="0"/>
-          </a:p>
-        </p:txBody>
-      </p:sp>
-      <p:sp>
-        <p:nvSpPr>
-          <p:cNvPr id="26" name="Text 24"/>
-          <p:cNvSpPr txBox="1"/>
-          <p:nvPr/>
-        </p:nvSpPr>
-        <p:spPr>
-          <a:xfrm>
-            <a:off x="1965960" y="5742432"/>
-            <a:ext cx="9601200" cy="310896"/>
-          </a:xfrm>
-          <a:prstGeom prst="rect">
-            <a:avLst/>
-          </a:prstGeom>
-          <a:noFill/>
-          <a:ln/>
-        </p:spPr>
-        <p:txBody>
-          <a:bodyPr wrap="square" lIns="0" tIns="0" rIns="0" bIns="0" rtlCol="0" anchor="ctr"/>
-          <a:lstStyle/>
-          <a:p>
-            <a:pPr indent="0" marL="0">
-              <a:buNone/>
-            </a:pPr>
-            <a:r>
-              <a:rPr lang="en-US" sz="1300" dirty="0">
-                <a:solidFill>
-                  <a:srgbClr val="1F2937"/>
-                </a:solidFill>
-                <a:latin typeface="Calibri" pitchFamily="34" charset="0"/>
-                <a:ea typeface="Calibri" pitchFamily="34" charset="-122"/>
-                <a:cs typeface="Calibri" pitchFamily="34" charset="-120"/>
-              </a:rPr>
-              <a:t>вход 2,86% в корзину — в 7 раз хуже сайта</a:t>
-            </a:r>
-            <a:endParaRPr lang="en-US" sz="1300" dirty="0"/>
-          </a:p>
-        </p:txBody>
-      </p:sp>
-      <p:sp>
-        <p:nvSpPr>
-          <p:cNvPr id="27" name="Text 25"/>
-          <p:cNvSpPr txBox="1"/>
-          <p:nvPr/>
-        </p:nvSpPr>
-        <p:spPr>
-          <a:xfrm>
-            <a:off x="548640" y="6263640"/>
-            <a:ext cx="11064240" cy="365760"/>
-          </a:xfrm>
-          <a:prstGeom prst="rect">
-            <a:avLst/>
-          </a:prstGeom>
-          <a:noFill/>
-          <a:ln/>
-        </p:spPr>
-        <p:txBody>
-          <a:bodyPr wrap="square" lIns="0" tIns="0" rIns="0" bIns="0" rtlCol="0" anchor="ctr"/>
-          <a:lstStyle/>
-          <a:p>
-            <a:pPr indent="0" marL="0">
-              <a:buNone/>
-            </a:pPr>
-            <a:r>
-              <a:rPr lang="en-US" sz="1300" i="1" dirty="0">
-                <a:solidFill>
-                  <a:srgbClr val="6B7280"/>
-                </a:solidFill>
-                <a:latin typeface="Calibri" pitchFamily="34" charset="0"/>
-                <a:ea typeface="Calibri" pitchFamily="34" charset="-122"/>
-                <a:cs typeface="Calibri" pitchFamily="34" charset="-120"/>
-              </a:rPr>
-              <a:t>Более 80% собранных корзин не оплачиваются. +1 п.п. на этом шаге = +5 продаж в месяц без рубля рекламы.</a:t>
-            </a:r>
-            <a:endParaRPr lang="en-US" sz="1300" dirty="0"/>
           </a:p>
         </p:txBody>
       </p:sp>
